--- a/output/education/2026-03-27_medical-fee-revision-2026/medical-fee-revision-2026_slides_residents.pptx
+++ b/output/education/2026-03-27_medical-fee-revision-2026/medical-fee-revision-2026_slides_residents.pptx
@@ -3122,7 +3122,7 @@
           <a:noFill/>
         </p:spPr>
         <p:txBody>
-          <a:bodyPr wrap="square">
+          <a:bodyPr wrap="square" lIns="45720" rIns="45720" tIns="27432" bIns="27432">
             <a:spAutoFit/>
           </a:bodyPr>
           <a:lstStyle/>
@@ -3158,7 +3158,7 @@
           <a:noFill/>
         </p:spPr>
         <p:txBody>
-          <a:bodyPr wrap="square">
+          <a:bodyPr wrap="square" lIns="45720" rIns="45720" tIns="27432" bIns="27432">
             <a:spAutoFit/>
           </a:bodyPr>
           <a:lstStyle/>
@@ -3194,7 +3194,7 @@
           <a:noFill/>
         </p:spPr>
         <p:txBody>
-          <a:bodyPr wrap="square">
+          <a:bodyPr wrap="square" lIns="45720" rIns="45720" tIns="27432" bIns="27432">
             <a:spAutoFit/>
           </a:bodyPr>
           <a:lstStyle/>
@@ -3297,7 +3297,7 @@
                       </a:r>
                     </a:p>
                   </a:txBody>
-                  <a:tcPr>
+                  <a:tcPr marL="45720" marR="45720" marT="18288" marB="18288">
                     <a:solidFill>
                       <a:srgbClr val="0D2B3E"/>
                     </a:solidFill>
@@ -3321,7 +3321,7 @@
                       </a:r>
                     </a:p>
                   </a:txBody>
-                  <a:tcPr>
+                  <a:tcPr marL="45720" marR="45720" marT="18288" marB="18288">
                     <a:solidFill>
                       <a:srgbClr val="0D2B3E"/>
                     </a:solidFill>
@@ -3347,7 +3347,7 @@
                       </a:r>
                     </a:p>
                   </a:txBody>
-                  <a:tcPr>
+                  <a:tcPr marL="45720" marR="45720" marT="18288" marB="18288">
                     <a:solidFill>
                       <a:srgbClr val="E8F0F0"/>
                     </a:solidFill>
@@ -3371,7 +3371,7 @@
                       </a:r>
                     </a:p>
                   </a:txBody>
-                  <a:tcPr>
+                  <a:tcPr marL="45720" marR="45720" marT="18288" marB="18288">
                     <a:solidFill>
                       <a:srgbClr val="E8F0F0"/>
                     </a:solidFill>
@@ -3397,7 +3397,7 @@
                       </a:r>
                     </a:p>
                   </a:txBody>
-                  <a:tcPr>
+                  <a:tcPr marL="45720" marR="45720" marT="18288" marB="18288">
                     <a:solidFill>
                       <a:srgbClr val="F5F0E8"/>
                     </a:solidFill>
@@ -3421,7 +3421,7 @@
                       </a:r>
                     </a:p>
                   </a:txBody>
-                  <a:tcPr>
+                  <a:tcPr marL="45720" marR="45720" marT="18288" marB="18288">
                     <a:solidFill>
                       <a:srgbClr val="F5F0E8"/>
                     </a:solidFill>
@@ -3447,7 +3447,7 @@
                       </a:r>
                     </a:p>
                   </a:txBody>
-                  <a:tcPr>
+                  <a:tcPr marL="45720" marR="45720" marT="18288" marB="18288">
                     <a:solidFill>
                       <a:srgbClr val="E8F0F0"/>
                     </a:solidFill>
@@ -3471,7 +3471,7 @@
                       </a:r>
                     </a:p>
                   </a:txBody>
-                  <a:tcPr>
+                  <a:tcPr marL="45720" marR="45720" marT="18288" marB="18288">
                     <a:solidFill>
                       <a:srgbClr val="E8F0F0"/>
                     </a:solidFill>
@@ -3497,7 +3497,7 @@
                       </a:r>
                     </a:p>
                   </a:txBody>
-                  <a:tcPr>
+                  <a:tcPr marL="45720" marR="45720" marT="18288" marB="18288">
                     <a:solidFill>
                       <a:srgbClr val="F5F0E8"/>
                     </a:solidFill>
@@ -3521,7 +3521,7 @@
                       </a:r>
                     </a:p>
                   </a:txBody>
-                  <a:tcPr>
+                  <a:tcPr marL="45720" marR="45720" marT="18288" marB="18288">
                     <a:solidFill>
                       <a:srgbClr val="F5F0E8"/>
                     </a:solidFill>
@@ -3637,7 +3637,7 @@
           <a:noFill/>
         </p:spPr>
         <p:txBody>
-          <a:bodyPr wrap="square">
+          <a:bodyPr wrap="square" lIns="45720" rIns="45720" tIns="27432" bIns="27432">
             <a:spAutoFit/>
           </a:bodyPr>
           <a:lstStyle/>
@@ -3703,7 +3703,7 @@
           <a:noFill/>
         </p:spPr>
         <p:txBody>
-          <a:bodyPr wrap="square">
+          <a:bodyPr wrap="square" lIns="45720" rIns="45720" tIns="27432" bIns="27432">
             <a:spAutoFit/>
           </a:bodyPr>
           <a:lstStyle/>
@@ -3782,7 +3782,7 @@
           <a:noFill/>
         </p:spPr>
         <p:txBody>
-          <a:bodyPr wrap="square">
+          <a:bodyPr wrap="square" lIns="45720" rIns="45720" tIns="27432" bIns="27432">
             <a:spAutoFit/>
           </a:bodyPr>
           <a:lstStyle/>
@@ -3818,7 +3818,7 @@
           <a:noFill/>
         </p:spPr>
         <p:txBody>
-          <a:bodyPr wrap="square">
+          <a:bodyPr wrap="square" lIns="45720" rIns="45720" tIns="27432" bIns="27432">
             <a:spAutoFit/>
           </a:bodyPr>
           <a:lstStyle/>
@@ -3883,7 +3883,7 @@
           <a:noFill/>
         </p:spPr>
         <p:txBody>
-          <a:bodyPr wrap="square">
+          <a:bodyPr wrap="square" lIns="45720" rIns="45720" tIns="27432" bIns="27432">
             <a:spAutoFit/>
           </a:bodyPr>
           <a:lstStyle/>
@@ -3943,7 +3943,7 @@
                       </a:r>
                     </a:p>
                   </a:txBody>
-                  <a:tcPr>
+                  <a:tcPr marL="45720" marR="45720" marT="18288" marB="18288">
                     <a:solidFill>
                       <a:srgbClr val="0D2B3E"/>
                     </a:solidFill>
@@ -3967,7 +3967,7 @@
                       </a:r>
                     </a:p>
                   </a:txBody>
-                  <a:tcPr>
+                  <a:tcPr marL="45720" marR="45720" marT="18288" marB="18288">
                     <a:solidFill>
                       <a:srgbClr val="0D2B3E"/>
                     </a:solidFill>
@@ -3993,7 +3993,7 @@
                       </a:r>
                     </a:p>
                   </a:txBody>
-                  <a:tcPr>
+                  <a:tcPr marL="45720" marR="45720" marT="18288" marB="18288">
                     <a:solidFill>
                       <a:srgbClr val="E8F0F0"/>
                     </a:solidFill>
@@ -4017,7 +4017,7 @@
                       </a:r>
                     </a:p>
                   </a:txBody>
-                  <a:tcPr>
+                  <a:tcPr marL="45720" marR="45720" marT="18288" marB="18288">
                     <a:solidFill>
                       <a:srgbClr val="E8F0F0"/>
                     </a:solidFill>
@@ -4043,7 +4043,7 @@
                       </a:r>
                     </a:p>
                   </a:txBody>
-                  <a:tcPr>
+                  <a:tcPr marL="45720" marR="45720" marT="18288" marB="18288">
                     <a:solidFill>
                       <a:srgbClr val="F5F0E8"/>
                     </a:solidFill>
@@ -4067,7 +4067,7 @@
                       </a:r>
                     </a:p>
                   </a:txBody>
-                  <a:tcPr>
+                  <a:tcPr marL="45720" marR="45720" marT="18288" marB="18288">
                     <a:solidFill>
                       <a:srgbClr val="F5F0E8"/>
                     </a:solidFill>
@@ -4093,7 +4093,7 @@
                       </a:r>
                     </a:p>
                   </a:txBody>
-                  <a:tcPr>
+                  <a:tcPr marL="45720" marR="45720" marT="18288" marB="18288">
                     <a:solidFill>
                       <a:srgbClr val="E8F0F0"/>
                     </a:solidFill>
@@ -4117,7 +4117,7 @@
                       </a:r>
                     </a:p>
                   </a:txBody>
-                  <a:tcPr>
+                  <a:tcPr marL="45720" marR="45720" marT="18288" marB="18288">
                     <a:solidFill>
                       <a:srgbClr val="E8F0F0"/>
                     </a:solidFill>
@@ -4143,7 +4143,7 @@
                       </a:r>
                     </a:p>
                   </a:txBody>
-                  <a:tcPr>
+                  <a:tcPr marL="45720" marR="45720" marT="18288" marB="18288">
                     <a:solidFill>
                       <a:srgbClr val="F5F0E8"/>
                     </a:solidFill>
@@ -4167,7 +4167,7 @@
                       </a:r>
                     </a:p>
                   </a:txBody>
-                  <a:tcPr>
+                  <a:tcPr marL="45720" marR="45720" marT="18288" marB="18288">
                     <a:solidFill>
                       <a:srgbClr val="F5F0E8"/>
                     </a:solidFill>
@@ -4193,7 +4193,7 @@
                       </a:r>
                     </a:p>
                   </a:txBody>
-                  <a:tcPr>
+                  <a:tcPr marL="45720" marR="45720" marT="18288" marB="18288">
                     <a:solidFill>
                       <a:srgbClr val="E8F0F0"/>
                     </a:solidFill>
@@ -4217,7 +4217,7 @@
                       </a:r>
                     </a:p>
                   </a:txBody>
-                  <a:tcPr>
+                  <a:tcPr marL="45720" marR="45720" marT="18288" marB="18288">
                     <a:solidFill>
                       <a:srgbClr val="E8F0F0"/>
                     </a:solidFill>
@@ -4245,7 +4245,7 @@
           <a:noFill/>
         </p:spPr>
         <p:txBody>
-          <a:bodyPr wrap="square">
+          <a:bodyPr wrap="square" lIns="45720" rIns="45720" tIns="27432" bIns="27432">
             <a:spAutoFit/>
           </a:bodyPr>
           <a:lstStyle/>
@@ -4281,7 +4281,7 @@
           <a:noFill/>
         </p:spPr>
         <p:txBody>
-          <a:bodyPr wrap="square">
+          <a:bodyPr wrap="square" lIns="45720" rIns="45720" tIns="27432" bIns="27432">
             <a:spAutoFit/>
           </a:bodyPr>
           <a:lstStyle/>
@@ -4372,7 +4372,7 @@
           <a:noFill/>
         </p:spPr>
         <p:txBody>
-          <a:bodyPr wrap="square">
+          <a:bodyPr wrap="square" lIns="45720" rIns="45720" tIns="27432" bIns="27432">
             <a:spAutoFit/>
           </a:bodyPr>
           <a:lstStyle/>
@@ -4451,7 +4451,7 @@
           <a:noFill/>
         </p:spPr>
         <p:txBody>
-          <a:bodyPr wrap="square">
+          <a:bodyPr wrap="square" lIns="45720" rIns="45720" tIns="27432" bIns="27432">
             <a:spAutoFit/>
           </a:bodyPr>
           <a:lstStyle/>
@@ -4532,7 +4532,7 @@
           <a:noFill/>
         </p:spPr>
         <p:txBody>
-          <a:bodyPr wrap="square">
+          <a:bodyPr wrap="square" lIns="45720" rIns="45720" tIns="27432" bIns="27432">
             <a:spAutoFit/>
           </a:bodyPr>
           <a:lstStyle/>
@@ -4568,7 +4568,7 @@
           <a:noFill/>
         </p:spPr>
         <p:txBody>
-          <a:bodyPr wrap="square">
+          <a:bodyPr wrap="square" lIns="45720" rIns="45720" tIns="27432" bIns="27432">
             <a:spAutoFit/>
           </a:bodyPr>
           <a:lstStyle/>
@@ -4649,7 +4649,7 @@
           <a:noFill/>
         </p:spPr>
         <p:txBody>
-          <a:bodyPr wrap="square">
+          <a:bodyPr wrap="square" lIns="45720" rIns="45720" tIns="27432" bIns="27432">
             <a:spAutoFit/>
           </a:bodyPr>
           <a:lstStyle/>
@@ -4685,7 +4685,7 @@
           <a:noFill/>
         </p:spPr>
         <p:txBody>
-          <a:bodyPr wrap="square">
+          <a:bodyPr wrap="square" lIns="45720" rIns="45720" tIns="27432" bIns="27432">
             <a:spAutoFit/>
           </a:bodyPr>
           <a:lstStyle/>
@@ -4766,7 +4766,7 @@
           <a:noFill/>
         </p:spPr>
         <p:txBody>
-          <a:bodyPr wrap="square">
+          <a:bodyPr wrap="square" lIns="45720" rIns="45720" tIns="27432" bIns="27432">
             <a:spAutoFit/>
           </a:bodyPr>
           <a:lstStyle/>
@@ -4802,7 +4802,7 @@
           <a:noFill/>
         </p:spPr>
         <p:txBody>
-          <a:bodyPr wrap="square">
+          <a:bodyPr wrap="square" lIns="45720" rIns="45720" tIns="27432" bIns="27432">
             <a:spAutoFit/>
           </a:bodyPr>
           <a:lstStyle/>
@@ -4864,7 +4864,7 @@
           <a:noFill/>
         </p:spPr>
         <p:txBody>
-          <a:bodyPr wrap="square">
+          <a:bodyPr wrap="square" lIns="45720" rIns="45720" tIns="27432" bIns="27432">
             <a:spAutoFit/>
           </a:bodyPr>
           <a:lstStyle/>
@@ -4943,7 +4943,7 @@
           <a:noFill/>
         </p:spPr>
         <p:txBody>
-          <a:bodyPr wrap="square">
+          <a:bodyPr wrap="square" lIns="45720" rIns="45720" tIns="27432" bIns="27432">
             <a:spAutoFit/>
           </a:bodyPr>
           <a:lstStyle/>
@@ -4979,7 +4979,7 @@
           <a:noFill/>
         </p:spPr>
         <p:txBody>
-          <a:bodyPr wrap="square">
+          <a:bodyPr wrap="square" lIns="45720" rIns="45720" tIns="27432" bIns="27432">
             <a:spAutoFit/>
           </a:bodyPr>
           <a:lstStyle/>
@@ -5015,7 +5015,7 @@
           <a:noFill/>
         </p:spPr>
         <p:txBody>
-          <a:bodyPr wrap="square">
+          <a:bodyPr wrap="square" lIns="45720" rIns="45720" tIns="27432" bIns="27432">
             <a:spAutoFit/>
           </a:bodyPr>
           <a:lstStyle/>
@@ -5051,7 +5051,7 @@
           <a:noFill/>
         </p:spPr>
         <p:txBody>
-          <a:bodyPr wrap="square">
+          <a:bodyPr wrap="square" lIns="45720" rIns="45720" tIns="27432" bIns="27432">
             <a:spAutoFit/>
           </a:bodyPr>
           <a:lstStyle/>
@@ -5175,7 +5175,7 @@
           <a:noFill/>
         </p:spPr>
         <p:txBody>
-          <a:bodyPr wrap="square">
+          <a:bodyPr wrap="square" lIns="45720" rIns="45720" tIns="27432" bIns="27432">
             <a:spAutoFit/>
           </a:bodyPr>
           <a:lstStyle/>
@@ -5241,7 +5241,7 @@
           <a:noFill/>
         </p:spPr>
         <p:txBody>
-          <a:bodyPr wrap="square">
+          <a:bodyPr wrap="square" lIns="45720" rIns="45720" tIns="27432" bIns="27432">
             <a:spAutoFit/>
           </a:bodyPr>
           <a:lstStyle/>
@@ -5345,7 +5345,7 @@
                       </a:r>
                     </a:p>
                   </a:txBody>
-                  <a:tcPr>
+                  <a:tcPr marL="45720" marR="45720" marT="18288" marB="18288">
                     <a:solidFill>
                       <a:srgbClr val="0D2B3E"/>
                     </a:solidFill>
@@ -5369,7 +5369,7 @@
                       </a:r>
                     </a:p>
                   </a:txBody>
-                  <a:tcPr>
+                  <a:tcPr marL="45720" marR="45720" marT="18288" marB="18288">
                     <a:solidFill>
                       <a:srgbClr val="0D2B3E"/>
                     </a:solidFill>
@@ -5393,7 +5393,7 @@
                       </a:r>
                     </a:p>
                   </a:txBody>
-                  <a:tcPr>
+                  <a:tcPr marL="45720" marR="45720" marT="18288" marB="18288">
                     <a:solidFill>
                       <a:srgbClr val="0D2B3E"/>
                     </a:solidFill>
@@ -5419,7 +5419,7 @@
                       </a:r>
                     </a:p>
                   </a:txBody>
-                  <a:tcPr>
+                  <a:tcPr marL="45720" marR="45720" marT="18288" marB="18288">
                     <a:solidFill>
                       <a:srgbClr val="E8F0F0"/>
                     </a:solidFill>
@@ -5443,7 +5443,7 @@
                       </a:r>
                     </a:p>
                   </a:txBody>
-                  <a:tcPr>
+                  <a:tcPr marL="45720" marR="45720" marT="18288" marB="18288">
                     <a:solidFill>
                       <a:srgbClr val="E8F0F0"/>
                     </a:solidFill>
@@ -5467,7 +5467,7 @@
                       </a:r>
                     </a:p>
                   </a:txBody>
-                  <a:tcPr>
+                  <a:tcPr marL="45720" marR="45720" marT="18288" marB="18288">
                     <a:solidFill>
                       <a:srgbClr val="E8F0F0"/>
                     </a:solidFill>
@@ -5493,7 +5493,7 @@
                       </a:r>
                     </a:p>
                   </a:txBody>
-                  <a:tcPr>
+                  <a:tcPr marL="45720" marR="45720" marT="18288" marB="18288">
                     <a:solidFill>
                       <a:srgbClr val="F5F0E8"/>
                     </a:solidFill>
@@ -5517,7 +5517,7 @@
                       </a:r>
                     </a:p>
                   </a:txBody>
-                  <a:tcPr>
+                  <a:tcPr marL="45720" marR="45720" marT="18288" marB="18288">
                     <a:solidFill>
                       <a:srgbClr val="F5F0E8"/>
                     </a:solidFill>
@@ -5541,7 +5541,7 @@
                       </a:r>
                     </a:p>
                   </a:txBody>
-                  <a:tcPr>
+                  <a:tcPr marL="45720" marR="45720" marT="18288" marB="18288">
                     <a:solidFill>
                       <a:srgbClr val="F5F0E8"/>
                     </a:solidFill>
@@ -5567,7 +5567,7 @@
                       </a:r>
                     </a:p>
                   </a:txBody>
-                  <a:tcPr>
+                  <a:tcPr marL="45720" marR="45720" marT="18288" marB="18288">
                     <a:solidFill>
                       <a:srgbClr val="E8F0F0"/>
                     </a:solidFill>
@@ -5591,7 +5591,7 @@
                       </a:r>
                     </a:p>
                   </a:txBody>
-                  <a:tcPr>
+                  <a:tcPr marL="45720" marR="45720" marT="18288" marB="18288">
                     <a:solidFill>
                       <a:srgbClr val="E8F0F0"/>
                     </a:solidFill>
@@ -5615,7 +5615,7 @@
                       </a:r>
                     </a:p>
                   </a:txBody>
-                  <a:tcPr>
+                  <a:tcPr marL="45720" marR="45720" marT="18288" marB="18288">
                     <a:solidFill>
                       <a:srgbClr val="E8F0F0"/>
                     </a:solidFill>
@@ -5641,7 +5641,7 @@
                       </a:r>
                     </a:p>
                   </a:txBody>
-                  <a:tcPr>
+                  <a:tcPr marL="45720" marR="45720" marT="18288" marB="18288">
                     <a:solidFill>
                       <a:srgbClr val="F5F0E8"/>
                     </a:solidFill>
@@ -5665,7 +5665,7 @@
                       </a:r>
                     </a:p>
                   </a:txBody>
-                  <a:tcPr>
+                  <a:tcPr marL="45720" marR="45720" marT="18288" marB="18288">
                     <a:solidFill>
                       <a:srgbClr val="F5F0E8"/>
                     </a:solidFill>
@@ -5689,7 +5689,7 @@
                       </a:r>
                     </a:p>
                   </a:txBody>
-                  <a:tcPr>
+                  <a:tcPr marL="45720" marR="45720" marT="18288" marB="18288">
                     <a:solidFill>
                       <a:srgbClr val="F5F0E8"/>
                     </a:solidFill>
@@ -5743,7 +5743,7 @@
           <a:noFill/>
         </p:spPr>
         <p:txBody>
-          <a:bodyPr wrap="square">
+          <a:bodyPr wrap="square" lIns="45720" rIns="45720" tIns="27432" bIns="27432">
             <a:spAutoFit/>
           </a:bodyPr>
           <a:lstStyle/>
@@ -5847,7 +5847,7 @@
                       </a:r>
                     </a:p>
                   </a:txBody>
-                  <a:tcPr>
+                  <a:tcPr marL="45720" marR="45720" marT="18288" marB="18288">
                     <a:solidFill>
                       <a:srgbClr val="0D2B3E"/>
                     </a:solidFill>
@@ -5871,7 +5871,7 @@
                       </a:r>
                     </a:p>
                   </a:txBody>
-                  <a:tcPr>
+                  <a:tcPr marL="45720" marR="45720" marT="18288" marB="18288">
                     <a:solidFill>
                       <a:srgbClr val="0D2B3E"/>
                     </a:solidFill>
@@ -5895,7 +5895,7 @@
                       </a:r>
                     </a:p>
                   </a:txBody>
-                  <a:tcPr>
+                  <a:tcPr marL="45720" marR="45720" marT="18288" marB="18288">
                     <a:solidFill>
                       <a:srgbClr val="0D2B3E"/>
                     </a:solidFill>
@@ -5921,7 +5921,7 @@
                       </a:r>
                     </a:p>
                   </a:txBody>
-                  <a:tcPr>
+                  <a:tcPr marL="45720" marR="45720" marT="18288" marB="18288">
                     <a:solidFill>
                       <a:srgbClr val="E8F0F0"/>
                     </a:solidFill>
@@ -5945,7 +5945,7 @@
                       </a:r>
                     </a:p>
                   </a:txBody>
-                  <a:tcPr>
+                  <a:tcPr marL="45720" marR="45720" marT="18288" marB="18288">
                     <a:solidFill>
                       <a:srgbClr val="E8F0F0"/>
                     </a:solidFill>
@@ -5969,7 +5969,7 @@
                       </a:r>
                     </a:p>
                   </a:txBody>
-                  <a:tcPr>
+                  <a:tcPr marL="45720" marR="45720" marT="18288" marB="18288">
                     <a:solidFill>
                       <a:srgbClr val="E8F0F0"/>
                     </a:solidFill>
@@ -5995,7 +5995,7 @@
                       </a:r>
                     </a:p>
                   </a:txBody>
-                  <a:tcPr>
+                  <a:tcPr marL="45720" marR="45720" marT="18288" marB="18288">
                     <a:solidFill>
                       <a:srgbClr val="F5F0E8"/>
                     </a:solidFill>
@@ -6019,7 +6019,7 @@
                       </a:r>
                     </a:p>
                   </a:txBody>
-                  <a:tcPr>
+                  <a:tcPr marL="45720" marR="45720" marT="18288" marB="18288">
                     <a:solidFill>
                       <a:srgbClr val="F5F0E8"/>
                     </a:solidFill>
@@ -6043,7 +6043,7 @@
                       </a:r>
                     </a:p>
                   </a:txBody>
-                  <a:tcPr>
+                  <a:tcPr marL="45720" marR="45720" marT="18288" marB="18288">
                     <a:solidFill>
                       <a:srgbClr val="F5F0E8"/>
                     </a:solidFill>
@@ -6069,7 +6069,7 @@
                       </a:r>
                     </a:p>
                   </a:txBody>
-                  <a:tcPr>
+                  <a:tcPr marL="45720" marR="45720" marT="18288" marB="18288">
                     <a:solidFill>
                       <a:srgbClr val="E8F0F0"/>
                     </a:solidFill>
@@ -6093,7 +6093,7 @@
                       </a:r>
                     </a:p>
                   </a:txBody>
-                  <a:tcPr>
+                  <a:tcPr marL="45720" marR="45720" marT="18288" marB="18288">
                     <a:solidFill>
                       <a:srgbClr val="E8F0F0"/>
                     </a:solidFill>
@@ -6117,7 +6117,7 @@
                       </a:r>
                     </a:p>
                   </a:txBody>
-                  <a:tcPr>
+                  <a:tcPr marL="45720" marR="45720" marT="18288" marB="18288">
                     <a:solidFill>
                       <a:srgbClr val="E8F0F0"/>
                     </a:solidFill>
@@ -6143,7 +6143,7 @@
                       </a:r>
                     </a:p>
                   </a:txBody>
-                  <a:tcPr>
+                  <a:tcPr marL="45720" marR="45720" marT="18288" marB="18288">
                     <a:solidFill>
                       <a:srgbClr val="F5F0E8"/>
                     </a:solidFill>
@@ -6167,7 +6167,7 @@
                       </a:r>
                     </a:p>
                   </a:txBody>
-                  <a:tcPr>
+                  <a:tcPr marL="45720" marR="45720" marT="18288" marB="18288">
                     <a:solidFill>
                       <a:srgbClr val="F5F0E8"/>
                     </a:solidFill>
@@ -6191,7 +6191,7 @@
                       </a:r>
                     </a:p>
                   </a:txBody>
-                  <a:tcPr>
+                  <a:tcPr marL="45720" marR="45720" marT="18288" marB="18288">
                     <a:solidFill>
                       <a:srgbClr val="F5F0E8"/>
                     </a:solidFill>
@@ -6217,7 +6217,7 @@
                       </a:r>
                     </a:p>
                   </a:txBody>
-                  <a:tcPr>
+                  <a:tcPr marL="45720" marR="45720" marT="18288" marB="18288">
                     <a:solidFill>
                       <a:srgbClr val="E8F0F0"/>
                     </a:solidFill>
@@ -6241,7 +6241,7 @@
                       </a:r>
                     </a:p>
                   </a:txBody>
-                  <a:tcPr>
+                  <a:tcPr marL="45720" marR="45720" marT="18288" marB="18288">
                     <a:solidFill>
                       <a:srgbClr val="E8F0F0"/>
                     </a:solidFill>
@@ -6265,7 +6265,7 @@
                       </a:r>
                     </a:p>
                   </a:txBody>
-                  <a:tcPr>
+                  <a:tcPr marL="45720" marR="45720" marT="18288" marB="18288">
                     <a:solidFill>
                       <a:srgbClr val="E8F0F0"/>
                     </a:solidFill>
@@ -6291,7 +6291,7 @@
                       </a:r>
                     </a:p>
                   </a:txBody>
-                  <a:tcPr>
+                  <a:tcPr marL="45720" marR="45720" marT="18288" marB="18288">
                     <a:solidFill>
                       <a:srgbClr val="F5F0E8"/>
                     </a:solidFill>
@@ -6315,7 +6315,7 @@
                       </a:r>
                     </a:p>
                   </a:txBody>
-                  <a:tcPr>
+                  <a:tcPr marL="45720" marR="45720" marT="18288" marB="18288">
                     <a:solidFill>
                       <a:srgbClr val="F5F0E8"/>
                     </a:solidFill>
@@ -6339,7 +6339,7 @@
                       </a:r>
                     </a:p>
                   </a:txBody>
-                  <a:tcPr>
+                  <a:tcPr marL="45720" marR="45720" marT="18288" marB="18288">
                     <a:solidFill>
                       <a:srgbClr val="F5F0E8"/>
                     </a:solidFill>
@@ -6365,7 +6365,7 @@
                       </a:r>
                     </a:p>
                   </a:txBody>
-                  <a:tcPr>
+                  <a:tcPr marL="45720" marR="45720" marT="18288" marB="18288">
                     <a:solidFill>
                       <a:srgbClr val="E8F0F0"/>
                     </a:solidFill>
@@ -6389,7 +6389,7 @@
                       </a:r>
                     </a:p>
                   </a:txBody>
-                  <a:tcPr>
+                  <a:tcPr marL="45720" marR="45720" marT="18288" marB="18288">
                     <a:solidFill>
                       <a:srgbClr val="E8F0F0"/>
                     </a:solidFill>
@@ -6413,7 +6413,7 @@
                       </a:r>
                     </a:p>
                   </a:txBody>
-                  <a:tcPr>
+                  <a:tcPr marL="45720" marR="45720" marT="18288" marB="18288">
                     <a:solidFill>
                       <a:srgbClr val="E8F0F0"/>
                     </a:solidFill>
@@ -6467,7 +6467,7 @@
           <a:noFill/>
         </p:spPr>
         <p:txBody>
-          <a:bodyPr wrap="square">
+          <a:bodyPr wrap="square" lIns="45720" rIns="45720" tIns="27432" bIns="27432">
             <a:spAutoFit/>
           </a:bodyPr>
           <a:lstStyle/>
@@ -6571,7 +6571,7 @@
                       </a:r>
                     </a:p>
                   </a:txBody>
-                  <a:tcPr>
+                  <a:tcPr marL="45720" marR="45720" marT="18288" marB="18288">
                     <a:solidFill>
                       <a:srgbClr val="0D2B3E"/>
                     </a:solidFill>
@@ -6595,7 +6595,7 @@
                       </a:r>
                     </a:p>
                   </a:txBody>
-                  <a:tcPr>
+                  <a:tcPr marL="45720" marR="45720" marT="18288" marB="18288">
                     <a:solidFill>
                       <a:srgbClr val="0D2B3E"/>
                     </a:solidFill>
@@ -6619,7 +6619,7 @@
                       </a:r>
                     </a:p>
                   </a:txBody>
-                  <a:tcPr>
+                  <a:tcPr marL="45720" marR="45720" marT="18288" marB="18288">
                     <a:solidFill>
                       <a:srgbClr val="0D2B3E"/>
                     </a:solidFill>
@@ -6645,7 +6645,7 @@
                       </a:r>
                     </a:p>
                   </a:txBody>
-                  <a:tcPr>
+                  <a:tcPr marL="45720" marR="45720" marT="18288" marB="18288">
                     <a:solidFill>
                       <a:srgbClr val="E8F0F0"/>
                     </a:solidFill>
@@ -6669,7 +6669,7 @@
                       </a:r>
                     </a:p>
                   </a:txBody>
-                  <a:tcPr>
+                  <a:tcPr marL="45720" marR="45720" marT="18288" marB="18288">
                     <a:solidFill>
                       <a:srgbClr val="E8F0F0"/>
                     </a:solidFill>
@@ -6693,7 +6693,7 @@
                       </a:r>
                     </a:p>
                   </a:txBody>
-                  <a:tcPr>
+                  <a:tcPr marL="45720" marR="45720" marT="18288" marB="18288">
                     <a:solidFill>
                       <a:srgbClr val="E8F0F0"/>
                     </a:solidFill>
@@ -6719,7 +6719,7 @@
                       </a:r>
                     </a:p>
                   </a:txBody>
-                  <a:tcPr>
+                  <a:tcPr marL="45720" marR="45720" marT="18288" marB="18288">
                     <a:solidFill>
                       <a:srgbClr val="F5F0E8"/>
                     </a:solidFill>
@@ -6743,7 +6743,7 @@
                       </a:r>
                     </a:p>
                   </a:txBody>
-                  <a:tcPr>
+                  <a:tcPr marL="45720" marR="45720" marT="18288" marB="18288">
                     <a:solidFill>
                       <a:srgbClr val="F5F0E8"/>
                     </a:solidFill>
@@ -6767,7 +6767,7 @@
                       </a:r>
                     </a:p>
                   </a:txBody>
-                  <a:tcPr>
+                  <a:tcPr marL="45720" marR="45720" marT="18288" marB="18288">
                     <a:solidFill>
                       <a:srgbClr val="F5F0E8"/>
                     </a:solidFill>
@@ -6793,7 +6793,7 @@
                       </a:r>
                     </a:p>
                   </a:txBody>
-                  <a:tcPr>
+                  <a:tcPr marL="45720" marR="45720" marT="18288" marB="18288">
                     <a:solidFill>
                       <a:srgbClr val="E8F0F0"/>
                     </a:solidFill>
@@ -6817,7 +6817,7 @@
                       </a:r>
                     </a:p>
                   </a:txBody>
-                  <a:tcPr>
+                  <a:tcPr marL="45720" marR="45720" marT="18288" marB="18288">
                     <a:solidFill>
                       <a:srgbClr val="E8F0F0"/>
                     </a:solidFill>
@@ -6841,7 +6841,7 @@
                       </a:r>
                     </a:p>
                   </a:txBody>
-                  <a:tcPr>
+                  <a:tcPr marL="45720" marR="45720" marT="18288" marB="18288">
                     <a:solidFill>
                       <a:srgbClr val="E8F0F0"/>
                     </a:solidFill>
@@ -6867,7 +6867,7 @@
                       </a:r>
                     </a:p>
                   </a:txBody>
-                  <a:tcPr>
+                  <a:tcPr marL="45720" marR="45720" marT="18288" marB="18288">
                     <a:solidFill>
                       <a:srgbClr val="F5F0E8"/>
                     </a:solidFill>
@@ -6891,7 +6891,7 @@
                       </a:r>
                     </a:p>
                   </a:txBody>
-                  <a:tcPr>
+                  <a:tcPr marL="45720" marR="45720" marT="18288" marB="18288">
                     <a:solidFill>
                       <a:srgbClr val="F5F0E8"/>
                     </a:solidFill>
@@ -6915,7 +6915,7 @@
                       </a:r>
                     </a:p>
                   </a:txBody>
-                  <a:tcPr>
+                  <a:tcPr marL="45720" marR="45720" marT="18288" marB="18288">
                     <a:solidFill>
                       <a:srgbClr val="F5F0E8"/>
                     </a:solidFill>
@@ -6941,7 +6941,7 @@
                       </a:r>
                     </a:p>
                   </a:txBody>
-                  <a:tcPr>
+                  <a:tcPr marL="45720" marR="45720" marT="18288" marB="18288">
                     <a:solidFill>
                       <a:srgbClr val="E8F0F0"/>
                     </a:solidFill>
@@ -6965,7 +6965,7 @@
                       </a:r>
                     </a:p>
                   </a:txBody>
-                  <a:tcPr>
+                  <a:tcPr marL="45720" marR="45720" marT="18288" marB="18288">
                     <a:solidFill>
                       <a:srgbClr val="E8F0F0"/>
                     </a:solidFill>
@@ -6989,7 +6989,7 @@
                       </a:r>
                     </a:p>
                   </a:txBody>
-                  <a:tcPr>
+                  <a:tcPr marL="45720" marR="45720" marT="18288" marB="18288">
                     <a:solidFill>
                       <a:srgbClr val="E8F0F0"/>
                     </a:solidFill>
@@ -7105,7 +7105,7 @@
           <a:noFill/>
         </p:spPr>
         <p:txBody>
-          <a:bodyPr wrap="square">
+          <a:bodyPr wrap="square" lIns="45720" rIns="45720" tIns="27432" bIns="27432">
             <a:spAutoFit/>
           </a:bodyPr>
           <a:lstStyle/>
@@ -7167,7 +7167,7 @@
           <a:noFill/>
         </p:spPr>
         <p:txBody>
-          <a:bodyPr wrap="square">
+          <a:bodyPr wrap="square" lIns="45720" rIns="45720" tIns="27432" bIns="27432">
             <a:spAutoFit/>
           </a:bodyPr>
           <a:lstStyle/>
@@ -7246,7 +7246,7 @@
           <a:noFill/>
         </p:spPr>
         <p:txBody>
-          <a:bodyPr wrap="square">
+          <a:bodyPr wrap="square" lIns="45720" rIns="45720" tIns="27432" bIns="27432">
             <a:spAutoFit/>
           </a:bodyPr>
           <a:lstStyle/>
@@ -7306,7 +7306,7 @@
                       </a:r>
                     </a:p>
                   </a:txBody>
-                  <a:tcPr>
+                  <a:tcPr marL="45720" marR="45720" marT="18288" marB="18288">
                     <a:solidFill>
                       <a:srgbClr val="0D2B3E"/>
                     </a:solidFill>
@@ -7330,7 +7330,7 @@
                       </a:r>
                     </a:p>
                   </a:txBody>
-                  <a:tcPr>
+                  <a:tcPr marL="45720" marR="45720" marT="18288" marB="18288">
                     <a:solidFill>
                       <a:srgbClr val="0D2B3E"/>
                     </a:solidFill>
@@ -7356,7 +7356,7 @@
                       </a:r>
                     </a:p>
                   </a:txBody>
-                  <a:tcPr>
+                  <a:tcPr marL="45720" marR="45720" marT="18288" marB="18288">
                     <a:solidFill>
                       <a:srgbClr val="E8F0F0"/>
                     </a:solidFill>
@@ -7380,7 +7380,7 @@
                       </a:r>
                     </a:p>
                   </a:txBody>
-                  <a:tcPr>
+                  <a:tcPr marL="45720" marR="45720" marT="18288" marB="18288">
                     <a:solidFill>
                       <a:srgbClr val="E8F0F0"/>
                     </a:solidFill>
@@ -7406,7 +7406,7 @@
                       </a:r>
                     </a:p>
                   </a:txBody>
-                  <a:tcPr>
+                  <a:tcPr marL="45720" marR="45720" marT="18288" marB="18288">
                     <a:solidFill>
                       <a:srgbClr val="F5F0E8"/>
                     </a:solidFill>
@@ -7430,7 +7430,7 @@
                       </a:r>
                     </a:p>
                   </a:txBody>
-                  <a:tcPr>
+                  <a:tcPr marL="45720" marR="45720" marT="18288" marB="18288">
                     <a:solidFill>
                       <a:srgbClr val="F5F0E8"/>
                     </a:solidFill>
@@ -7456,7 +7456,7 @@
                       </a:r>
                     </a:p>
                   </a:txBody>
-                  <a:tcPr>
+                  <a:tcPr marL="45720" marR="45720" marT="18288" marB="18288">
                     <a:solidFill>
                       <a:srgbClr val="E8F0F0"/>
                     </a:solidFill>
@@ -7480,7 +7480,7 @@
                       </a:r>
                     </a:p>
                   </a:txBody>
-                  <a:tcPr>
+                  <a:tcPr marL="45720" marR="45720" marT="18288" marB="18288">
                     <a:solidFill>
                       <a:srgbClr val="E8F0F0"/>
                     </a:solidFill>
@@ -7506,7 +7506,7 @@
                       </a:r>
                     </a:p>
                   </a:txBody>
-                  <a:tcPr>
+                  <a:tcPr marL="45720" marR="45720" marT="18288" marB="18288">
                     <a:solidFill>
                       <a:srgbClr val="F5F0E8"/>
                     </a:solidFill>
@@ -7530,7 +7530,7 @@
                       </a:r>
                     </a:p>
                   </a:txBody>
-                  <a:tcPr>
+                  <a:tcPr marL="45720" marR="45720" marT="18288" marB="18288">
                     <a:solidFill>
                       <a:srgbClr val="F5F0E8"/>
                     </a:solidFill>
@@ -7558,7 +7558,7 @@
           <a:noFill/>
         </p:spPr>
         <p:txBody>
-          <a:bodyPr wrap="square">
+          <a:bodyPr wrap="square" lIns="45720" rIns="45720" tIns="27432" bIns="27432">
             <a:spAutoFit/>
           </a:bodyPr>
           <a:lstStyle/>
@@ -7618,7 +7618,7 @@
                       </a:r>
                     </a:p>
                   </a:txBody>
-                  <a:tcPr>
+                  <a:tcPr marL="45720" marR="45720" marT="18288" marB="18288">
                     <a:solidFill>
                       <a:srgbClr val="0D2B3E"/>
                     </a:solidFill>
@@ -7642,7 +7642,7 @@
                       </a:r>
                     </a:p>
                   </a:txBody>
-                  <a:tcPr>
+                  <a:tcPr marL="45720" marR="45720" marT="18288" marB="18288">
                     <a:solidFill>
                       <a:srgbClr val="0D2B3E"/>
                     </a:solidFill>
@@ -7668,7 +7668,7 @@
                       </a:r>
                     </a:p>
                   </a:txBody>
-                  <a:tcPr>
+                  <a:tcPr marL="45720" marR="45720" marT="18288" marB="18288">
                     <a:solidFill>
                       <a:srgbClr val="E8F0F0"/>
                     </a:solidFill>
@@ -7692,7 +7692,7 @@
                       </a:r>
                     </a:p>
                   </a:txBody>
-                  <a:tcPr>
+                  <a:tcPr marL="45720" marR="45720" marT="18288" marB="18288">
                     <a:solidFill>
                       <a:srgbClr val="E8F0F0"/>
                     </a:solidFill>
@@ -7718,7 +7718,7 @@
                       </a:r>
                     </a:p>
                   </a:txBody>
-                  <a:tcPr>
+                  <a:tcPr marL="45720" marR="45720" marT="18288" marB="18288">
                     <a:solidFill>
                       <a:srgbClr val="F5F0E8"/>
                     </a:solidFill>
@@ -7742,7 +7742,7 @@
                       </a:r>
                     </a:p>
                   </a:txBody>
-                  <a:tcPr>
+                  <a:tcPr marL="45720" marR="45720" marT="18288" marB="18288">
                     <a:solidFill>
                       <a:srgbClr val="F5F0E8"/>
                     </a:solidFill>
@@ -7768,7 +7768,7 @@
                       </a:r>
                     </a:p>
                   </a:txBody>
-                  <a:tcPr>
+                  <a:tcPr marL="45720" marR="45720" marT="18288" marB="18288">
                     <a:solidFill>
                       <a:srgbClr val="E8F0F0"/>
                     </a:solidFill>
@@ -7792,7 +7792,7 @@
                       </a:r>
                     </a:p>
                   </a:txBody>
-                  <a:tcPr>
+                  <a:tcPr marL="45720" marR="45720" marT="18288" marB="18288">
                     <a:solidFill>
                       <a:srgbClr val="E8F0F0"/>
                     </a:solidFill>
@@ -7818,7 +7818,7 @@
                       </a:r>
                     </a:p>
                   </a:txBody>
-                  <a:tcPr>
+                  <a:tcPr marL="45720" marR="45720" marT="18288" marB="18288">
                     <a:solidFill>
                       <a:srgbClr val="F5F0E8"/>
                     </a:solidFill>
@@ -7842,7 +7842,7 @@
                       </a:r>
                     </a:p>
                   </a:txBody>
-                  <a:tcPr>
+                  <a:tcPr marL="45720" marR="45720" marT="18288" marB="18288">
                     <a:solidFill>
                       <a:srgbClr val="F5F0E8"/>
                     </a:solidFill>
@@ -7896,7 +7896,7 @@
           <a:noFill/>
         </p:spPr>
         <p:txBody>
-          <a:bodyPr wrap="square">
+          <a:bodyPr wrap="square" lIns="45720" rIns="45720" tIns="27432" bIns="27432">
             <a:spAutoFit/>
           </a:bodyPr>
           <a:lstStyle/>
@@ -7975,7 +7975,7 @@
           <a:noFill/>
         </p:spPr>
         <p:txBody>
-          <a:bodyPr wrap="square">
+          <a:bodyPr wrap="square" lIns="45720" rIns="45720" tIns="27432" bIns="27432">
             <a:spAutoFit/>
           </a:bodyPr>
           <a:lstStyle/>
@@ -8036,7 +8036,7 @@
                       </a:r>
                     </a:p>
                   </a:txBody>
-                  <a:tcPr>
+                  <a:tcPr marL="45720" marR="45720" marT="18288" marB="18288">
                     <a:solidFill>
                       <a:srgbClr val="0D2B3E"/>
                     </a:solidFill>
@@ -8060,7 +8060,7 @@
                       </a:r>
                     </a:p>
                   </a:txBody>
-                  <a:tcPr>
+                  <a:tcPr marL="45720" marR="45720" marT="18288" marB="18288">
                     <a:solidFill>
                       <a:srgbClr val="0D2B3E"/>
                     </a:solidFill>
@@ -8084,7 +8084,7 @@
                       </a:r>
                     </a:p>
                   </a:txBody>
-                  <a:tcPr>
+                  <a:tcPr marL="45720" marR="45720" marT="18288" marB="18288">
                     <a:solidFill>
                       <a:srgbClr val="0D2B3E"/>
                     </a:solidFill>
@@ -8110,7 +8110,7 @@
                       </a:r>
                     </a:p>
                   </a:txBody>
-                  <a:tcPr>
+                  <a:tcPr marL="45720" marR="45720" marT="18288" marB="18288">
                     <a:solidFill>
                       <a:srgbClr val="E8F0F0"/>
                     </a:solidFill>
@@ -8134,7 +8134,7 @@
                       </a:r>
                     </a:p>
                   </a:txBody>
-                  <a:tcPr>
+                  <a:tcPr marL="45720" marR="45720" marT="18288" marB="18288">
                     <a:solidFill>
                       <a:srgbClr val="E8F0F0"/>
                     </a:solidFill>
@@ -8158,7 +8158,7 @@
                       </a:r>
                     </a:p>
                   </a:txBody>
-                  <a:tcPr>
+                  <a:tcPr marL="45720" marR="45720" marT="18288" marB="18288">
                     <a:solidFill>
                       <a:srgbClr val="E8F0F0"/>
                     </a:solidFill>
@@ -8184,7 +8184,7 @@
                       </a:r>
                     </a:p>
                   </a:txBody>
-                  <a:tcPr>
+                  <a:tcPr marL="45720" marR="45720" marT="18288" marB="18288">
                     <a:solidFill>
                       <a:srgbClr val="F5F0E8"/>
                     </a:solidFill>
@@ -8208,7 +8208,7 @@
                       </a:r>
                     </a:p>
                   </a:txBody>
-                  <a:tcPr>
+                  <a:tcPr marL="45720" marR="45720" marT="18288" marB="18288">
                     <a:solidFill>
                       <a:srgbClr val="F5F0E8"/>
                     </a:solidFill>
@@ -8232,7 +8232,7 @@
                       </a:r>
                     </a:p>
                   </a:txBody>
-                  <a:tcPr>
+                  <a:tcPr marL="45720" marR="45720" marT="18288" marB="18288">
                     <a:solidFill>
                       <a:srgbClr val="F5F0E8"/>
                     </a:solidFill>
@@ -8258,7 +8258,7 @@
                       </a:r>
                     </a:p>
                   </a:txBody>
-                  <a:tcPr>
+                  <a:tcPr marL="45720" marR="45720" marT="18288" marB="18288">
                     <a:solidFill>
                       <a:srgbClr val="E8F0F0"/>
                     </a:solidFill>
@@ -8282,7 +8282,7 @@
                       </a:r>
                     </a:p>
                   </a:txBody>
-                  <a:tcPr>
+                  <a:tcPr marL="45720" marR="45720" marT="18288" marB="18288">
                     <a:solidFill>
                       <a:srgbClr val="E8F0F0"/>
                     </a:solidFill>
@@ -8306,7 +8306,7 @@
                       </a:r>
                     </a:p>
                   </a:txBody>
-                  <a:tcPr>
+                  <a:tcPr marL="45720" marR="45720" marT="18288" marB="18288">
                     <a:solidFill>
                       <a:srgbClr val="E8F0F0"/>
                     </a:solidFill>
@@ -8334,7 +8334,7 @@
           <a:noFill/>
         </p:spPr>
         <p:txBody>
-          <a:bodyPr wrap="square">
+          <a:bodyPr wrap="square" lIns="45720" rIns="45720" tIns="27432" bIns="27432">
             <a:spAutoFit/>
           </a:bodyPr>
           <a:lstStyle/>
@@ -8370,7 +8370,7 @@
           <a:noFill/>
         </p:spPr>
         <p:txBody>
-          <a:bodyPr wrap="square">
+          <a:bodyPr wrap="square" lIns="45720" rIns="45720" tIns="27432" bIns="27432">
             <a:spAutoFit/>
           </a:bodyPr>
           <a:lstStyle/>
@@ -8475,7 +8475,7 @@
           <a:noFill/>
         </p:spPr>
         <p:txBody>
-          <a:bodyPr wrap="square">
+          <a:bodyPr wrap="square" lIns="45720" rIns="45720" tIns="27432" bIns="27432">
             <a:spAutoFit/>
           </a:bodyPr>
           <a:lstStyle/>
@@ -8642,7 +8642,7 @@
           <a:noFill/>
         </p:spPr>
         <p:txBody>
-          <a:bodyPr wrap="square">
+          <a:bodyPr wrap="square" lIns="45720" rIns="45720" tIns="27432" bIns="27432">
             <a:spAutoFit/>
           </a:bodyPr>
           <a:lstStyle/>
@@ -8682,7 +8682,7 @@
           <a:noFill/>
         </p:spPr>
         <p:txBody>
-          <a:bodyPr wrap="square">
+          <a:bodyPr wrap="square" lIns="45720" rIns="45720" tIns="27432" bIns="27432">
             <a:spAutoFit/>
           </a:bodyPr>
           <a:lstStyle/>
@@ -8718,7 +8718,7 @@
           <a:noFill/>
         </p:spPr>
         <p:txBody>
-          <a:bodyPr wrap="square">
+          <a:bodyPr wrap="square" lIns="45720" rIns="45720" tIns="27432" bIns="27432">
             <a:spAutoFit/>
           </a:bodyPr>
           <a:lstStyle/>
@@ -8754,7 +8754,7 @@
           <a:noFill/>
         </p:spPr>
         <p:txBody>
-          <a:bodyPr wrap="square">
+          <a:bodyPr wrap="square" lIns="45720" rIns="45720" tIns="27432" bIns="27432">
             <a:spAutoFit/>
           </a:bodyPr>
           <a:lstStyle/>
@@ -8790,7 +8790,7 @@
           <a:noFill/>
         </p:spPr>
         <p:txBody>
-          <a:bodyPr wrap="square">
+          <a:bodyPr wrap="square" lIns="45720" rIns="45720" tIns="27432" bIns="27432">
             <a:spAutoFit/>
           </a:bodyPr>
           <a:lstStyle/>

--- a/output/education/2026-03-27_medical-fee-revision-2026/medical-fee-revision-2026_slides_residents.pptx
+++ b/output/education/2026-03-27_medical-fee-revision-2026/medical-fee-revision-2026_slides_residents.pptx
@@ -14,7 +14,6 @@
     <p:sldId id="262" r:id="rId13"/>
     <p:sldId id="263" r:id="rId14"/>
     <p:sldId id="264" r:id="rId15"/>
-    <p:sldId id="265" r:id="rId16"/>
   </p:sldIdLst>
   <p:sldSz cx="9144000" cy="5143500" type="screen4x3"/>
   <p:notesSz cx="6858000" cy="9144000"/>
@@ -3149,7 +3148,7 @@
         </p:nvSpPr>
         <p:spPr>
           <a:xfrm>
-            <a:off x="457200" y="1097280"/>
+            <a:off x="457200" y="914400"/>
             <a:ext cx="8229600" cy="1097280"/>
           </a:xfrm>
           <a:prstGeom prst="rect">
@@ -3164,7 +3163,7 @@
           <a:lstStyle/>
           <a:p>
             <a:pPr algn="ctr">
-              <a:defRPr sz="4800" b="1">
+              <a:defRPr sz="6400" b="1">
                 <a:solidFill>
                   <a:srgbClr val="E89B3B"/>
                 </a:solidFill>
@@ -3172,7 +3171,7 @@
               </a:defRPr>
             </a:pPr>
             <a:r>
-              <a:t>本体 +3.09%</a:t>
+              <a:t>+3.09%</a:t>
             </a:r>
           </a:p>
         </p:txBody>
@@ -3185,7 +3184,7 @@
         </p:nvSpPr>
         <p:spPr>
           <a:xfrm>
-            <a:off x="457200" y="2286000"/>
+            <a:off x="457200" y="2103120"/>
             <a:ext cx="8229600" cy="457200"/>
           </a:xfrm>
           <a:prstGeom prst="rect">
@@ -3221,8 +3220,8 @@
         </p:nvSpPr>
         <p:spPr>
           <a:xfrm>
-            <a:off x="3200400" y="2834640"/>
-            <a:ext cx="2743200" cy="54864"/>
+            <a:off x="2743200" y="2743200"/>
+            <a:ext cx="3657600" cy="54864"/>
           </a:xfrm>
           <a:prstGeom prst="rect">
             <a:avLst/>
@@ -3256,292 +3255,16 @@
           </a:p>
         </p:txBody>
       </p:sp>
-      <p:graphicFrame>
-        <p:nvGraphicFramePr>
-          <p:cNvPr id="6" name="Table 5"/>
-          <p:cNvGraphicFramePr>
-            <a:graphicFrameLocks noGrp="1"/>
-          </p:cNvGraphicFramePr>
-          <p:nvPr/>
-        </p:nvGraphicFramePr>
-        <p:xfrm>
-          <a:off x="2560320" y="3108960"/>
-          <a:ext cx="4023360" cy="1371600"/>
-        </p:xfrm>
-        <a:graphic>
-          <a:graphicData uri="http://schemas.openxmlformats.org/drawingml/2006/table">
-            <a:tbl>
-              <a:tblPr firstRow="1" bandRow="1">
-                <a:tableStyleId>{5C22544A-7EE6-4342-B048-85BDC9FD1C3A}</a:tableStyleId>
-              </a:tblPr>
-              <a:tblGrid>
-                <a:gridCol w="2011680"/>
-                <a:gridCol w="2011680"/>
-              </a:tblGrid>
-              <a:tr h="274320">
-                <a:tc>
-                  <a:txBody>
-                    <a:bodyPr/>
-                    <a:lstStyle/>
-                    <a:p>
-                      <a:pPr>
-                        <a:defRPr sz="1000" b="1">
-                          <a:solidFill>
-                            <a:srgbClr val="F5F0E8"/>
-                          </a:solidFill>
-                          <a:latin typeface="Calibri"/>
-                        </a:defRPr>
-                      </a:pPr>
-                      <a:r>
-                        <a:t>内訳</a:t>
-                      </a:r>
-                    </a:p>
-                  </a:txBody>
-                  <a:tcPr marL="45720" marR="45720" marT="18288" marB="18288">
-                    <a:solidFill>
-                      <a:srgbClr val="0D2B3E"/>
-                    </a:solidFill>
-                  </a:tcPr>
-                </a:tc>
-                <a:tc>
-                  <a:txBody>
-                    <a:bodyPr/>
-                    <a:lstStyle/>
-                    <a:p>
-                      <a:pPr>
-                        <a:defRPr sz="1000" b="1">
-                          <a:solidFill>
-                            <a:srgbClr val="F5F0E8"/>
-                          </a:solidFill>
-                          <a:latin typeface="Calibri"/>
-                        </a:defRPr>
-                      </a:pPr>
-                      <a:r>
-                        <a:t>改定率</a:t>
-                      </a:r>
-                    </a:p>
-                  </a:txBody>
-                  <a:tcPr marL="45720" marR="45720" marT="18288" marB="18288">
-                    <a:solidFill>
-                      <a:srgbClr val="0D2B3E"/>
-                    </a:solidFill>
-                  </a:tcPr>
-                </a:tc>
-              </a:tr>
-              <a:tr h="274320">
-                <a:tc>
-                  <a:txBody>
-                    <a:bodyPr/>
-                    <a:lstStyle/>
-                    <a:p>
-                      <a:pPr>
-                        <a:defRPr sz="1000">
-                          <a:solidFill>
-                            <a:srgbClr val="1A1A2E"/>
-                          </a:solidFill>
-                          <a:latin typeface="Calibri"/>
-                        </a:defRPr>
-                      </a:pPr>
-                      <a:r>
-                        <a:t>賃上げ</a:t>
-                      </a:r>
-                    </a:p>
-                  </a:txBody>
-                  <a:tcPr marL="45720" marR="45720" marT="18288" marB="18288">
-                    <a:solidFill>
-                      <a:srgbClr val="E8F0F0"/>
-                    </a:solidFill>
-                  </a:tcPr>
-                </a:tc>
-                <a:tc>
-                  <a:txBody>
-                    <a:bodyPr/>
-                    <a:lstStyle/>
-                    <a:p>
-                      <a:pPr>
-                        <a:defRPr sz="1000">
-                          <a:solidFill>
-                            <a:srgbClr val="1A1A2E"/>
-                          </a:solidFill>
-                          <a:latin typeface="Calibri"/>
-                        </a:defRPr>
-                      </a:pPr>
-                      <a:r>
-                        <a:t>+1.70%</a:t>
-                      </a:r>
-                    </a:p>
-                  </a:txBody>
-                  <a:tcPr marL="45720" marR="45720" marT="18288" marB="18288">
-                    <a:solidFill>
-                      <a:srgbClr val="E8F0F0"/>
-                    </a:solidFill>
-                  </a:tcPr>
-                </a:tc>
-              </a:tr>
-              <a:tr h="274320">
-                <a:tc>
-                  <a:txBody>
-                    <a:bodyPr/>
-                    <a:lstStyle/>
-                    <a:p>
-                      <a:pPr>
-                        <a:defRPr sz="1000">
-                          <a:solidFill>
-                            <a:srgbClr val="1A1A2E"/>
-                          </a:solidFill>
-                          <a:latin typeface="Calibri"/>
-                        </a:defRPr>
-                      </a:pPr>
-                      <a:r>
-                        <a:t>物価高騰</a:t>
-                      </a:r>
-                    </a:p>
-                  </a:txBody>
-                  <a:tcPr marL="45720" marR="45720" marT="18288" marB="18288">
-                    <a:solidFill>
-                      <a:srgbClr val="F5F0E8"/>
-                    </a:solidFill>
-                  </a:tcPr>
-                </a:tc>
-                <a:tc>
-                  <a:txBody>
-                    <a:bodyPr/>
-                    <a:lstStyle/>
-                    <a:p>
-                      <a:pPr>
-                        <a:defRPr sz="1000">
-                          <a:solidFill>
-                            <a:srgbClr val="1A1A2E"/>
-                          </a:solidFill>
-                          <a:latin typeface="Calibri"/>
-                        </a:defRPr>
-                      </a:pPr>
-                      <a:r>
-                        <a:t>+0.76%</a:t>
-                      </a:r>
-                    </a:p>
-                  </a:txBody>
-                  <a:tcPr marL="45720" marR="45720" marT="18288" marB="18288">
-                    <a:solidFill>
-                      <a:srgbClr val="F5F0E8"/>
-                    </a:solidFill>
-                  </a:tcPr>
-                </a:tc>
-              </a:tr>
-              <a:tr h="274320">
-                <a:tc>
-                  <a:txBody>
-                    <a:bodyPr/>
-                    <a:lstStyle/>
-                    <a:p>
-                      <a:pPr>
-                        <a:defRPr sz="1000">
-                          <a:solidFill>
-                            <a:srgbClr val="1A1A2E"/>
-                          </a:solidFill>
-                          <a:latin typeface="Calibri"/>
-                        </a:defRPr>
-                      </a:pPr>
-                      <a:r>
-                        <a:t>食費・光熱水費</a:t>
-                      </a:r>
-                    </a:p>
-                  </a:txBody>
-                  <a:tcPr marL="45720" marR="45720" marT="18288" marB="18288">
-                    <a:solidFill>
-                      <a:srgbClr val="E8F0F0"/>
-                    </a:solidFill>
-                  </a:tcPr>
-                </a:tc>
-                <a:tc>
-                  <a:txBody>
-                    <a:bodyPr/>
-                    <a:lstStyle/>
-                    <a:p>
-                      <a:pPr>
-                        <a:defRPr sz="1000">
-                          <a:solidFill>
-                            <a:srgbClr val="1A1A2E"/>
-                          </a:solidFill>
-                          <a:latin typeface="Calibri"/>
-                        </a:defRPr>
-                      </a:pPr>
-                      <a:r>
-                        <a:t>+0.09%</a:t>
-                      </a:r>
-                    </a:p>
-                  </a:txBody>
-                  <a:tcPr marL="45720" marR="45720" marT="18288" marB="18288">
-                    <a:solidFill>
-                      <a:srgbClr val="E8F0F0"/>
-                    </a:solidFill>
-                  </a:tcPr>
-                </a:tc>
-              </a:tr>
-              <a:tr h="274320">
-                <a:tc>
-                  <a:txBody>
-                    <a:bodyPr/>
-                    <a:lstStyle/>
-                    <a:p>
-                      <a:pPr>
-                        <a:defRPr sz="1000">
-                          <a:solidFill>
-                            <a:srgbClr val="1A1A2E"/>
-                          </a:solidFill>
-                          <a:latin typeface="Calibri"/>
-                        </a:defRPr>
-                      </a:pPr>
-                      <a:r>
-                        <a:t>経営難</a:t>
-                      </a:r>
-                    </a:p>
-                  </a:txBody>
-                  <a:tcPr marL="45720" marR="45720" marT="18288" marB="18288">
-                    <a:solidFill>
-                      <a:srgbClr val="F5F0E8"/>
-                    </a:solidFill>
-                  </a:tcPr>
-                </a:tc>
-                <a:tc>
-                  <a:txBody>
-                    <a:bodyPr/>
-                    <a:lstStyle/>
-                    <a:p>
-                      <a:pPr>
-                        <a:defRPr sz="1000">
-                          <a:solidFill>
-                            <a:srgbClr val="1A1A2E"/>
-                          </a:solidFill>
-                          <a:latin typeface="Calibri"/>
-                        </a:defRPr>
-                      </a:pPr>
-                      <a:r>
-                        <a:t>+0.44%</a:t>
-                      </a:r>
-                    </a:p>
-                  </a:txBody>
-                  <a:tcPr marL="45720" marR="45720" marT="18288" marB="18288">
-                    <a:solidFill>
-                      <a:srgbClr val="F5F0E8"/>
-                    </a:solidFill>
-                  </a:tcPr>
-                </a:tc>
-              </a:tr>
-            </a:tbl>
-          </a:graphicData>
-        </a:graphic>
-      </p:graphicFrame>
-      <p:sp>
-        <p:nvSpPr>
-          <p:cNvPr id="7" name="Rectangle 6"/>
+      <p:sp>
+        <p:nvSpPr>
+          <p:cNvPr id="6" name="Rectangle 5"/>
           <p:cNvSpPr/>
           <p:nvPr/>
         </p:nvSpPr>
         <p:spPr>
           <a:xfrm>
-            <a:off x="457200" y="4206240"/>
-            <a:ext cx="54864" cy="640080"/>
+            <a:off x="731520" y="3017520"/>
+            <a:ext cx="1828800" cy="822960"/>
           </a:xfrm>
           <a:prstGeom prst="rect">
             <a:avLst/>
@@ -3577,14 +3300,474 @@
       </p:sp>
       <p:sp>
         <p:nvSpPr>
-          <p:cNvPr id="8" name="Rectangle 7"/>
+          <p:cNvPr id="7" name="TextBox 6"/>
+          <p:cNvSpPr txBox="1"/>
+          <p:nvPr/>
+        </p:nvSpPr>
+        <p:spPr>
+          <a:xfrm>
+            <a:off x="731520" y="3017520"/>
+            <a:ext cx="1828800" cy="502920"/>
+          </a:xfrm>
+          <a:prstGeom prst="rect">
+            <a:avLst/>
+          </a:prstGeom>
+          <a:noFill/>
+        </p:spPr>
+        <p:txBody>
+          <a:bodyPr wrap="square" lIns="45720" rIns="45720" tIns="27432" bIns="27432">
+            <a:spAutoFit/>
+          </a:bodyPr>
+          <a:lstStyle/>
+          <a:p>
+            <a:pPr algn="ctr">
+              <a:defRPr sz="2200" b="1">
+                <a:solidFill>
+                  <a:srgbClr val="0D2B3E"/>
+                </a:solidFill>
+                <a:latin typeface="Calibri"/>
+              </a:defRPr>
+            </a:pPr>
+            <a:r>
+              <a:t>+1.70%</a:t>
+            </a:r>
+          </a:p>
+        </p:txBody>
+      </p:sp>
+      <p:sp>
+        <p:nvSpPr>
+          <p:cNvPr id="8" name="TextBox 7"/>
+          <p:cNvSpPr txBox="1"/>
+          <p:nvPr/>
+        </p:nvSpPr>
+        <p:spPr>
+          <a:xfrm>
+            <a:off x="731520" y="3520440"/>
+            <a:ext cx="1828800" cy="274320"/>
+          </a:xfrm>
+          <a:prstGeom prst="rect">
+            <a:avLst/>
+          </a:prstGeom>
+          <a:noFill/>
+        </p:spPr>
+        <p:txBody>
+          <a:bodyPr wrap="square" lIns="45720" rIns="45720" tIns="27432" bIns="27432">
+            <a:spAutoFit/>
+          </a:bodyPr>
+          <a:lstStyle/>
+          <a:p>
+            <a:pPr algn="ctr">
+              <a:defRPr sz="1000" b="0">
+                <a:solidFill>
+                  <a:srgbClr val="0D2B3E"/>
+                </a:solidFill>
+                <a:latin typeface="Calibri"/>
+              </a:defRPr>
+            </a:pPr>
+            <a:r>
+              <a:t>賃上げ</a:t>
+            </a:r>
+          </a:p>
+        </p:txBody>
+      </p:sp>
+      <p:sp>
+        <p:nvSpPr>
+          <p:cNvPr id="9" name="Rectangle 8"/>
           <p:cNvSpPr/>
           <p:nvPr/>
         </p:nvSpPr>
         <p:spPr>
           <a:xfrm>
+            <a:off x="2834639" y="3017520"/>
+            <a:ext cx="1828800" cy="822960"/>
+          </a:xfrm>
+          <a:prstGeom prst="rect">
+            <a:avLst/>
+          </a:prstGeom>
+          <a:solidFill>
+            <a:srgbClr val="E89B3B"/>
+          </a:solidFill>
+          <a:ln>
+            <a:noFill/>
+          </a:ln>
+        </p:spPr>
+        <p:style>
+          <a:lnRef idx="1">
+            <a:schemeClr val="accent1"/>
+          </a:lnRef>
+          <a:fillRef idx="3">
+            <a:schemeClr val="accent1"/>
+          </a:fillRef>
+          <a:effectRef idx="2">
+            <a:schemeClr val="accent1"/>
+          </a:effectRef>
+          <a:fontRef idx="minor">
+            <a:schemeClr val="lt1"/>
+          </a:fontRef>
+        </p:style>
+        <p:txBody>
+          <a:bodyPr rtlCol="0" anchor="ctr"/>
+          <a:lstStyle/>
+          <a:p>
+            <a:pPr algn="ctr"/>
+          </a:p>
+        </p:txBody>
+      </p:sp>
+      <p:sp>
+        <p:nvSpPr>
+          <p:cNvPr id="10" name="TextBox 9"/>
+          <p:cNvSpPr txBox="1"/>
+          <p:nvPr/>
+        </p:nvSpPr>
+        <p:spPr>
+          <a:xfrm>
+            <a:off x="2834639" y="3017520"/>
+            <a:ext cx="1828800" cy="502920"/>
+          </a:xfrm>
+          <a:prstGeom prst="rect">
+            <a:avLst/>
+          </a:prstGeom>
+          <a:noFill/>
+        </p:spPr>
+        <p:txBody>
+          <a:bodyPr wrap="square" lIns="45720" rIns="45720" tIns="27432" bIns="27432">
+            <a:spAutoFit/>
+          </a:bodyPr>
+          <a:lstStyle/>
+          <a:p>
+            <a:pPr algn="ctr">
+              <a:defRPr sz="2200" b="1">
+                <a:solidFill>
+                  <a:srgbClr val="0D2B3E"/>
+                </a:solidFill>
+                <a:latin typeface="Calibri"/>
+              </a:defRPr>
+            </a:pPr>
+            <a:r>
+              <a:t>+0.76%</a:t>
+            </a:r>
+          </a:p>
+        </p:txBody>
+      </p:sp>
+      <p:sp>
+        <p:nvSpPr>
+          <p:cNvPr id="11" name="TextBox 10"/>
+          <p:cNvSpPr txBox="1"/>
+          <p:nvPr/>
+        </p:nvSpPr>
+        <p:spPr>
+          <a:xfrm>
+            <a:off x="2834639" y="3520440"/>
+            <a:ext cx="1828800" cy="274320"/>
+          </a:xfrm>
+          <a:prstGeom prst="rect">
+            <a:avLst/>
+          </a:prstGeom>
+          <a:noFill/>
+        </p:spPr>
+        <p:txBody>
+          <a:bodyPr wrap="square" lIns="45720" rIns="45720" tIns="27432" bIns="27432">
+            <a:spAutoFit/>
+          </a:bodyPr>
+          <a:lstStyle/>
+          <a:p>
+            <a:pPr algn="ctr">
+              <a:defRPr sz="1000" b="0">
+                <a:solidFill>
+                  <a:srgbClr val="0D2B3E"/>
+                </a:solidFill>
+                <a:latin typeface="Calibri"/>
+              </a:defRPr>
+            </a:pPr>
+            <a:r>
+              <a:t>物価高騰</a:t>
+            </a:r>
+          </a:p>
+        </p:txBody>
+      </p:sp>
+      <p:sp>
+        <p:nvSpPr>
+          <p:cNvPr id="12" name="Rectangle 11"/>
+          <p:cNvSpPr/>
+          <p:nvPr/>
+        </p:nvSpPr>
+        <p:spPr>
+          <a:xfrm>
+            <a:off x="4937759" y="3017520"/>
+            <a:ext cx="1828800" cy="822960"/>
+          </a:xfrm>
+          <a:prstGeom prst="rect">
+            <a:avLst/>
+          </a:prstGeom>
+          <a:solidFill>
+            <a:srgbClr val="E89B3B"/>
+          </a:solidFill>
+          <a:ln>
+            <a:noFill/>
+          </a:ln>
+        </p:spPr>
+        <p:style>
+          <a:lnRef idx="1">
+            <a:schemeClr val="accent1"/>
+          </a:lnRef>
+          <a:fillRef idx="3">
+            <a:schemeClr val="accent1"/>
+          </a:fillRef>
+          <a:effectRef idx="2">
+            <a:schemeClr val="accent1"/>
+          </a:effectRef>
+          <a:fontRef idx="minor">
+            <a:schemeClr val="lt1"/>
+          </a:fontRef>
+        </p:style>
+        <p:txBody>
+          <a:bodyPr rtlCol="0" anchor="ctr"/>
+          <a:lstStyle/>
+          <a:p>
+            <a:pPr algn="ctr"/>
+          </a:p>
+        </p:txBody>
+      </p:sp>
+      <p:sp>
+        <p:nvSpPr>
+          <p:cNvPr id="13" name="TextBox 12"/>
+          <p:cNvSpPr txBox="1"/>
+          <p:nvPr/>
+        </p:nvSpPr>
+        <p:spPr>
+          <a:xfrm>
+            <a:off x="4937759" y="3017520"/>
+            <a:ext cx="1828800" cy="502920"/>
+          </a:xfrm>
+          <a:prstGeom prst="rect">
+            <a:avLst/>
+          </a:prstGeom>
+          <a:noFill/>
+        </p:spPr>
+        <p:txBody>
+          <a:bodyPr wrap="square" lIns="45720" rIns="45720" tIns="27432" bIns="27432">
+            <a:spAutoFit/>
+          </a:bodyPr>
+          <a:lstStyle/>
+          <a:p>
+            <a:pPr algn="ctr">
+              <a:defRPr sz="2200" b="1">
+                <a:solidFill>
+                  <a:srgbClr val="0D2B3E"/>
+                </a:solidFill>
+                <a:latin typeface="Calibri"/>
+              </a:defRPr>
+            </a:pPr>
+            <a:r>
+              <a:t>+0.09%</a:t>
+            </a:r>
+          </a:p>
+        </p:txBody>
+      </p:sp>
+      <p:sp>
+        <p:nvSpPr>
+          <p:cNvPr id="14" name="TextBox 13"/>
+          <p:cNvSpPr txBox="1"/>
+          <p:nvPr/>
+        </p:nvSpPr>
+        <p:spPr>
+          <a:xfrm>
+            <a:off x="4937759" y="3520440"/>
+            <a:ext cx="1828800" cy="274320"/>
+          </a:xfrm>
+          <a:prstGeom prst="rect">
+            <a:avLst/>
+          </a:prstGeom>
+          <a:noFill/>
+        </p:spPr>
+        <p:txBody>
+          <a:bodyPr wrap="square" lIns="45720" rIns="45720" tIns="27432" bIns="27432">
+            <a:spAutoFit/>
+          </a:bodyPr>
+          <a:lstStyle/>
+          <a:p>
+            <a:pPr algn="ctr">
+              <a:defRPr sz="1000" b="0">
+                <a:solidFill>
+                  <a:srgbClr val="0D2B3E"/>
+                </a:solidFill>
+                <a:latin typeface="Calibri"/>
+              </a:defRPr>
+            </a:pPr>
+            <a:r>
+              <a:t>食費等</a:t>
+            </a:r>
+          </a:p>
+        </p:txBody>
+      </p:sp>
+      <p:sp>
+        <p:nvSpPr>
+          <p:cNvPr id="15" name="Rectangle 14"/>
+          <p:cNvSpPr/>
+          <p:nvPr/>
+        </p:nvSpPr>
+        <p:spPr>
+          <a:xfrm>
+            <a:off x="7040879" y="3017520"/>
+            <a:ext cx="1828800" cy="822960"/>
+          </a:xfrm>
+          <a:prstGeom prst="rect">
+            <a:avLst/>
+          </a:prstGeom>
+          <a:solidFill>
+            <a:srgbClr val="E89B3B"/>
+          </a:solidFill>
+          <a:ln>
+            <a:noFill/>
+          </a:ln>
+        </p:spPr>
+        <p:style>
+          <a:lnRef idx="1">
+            <a:schemeClr val="accent1"/>
+          </a:lnRef>
+          <a:fillRef idx="3">
+            <a:schemeClr val="accent1"/>
+          </a:fillRef>
+          <a:effectRef idx="2">
+            <a:schemeClr val="accent1"/>
+          </a:effectRef>
+          <a:fontRef idx="minor">
+            <a:schemeClr val="lt1"/>
+          </a:fontRef>
+        </p:style>
+        <p:txBody>
+          <a:bodyPr rtlCol="0" anchor="ctr"/>
+          <a:lstStyle/>
+          <a:p>
+            <a:pPr algn="ctr"/>
+          </a:p>
+        </p:txBody>
+      </p:sp>
+      <p:sp>
+        <p:nvSpPr>
+          <p:cNvPr id="16" name="TextBox 15"/>
+          <p:cNvSpPr txBox="1"/>
+          <p:nvPr/>
+        </p:nvSpPr>
+        <p:spPr>
+          <a:xfrm>
+            <a:off x="7040879" y="3017520"/>
+            <a:ext cx="1828800" cy="502920"/>
+          </a:xfrm>
+          <a:prstGeom prst="rect">
+            <a:avLst/>
+          </a:prstGeom>
+          <a:noFill/>
+        </p:spPr>
+        <p:txBody>
+          <a:bodyPr wrap="square" lIns="45720" rIns="45720" tIns="27432" bIns="27432">
+            <a:spAutoFit/>
+          </a:bodyPr>
+          <a:lstStyle/>
+          <a:p>
+            <a:pPr algn="ctr">
+              <a:defRPr sz="2200" b="1">
+                <a:solidFill>
+                  <a:srgbClr val="0D2B3E"/>
+                </a:solidFill>
+                <a:latin typeface="Calibri"/>
+              </a:defRPr>
+            </a:pPr>
+            <a:r>
+              <a:t>+0.44%</a:t>
+            </a:r>
+          </a:p>
+        </p:txBody>
+      </p:sp>
+      <p:sp>
+        <p:nvSpPr>
+          <p:cNvPr id="17" name="TextBox 16"/>
+          <p:cNvSpPr txBox="1"/>
+          <p:nvPr/>
+        </p:nvSpPr>
+        <p:spPr>
+          <a:xfrm>
+            <a:off x="7040879" y="3520440"/>
+            <a:ext cx="1828800" cy="274320"/>
+          </a:xfrm>
+          <a:prstGeom prst="rect">
+            <a:avLst/>
+          </a:prstGeom>
+          <a:noFill/>
+        </p:spPr>
+        <p:txBody>
+          <a:bodyPr wrap="square" lIns="45720" rIns="45720" tIns="27432" bIns="27432">
+            <a:spAutoFit/>
+          </a:bodyPr>
+          <a:lstStyle/>
+          <a:p>
+            <a:pPr algn="ctr">
+              <a:defRPr sz="1000" b="0">
+                <a:solidFill>
+                  <a:srgbClr val="0D2B3E"/>
+                </a:solidFill>
+                <a:latin typeface="Calibri"/>
+              </a:defRPr>
+            </a:pPr>
+            <a:r>
+              <a:t>経営難</a:t>
+            </a:r>
+          </a:p>
+        </p:txBody>
+      </p:sp>
+      <p:sp>
+        <p:nvSpPr>
+          <p:cNvPr id="18" name="Rectangle 17"/>
+          <p:cNvSpPr/>
+          <p:nvPr/>
+        </p:nvSpPr>
+        <p:spPr>
+          <a:xfrm>
+            <a:off x="457200" y="4206240"/>
+            <a:ext cx="54864" cy="548640"/>
+          </a:xfrm>
+          <a:prstGeom prst="rect">
+            <a:avLst/>
+          </a:prstGeom>
+          <a:solidFill>
+            <a:srgbClr val="E89B3B"/>
+          </a:solidFill>
+          <a:ln>
+            <a:noFill/>
+          </a:ln>
+        </p:spPr>
+        <p:style>
+          <a:lnRef idx="1">
+            <a:schemeClr val="accent1"/>
+          </a:lnRef>
+          <a:fillRef idx="3">
+            <a:schemeClr val="accent1"/>
+          </a:fillRef>
+          <a:effectRef idx="2">
+            <a:schemeClr val="accent1"/>
+          </a:effectRef>
+          <a:fontRef idx="minor">
+            <a:schemeClr val="lt1"/>
+          </a:fontRef>
+        </p:style>
+        <p:txBody>
+          <a:bodyPr rtlCol="0" anchor="ctr"/>
+          <a:lstStyle/>
+          <a:p>
+            <a:pPr algn="ctr"/>
+          </a:p>
+        </p:txBody>
+      </p:sp>
+      <p:sp>
+        <p:nvSpPr>
+          <p:cNvPr id="19" name="Rectangle 18"/>
+          <p:cNvSpPr/>
+          <p:nvPr/>
+        </p:nvSpPr>
+        <p:spPr>
+          <a:xfrm>
             <a:off x="566928" y="4206240"/>
-            <a:ext cx="8119872" cy="640080"/>
+            <a:ext cx="8119872" cy="548640"/>
           </a:xfrm>
           <a:prstGeom prst="rect">
             <a:avLst/>
@@ -3622,14 +3805,14 @@
       </p:sp>
       <p:sp>
         <p:nvSpPr>
-          <p:cNvPr id="9" name="TextBox 8"/>
+          <p:cNvPr id="20" name="TextBox 19"/>
           <p:cNvSpPr txBox="1"/>
           <p:nvPr/>
         </p:nvSpPr>
         <p:spPr>
           <a:xfrm>
             <a:off x="685800" y="4279392"/>
-            <a:ext cx="7863840" cy="493775"/>
+            <a:ext cx="7863840" cy="402335"/>
           </a:xfrm>
           <a:prstGeom prst="rect">
             <a:avLst/>
@@ -3651,680 +3834,7 @@
               </a:defRPr>
             </a:pPr>
             <a:r>
-              <a:t>この改定で「あなたの給料」は上がるのか？</a:t>
-            </a:r>
-            <a:br/>
-            <a:r>
-              <a:t>そして「あなたの診療」はどう変わるのか？</a:t>
-            </a:r>
-          </a:p>
-        </p:txBody>
-      </p:sp>
-    </p:spTree>
-  </p:cSld>
-  <p:clrMapOvr>
-    <a:masterClrMapping/>
-  </p:clrMapOvr>
-</p:sld>
-</file>
-
-<file path=ppt/slides/slide10.xml><?xml version="1.0" encoding="utf-8"?>
-<p:sld xmlns:a="http://schemas.openxmlformats.org/drawingml/2006/main" xmlns:p="http://schemas.openxmlformats.org/presentationml/2006/main" xmlns:r="http://schemas.openxmlformats.org/officeDocument/2006/relationships">
-  <p:cSld>
-    <p:bg>
-      <p:bgPr>
-        <a:solidFill>
-          <a:srgbClr val="F5F0E8"/>
-        </a:solidFill>
-        <a:effectLst/>
-      </p:bgPr>
-    </p:bg>
-    <p:spTree>
-      <p:nvGrpSpPr>
-        <p:cNvPr id="1" name=""/>
-        <p:cNvGrpSpPr/>
-        <p:nvPr/>
-      </p:nvGrpSpPr>
-      <p:grpSpPr/>
-      <p:sp>
-        <p:nvSpPr>
-          <p:cNvPr id="2" name="TextBox 1"/>
-          <p:cNvSpPr txBox="1"/>
-          <p:nvPr/>
-        </p:nvSpPr>
-        <p:spPr>
-          <a:xfrm>
-            <a:off x="457200" y="182880"/>
-            <a:ext cx="8229600" cy="457200"/>
-          </a:xfrm>
-          <a:prstGeom prst="rect">
-            <a:avLst/>
-          </a:prstGeom>
-          <a:noFill/>
-        </p:spPr>
-        <p:txBody>
-          <a:bodyPr wrap="square" lIns="45720" rIns="45720" tIns="27432" bIns="27432">
-            <a:spAutoFit/>
-          </a:bodyPr>
-          <a:lstStyle/>
-          <a:p>
-            <a:pPr algn="l">
-              <a:defRPr sz="2200" b="1">
-                <a:solidFill>
-                  <a:srgbClr val="1A1A2E"/>
-                </a:solidFill>
-                <a:latin typeface="Calibri"/>
-              </a:defRPr>
-            </a:pPr>
-            <a:r>
-              <a:t>振り返りと持ち帰りの問い</a:t>
-            </a:r>
-          </a:p>
-        </p:txBody>
-      </p:sp>
-      <p:sp>
-        <p:nvSpPr>
-          <p:cNvPr id="3" name="Rectangle 2"/>
-          <p:cNvSpPr/>
-          <p:nvPr/>
-        </p:nvSpPr>
-        <p:spPr>
-          <a:xfrm>
-            <a:off x="457200" y="640080"/>
-            <a:ext cx="2286000" cy="54864"/>
-          </a:xfrm>
-          <a:prstGeom prst="rect">
-            <a:avLst/>
-          </a:prstGeom>
-          <a:solidFill>
-            <a:srgbClr val="E89B3B"/>
-          </a:solidFill>
-          <a:ln>
-            <a:noFill/>
-          </a:ln>
-        </p:spPr>
-        <p:style>
-          <a:lnRef idx="1">
-            <a:schemeClr val="accent1"/>
-          </a:lnRef>
-          <a:fillRef idx="3">
-            <a:schemeClr val="accent1"/>
-          </a:fillRef>
-          <a:effectRef idx="2">
-            <a:schemeClr val="accent1"/>
-          </a:effectRef>
-          <a:fontRef idx="minor">
-            <a:schemeClr val="lt1"/>
-          </a:fontRef>
-        </p:style>
-        <p:txBody>
-          <a:bodyPr rtlCol="0" anchor="ctr"/>
-          <a:lstStyle/>
-          <a:p>
-            <a:pPr algn="ctr"/>
-          </a:p>
-        </p:txBody>
-      </p:sp>
-      <p:sp>
-        <p:nvSpPr>
-          <p:cNvPr id="4" name="TextBox 3"/>
-          <p:cNvSpPr txBox="1"/>
-          <p:nvPr/>
-        </p:nvSpPr>
-        <p:spPr>
-          <a:xfrm>
-            <a:off x="457200" y="822960"/>
-            <a:ext cx="4114800" cy="274320"/>
-          </a:xfrm>
-          <a:prstGeom prst="rect">
-            <a:avLst/>
-          </a:prstGeom>
-          <a:noFill/>
-        </p:spPr>
-        <p:txBody>
-          <a:bodyPr wrap="square" lIns="45720" rIns="45720" tIns="27432" bIns="27432">
-            <a:spAutoFit/>
-          </a:bodyPr>
-          <a:lstStyle/>
-          <a:p>
-            <a:pPr algn="l">
-              <a:defRPr sz="1400" b="1">
-                <a:solidFill>
-                  <a:srgbClr val="E89B3B"/>
-                </a:solidFill>
-                <a:latin typeface="Calibri"/>
-              </a:defRPr>
-            </a:pPr>
-            <a:r>
-              <a:t>理解度チェック（挙手）</a:t>
-            </a:r>
-          </a:p>
-        </p:txBody>
-      </p:sp>
-      <p:sp>
-        <p:nvSpPr>
-          <p:cNvPr id="5" name="TextBox 4"/>
-          <p:cNvSpPr txBox="1"/>
-          <p:nvPr/>
-        </p:nvSpPr>
-        <p:spPr>
-          <a:xfrm>
-            <a:off x="457200" y="1188720"/>
-            <a:ext cx="4114800" cy="1371600"/>
-          </a:xfrm>
-          <a:prstGeom prst="rect">
-            <a:avLst/>
-          </a:prstGeom>
-          <a:noFill/>
-        </p:spPr>
-        <p:txBody>
-          <a:bodyPr wrap="square" lIns="45720" rIns="45720" tIns="27432" bIns="27432">
-            <a:spAutoFit/>
-          </a:bodyPr>
-          <a:lstStyle/>
-          <a:p>
-            <a:pPr>
-              <a:defRPr sz="1200">
-                <a:solidFill>
-                  <a:srgbClr val="1A1A2E"/>
-                </a:solidFill>
-                <a:latin typeface="Calibri"/>
-              </a:defRPr>
-              <a:buChar char="●"/>
-            </a:pPr>
-            <a:r>
-              <a:t>改定の4つの柱を2つ以上言える？</a:t>
-            </a:r>
-          </a:p>
-          <a:p>
-            <a:pPr>
-              <a:defRPr sz="1200">
-                <a:solidFill>
-                  <a:srgbClr val="1A1A2E"/>
-                </a:solidFill>
-                <a:latin typeface="Calibri"/>
-              </a:defRPr>
-              <a:buChar char="●"/>
-            </a:pPr>
-            <a:r>
-              <a:t>機能強化加算にBCPが必要なことを覚えた？</a:t>
-            </a:r>
-          </a:p>
-          <a:p>
-            <a:pPr>
-              <a:defRPr sz="1200">
-                <a:solidFill>
-                  <a:srgbClr val="1A1A2E"/>
-                </a:solidFill>
-                <a:latin typeface="Calibri"/>
-              </a:defRPr>
-              <a:buChar char="●"/>
-            </a:pPr>
-            <a:r>
-              <a:t>医療DX加算が3区分になったことを理解した？</a:t>
-            </a:r>
-          </a:p>
-        </p:txBody>
-      </p:sp>
-      <p:sp>
-        <p:nvSpPr>
-          <p:cNvPr id="6" name="TextBox 5"/>
-          <p:cNvSpPr txBox="1"/>
-          <p:nvPr/>
-        </p:nvSpPr>
-        <p:spPr>
-          <a:xfrm>
-            <a:off x="4754880" y="822960"/>
-            <a:ext cx="4114800" cy="274320"/>
-          </a:xfrm>
-          <a:prstGeom prst="rect">
-            <a:avLst/>
-          </a:prstGeom>
-          <a:noFill/>
-        </p:spPr>
-        <p:txBody>
-          <a:bodyPr wrap="square" lIns="45720" rIns="45720" tIns="27432" bIns="27432">
-            <a:spAutoFit/>
-          </a:bodyPr>
-          <a:lstStyle/>
-          <a:p>
-            <a:pPr algn="l">
-              <a:defRPr sz="1400" b="1">
-                <a:solidFill>
-                  <a:srgbClr val="E89B3B"/>
-                </a:solidFill>
-                <a:latin typeface="Calibri"/>
-              </a:defRPr>
-            </a:pPr>
-            <a:r>
-              <a:t>スケジュール</a:t>
-            </a:r>
-          </a:p>
-        </p:txBody>
-      </p:sp>
-      <p:graphicFrame>
-        <p:nvGraphicFramePr>
-          <p:cNvPr id="7" name="Table 6"/>
-          <p:cNvGraphicFramePr>
-            <a:graphicFrameLocks noGrp="1"/>
-          </p:cNvGraphicFramePr>
-          <p:nvPr/>
-        </p:nvGraphicFramePr>
-        <p:xfrm>
-          <a:off x="4572000" y="1097280"/>
-          <a:ext cx="4297680" cy="1810512"/>
-        </p:xfrm>
-        <a:graphic>
-          <a:graphicData uri="http://schemas.openxmlformats.org/drawingml/2006/table">
-            <a:tbl>
-              <a:tblPr firstRow="1" bandRow="1">
-                <a:tableStyleId>{5C22544A-7EE6-4342-B048-85BDC9FD1C3A}</a:tableStyleId>
-              </a:tblPr>
-              <a:tblGrid>
-                <a:gridCol w="1371600"/>
-                <a:gridCol w="2926080"/>
-              </a:tblGrid>
-              <a:tr h="301752">
-                <a:tc>
-                  <a:txBody>
-                    <a:bodyPr/>
-                    <a:lstStyle/>
-                    <a:p>
-                      <a:pPr>
-                        <a:defRPr sz="900" b="1">
-                          <a:solidFill>
-                            <a:srgbClr val="F5F0E8"/>
-                          </a:solidFill>
-                          <a:latin typeface="Calibri"/>
-                        </a:defRPr>
-                      </a:pPr>
-                      <a:r>
-                        <a:t>時期</a:t>
-                      </a:r>
-                    </a:p>
-                  </a:txBody>
-                  <a:tcPr marL="45720" marR="45720" marT="18288" marB="18288">
-                    <a:solidFill>
-                      <a:srgbClr val="0D2B3E"/>
-                    </a:solidFill>
-                  </a:tcPr>
-                </a:tc>
-                <a:tc>
-                  <a:txBody>
-                    <a:bodyPr/>
-                    <a:lstStyle/>
-                    <a:p>
-                      <a:pPr>
-                        <a:defRPr sz="900" b="1">
-                          <a:solidFill>
-                            <a:srgbClr val="F5F0E8"/>
-                          </a:solidFill>
-                          <a:latin typeface="Calibri"/>
-                        </a:defRPr>
-                      </a:pPr>
-                      <a:r>
-                        <a:t>やるべきこと</a:t>
-                      </a:r>
-                    </a:p>
-                  </a:txBody>
-                  <a:tcPr marL="45720" marR="45720" marT="18288" marB="18288">
-                    <a:solidFill>
-                      <a:srgbClr val="0D2B3E"/>
-                    </a:solidFill>
-                  </a:tcPr>
-                </a:tc>
-              </a:tr>
-              <a:tr h="301752">
-                <a:tc>
-                  <a:txBody>
-                    <a:bodyPr/>
-                    <a:lstStyle/>
-                    <a:p>
-                      <a:pPr>
-                        <a:defRPr sz="900">
-                          <a:solidFill>
-                            <a:srgbClr val="1A1A2E"/>
-                          </a:solidFill>
-                          <a:latin typeface="Calibri"/>
-                        </a:defRPr>
-                      </a:pPr>
-                      <a:r>
-                        <a:t>今すぐ</a:t>
-                      </a:r>
-                    </a:p>
-                  </a:txBody>
-                  <a:tcPr marL="45720" marR="45720" marT="18288" marB="18288">
-                    <a:solidFill>
-                      <a:srgbClr val="E8F0F0"/>
-                    </a:solidFill>
-                  </a:tcPr>
-                </a:tc>
-                <a:tc>
-                  <a:txBody>
-                    <a:bodyPr/>
-                    <a:lstStyle/>
-                    <a:p>
-                      <a:pPr>
-                        <a:defRPr sz="900">
-                          <a:solidFill>
-                            <a:srgbClr val="1A1A2E"/>
-                          </a:solidFill>
-                          <a:latin typeface="Calibri"/>
-                        </a:defRPr>
-                      </a:pPr>
-                      <a:r>
-                        <a:t>マイナ保険証利用率の確認</a:t>
-                      </a:r>
-                    </a:p>
-                  </a:txBody>
-                  <a:tcPr marL="45720" marR="45720" marT="18288" marB="18288">
-                    <a:solidFill>
-                      <a:srgbClr val="E8F0F0"/>
-                    </a:solidFill>
-                  </a:tcPr>
-                </a:tc>
-              </a:tr>
-              <a:tr h="301752">
-                <a:tc>
-                  <a:txBody>
-                    <a:bodyPr/>
-                    <a:lstStyle/>
-                    <a:p>
-                      <a:pPr>
-                        <a:defRPr sz="900">
-                          <a:solidFill>
-                            <a:srgbClr val="1A1A2E"/>
-                          </a:solidFill>
-                          <a:latin typeface="Calibri"/>
-                        </a:defRPr>
-                      </a:pPr>
-                      <a:r>
-                        <a:t>2026年4月</a:t>
-                      </a:r>
-                    </a:p>
-                  </a:txBody>
-                  <a:tcPr marL="45720" marR="45720" marT="18288" marB="18288">
-                    <a:solidFill>
-                      <a:srgbClr val="F5F0E8"/>
-                    </a:solidFill>
-                  </a:tcPr>
-                </a:tc>
-                <a:tc>
-                  <a:txBody>
-                    <a:bodyPr/>
-                    <a:lstStyle/>
-                    <a:p>
-                      <a:pPr>
-                        <a:defRPr sz="900">
-                          <a:solidFill>
-                            <a:srgbClr val="1A1A2E"/>
-                          </a:solidFill>
-                          <a:latin typeface="Calibri"/>
-                        </a:defRPr>
-                      </a:pPr>
-                      <a:r>
-                        <a:t>告示・通知の詳細確認</a:t>
-                      </a:r>
-                    </a:p>
-                  </a:txBody>
-                  <a:tcPr marL="45720" marR="45720" marT="18288" marB="18288">
-                    <a:solidFill>
-                      <a:srgbClr val="F5F0E8"/>
-                    </a:solidFill>
-                  </a:tcPr>
-                </a:tc>
-              </a:tr>
-              <a:tr h="301752">
-                <a:tc>
-                  <a:txBody>
-                    <a:bodyPr/>
-                    <a:lstStyle/>
-                    <a:p>
-                      <a:pPr>
-                        <a:defRPr sz="900">
-                          <a:solidFill>
-                            <a:srgbClr val="1A1A2E"/>
-                          </a:solidFill>
-                          <a:latin typeface="Calibri"/>
-                        </a:defRPr>
-                      </a:pPr>
-                      <a:r>
-                        <a:t>2026年5月</a:t>
-                      </a:r>
-                    </a:p>
-                  </a:txBody>
-                  <a:tcPr marL="45720" marR="45720" marT="18288" marB="18288">
-                    <a:solidFill>
-                      <a:srgbClr val="E8F0F0"/>
-                    </a:solidFill>
-                  </a:tcPr>
-                </a:tc>
-                <a:tc>
-                  <a:txBody>
-                    <a:bodyPr/>
-                    <a:lstStyle/>
-                    <a:p>
-                      <a:pPr>
-                        <a:defRPr sz="900">
-                          <a:solidFill>
-                            <a:srgbClr val="1A1A2E"/>
-                          </a:solidFill>
-                          <a:latin typeface="Calibri"/>
-                        </a:defRPr>
-                      </a:pPr>
-                      <a:r>
-                        <a:t>新加算の届出提出</a:t>
-                      </a:r>
-                    </a:p>
-                  </a:txBody>
-                  <a:tcPr marL="45720" marR="45720" marT="18288" marB="18288">
-                    <a:solidFill>
-                      <a:srgbClr val="E8F0F0"/>
-                    </a:solidFill>
-                  </a:tcPr>
-                </a:tc>
-              </a:tr>
-              <a:tr h="301752">
-                <a:tc>
-                  <a:txBody>
-                    <a:bodyPr/>
-                    <a:lstStyle/>
-                    <a:p>
-                      <a:pPr>
-                        <a:defRPr sz="900">
-                          <a:solidFill>
-                            <a:srgbClr val="1A1A2E"/>
-                          </a:solidFill>
-                          <a:latin typeface="Calibri"/>
-                        </a:defRPr>
-                      </a:pPr>
-                      <a:r>
-                        <a:t>2026年6月1日</a:t>
-                      </a:r>
-                    </a:p>
-                  </a:txBody>
-                  <a:tcPr marL="45720" marR="45720" marT="18288" marB="18288">
-                    <a:solidFill>
-                      <a:srgbClr val="F5F0E8"/>
-                    </a:solidFill>
-                  </a:tcPr>
-                </a:tc>
-                <a:tc>
-                  <a:txBody>
-                    <a:bodyPr/>
-                    <a:lstStyle/>
-                    <a:p>
-                      <a:pPr>
-                        <a:defRPr sz="900">
-                          <a:solidFill>
-                            <a:srgbClr val="1A1A2E"/>
-                          </a:solidFill>
-                          <a:latin typeface="Calibri"/>
-                        </a:defRPr>
-                      </a:pPr>
-                      <a:r>
-                        <a:t>改定施行日</a:t>
-                      </a:r>
-                    </a:p>
-                  </a:txBody>
-                  <a:tcPr marL="45720" marR="45720" marT="18288" marB="18288">
-                    <a:solidFill>
-                      <a:srgbClr val="F5F0E8"/>
-                    </a:solidFill>
-                  </a:tcPr>
-                </a:tc>
-              </a:tr>
-              <a:tr h="301752">
-                <a:tc>
-                  <a:txBody>
-                    <a:bodyPr/>
-                    <a:lstStyle/>
-                    <a:p>
-                      <a:pPr>
-                        <a:defRPr sz="900">
-                          <a:solidFill>
-                            <a:srgbClr val="1A1A2E"/>
-                          </a:solidFill>
-                          <a:latin typeface="Calibri"/>
-                        </a:defRPr>
-                      </a:pPr>
-                      <a:r>
-                        <a:t>2027年5月末</a:t>
-                      </a:r>
-                    </a:p>
-                  </a:txBody>
-                  <a:tcPr marL="45720" marR="45720" marT="18288" marB="18288">
-                    <a:solidFill>
-                      <a:srgbClr val="E8F0F0"/>
-                    </a:solidFill>
-                  </a:tcPr>
-                </a:tc>
-                <a:tc>
-                  <a:txBody>
-                    <a:bodyPr/>
-                    <a:lstStyle/>
-                    <a:p>
-                      <a:pPr>
-                        <a:defRPr sz="900">
-                          <a:solidFill>
-                            <a:srgbClr val="1A1A2E"/>
-                          </a:solidFill>
-                          <a:latin typeface="Calibri"/>
-                        </a:defRPr>
-                      </a:pPr>
-                      <a:r>
-                        <a:t>BCP策定の経過措置期限</a:t>
-                      </a:r>
-                    </a:p>
-                  </a:txBody>
-                  <a:tcPr marL="45720" marR="45720" marT="18288" marB="18288">
-                    <a:solidFill>
-                      <a:srgbClr val="E8F0F0"/>
-                    </a:solidFill>
-                  </a:tcPr>
-                </a:tc>
-              </a:tr>
-            </a:tbl>
-          </a:graphicData>
-        </a:graphic>
-      </p:graphicFrame>
-      <p:sp>
-        <p:nvSpPr>
-          <p:cNvPr id="8" name="TextBox 7"/>
-          <p:cNvSpPr txBox="1"/>
-          <p:nvPr/>
-        </p:nvSpPr>
-        <p:spPr>
-          <a:xfrm>
-            <a:off x="457200" y="2926080"/>
-            <a:ext cx="4114800" cy="274320"/>
-          </a:xfrm>
-          <a:prstGeom prst="rect">
-            <a:avLst/>
-          </a:prstGeom>
-          <a:noFill/>
-        </p:spPr>
-        <p:txBody>
-          <a:bodyPr wrap="square" lIns="45720" rIns="45720" tIns="27432" bIns="27432">
-            <a:spAutoFit/>
-          </a:bodyPr>
-          <a:lstStyle/>
-          <a:p>
-            <a:pPr algn="l">
-              <a:defRPr sz="1400" b="1">
-                <a:solidFill>
-                  <a:srgbClr val="E89B3B"/>
-                </a:solidFill>
-                <a:latin typeface="Calibri"/>
-              </a:defRPr>
-            </a:pPr>
-            <a:r>
-              <a:t>持ち帰りの宿題</a:t>
-            </a:r>
-          </a:p>
-        </p:txBody>
-      </p:sp>
-      <p:sp>
-        <p:nvSpPr>
-          <p:cNvPr id="9" name="TextBox 8"/>
-          <p:cNvSpPr txBox="1"/>
-          <p:nvPr/>
-        </p:nvSpPr>
-        <p:spPr>
-          <a:xfrm>
-            <a:off x="457200" y="3291840"/>
-            <a:ext cx="4114800" cy="1371600"/>
-          </a:xfrm>
-          <a:prstGeom prst="rect">
-            <a:avLst/>
-          </a:prstGeom>
-          <a:noFill/>
-        </p:spPr>
-        <p:txBody>
-          <a:bodyPr wrap="square" lIns="45720" rIns="45720" tIns="27432" bIns="27432">
-            <a:spAutoFit/>
-          </a:bodyPr>
-          <a:lstStyle/>
-          <a:p>
-            <a:pPr>
-              <a:defRPr sz="1200">
-                <a:solidFill>
-                  <a:srgbClr val="1A1A2E"/>
-                </a:solidFill>
-                <a:latin typeface="Calibri"/>
-              </a:defRPr>
-              <a:buChar char="●"/>
-            </a:pPr>
-            <a:r>
-              <a:t>来週: マイナ保険証利用率を確認する</a:t>
-            </a:r>
-          </a:p>
-          <a:p>
-            <a:pPr>
-              <a:defRPr sz="1200">
-                <a:solidFill>
-                  <a:srgbClr val="1A1A2E"/>
-                </a:solidFill>
-                <a:latin typeface="Calibri"/>
-              </a:defRPr>
-              <a:buChar char="●"/>
-            </a:pPr>
-            <a:r>
-              <a:t>来月: BCP策定の現状を上司に確認する</a:t>
-            </a:r>
-          </a:p>
-          <a:p>
-            <a:pPr>
-              <a:defRPr sz="1200">
-                <a:solidFill>
-                  <a:srgbClr val="1A1A2E"/>
-                </a:solidFill>
-                <a:latin typeface="Calibri"/>
-              </a:defRPr>
-              <a:buChar char="●"/>
-            </a:pPr>
-            <a:r>
-              <a:t>6月まで: 自分の設定での算定変更を1つ把握する</a:t>
+              <a:t>この改定で「あなたの給料」は上がるのか？「あなたの診療」はどう変わるのか？</a:t>
             </a:r>
           </a:p>
         </p:txBody>
@@ -4386,7 +3896,7 @@
               </a:defRPr>
             </a:pPr>
             <a:r>
-              <a:t>今日の学習目標</a:t>
+              <a:t>今日の学習目標（15分）</a:t>
             </a:r>
           </a:p>
         </p:txBody>
@@ -4436,49 +3946,13 @@
       </p:sp>
       <p:sp>
         <p:nvSpPr>
-          <p:cNvPr id="4" name="TextBox 3"/>
-          <p:cNvSpPr txBox="1"/>
-          <p:nvPr/>
-        </p:nvSpPr>
-        <p:spPr>
-          <a:xfrm>
-            <a:off x="457200" y="1005840"/>
-            <a:ext cx="8229600" cy="365760"/>
-          </a:xfrm>
-          <a:prstGeom prst="rect">
-            <a:avLst/>
-          </a:prstGeom>
-          <a:noFill/>
-        </p:spPr>
-        <p:txBody>
-          <a:bodyPr wrap="square" lIns="45720" rIns="45720" tIns="27432" bIns="27432">
-            <a:spAutoFit/>
-          </a:bodyPr>
-          <a:lstStyle/>
-          <a:p>
-            <a:pPr algn="l">
-              <a:defRPr sz="1400" b="0">
-                <a:solidFill>
-                  <a:srgbClr val="7A8A9A"/>
-                </a:solidFill>
-                <a:latin typeface="Calibri"/>
-              </a:defRPr>
-            </a:pPr>
-            <a:r>
-              <a:t>この15分の後、あなたは:</a:t>
-            </a:r>
-          </a:p>
-        </p:txBody>
-      </p:sp>
-      <p:sp>
-        <p:nvSpPr>
-          <p:cNvPr id="5" name="Rectangle 4"/>
+          <p:cNvPr id="4" name="Rectangle 3"/>
           <p:cNvSpPr/>
           <p:nvPr/>
         </p:nvSpPr>
         <p:spPr>
           <a:xfrm>
-            <a:off x="731520" y="1554480"/>
+            <a:off x="731520" y="1371600"/>
             <a:ext cx="7680960" cy="822960"/>
           </a:xfrm>
           <a:prstGeom prst="rect">
@@ -4517,14 +3991,14 @@
       </p:sp>
       <p:sp>
         <p:nvSpPr>
-          <p:cNvPr id="6" name="TextBox 5"/>
+          <p:cNvPr id="5" name="TextBox 4"/>
           <p:cNvSpPr txBox="1"/>
           <p:nvPr/>
         </p:nvSpPr>
         <p:spPr>
           <a:xfrm>
-            <a:off x="914400" y="1645920"/>
-            <a:ext cx="365760" cy="548640"/>
+            <a:off x="914400" y="1463040"/>
+            <a:ext cx="1828800" cy="548640"/>
           </a:xfrm>
           <a:prstGeom prst="rect">
             <a:avLst/>
@@ -4538,7 +4012,7 @@
           <a:lstStyle/>
           <a:p>
             <a:pPr algn="l">
-              <a:defRPr sz="2800" b="1">
+              <a:defRPr sz="2000" b="1">
                 <a:solidFill>
                   <a:srgbClr val="E89B3B"/>
                 </a:solidFill>
@@ -4546,21 +4020,21 @@
               </a:defRPr>
             </a:pPr>
             <a:r>
-              <a:t>1</a:t>
-            </a:r>
-          </a:p>
-        </p:txBody>
-      </p:sp>
-      <p:sp>
-        <p:nvSpPr>
-          <p:cNvPr id="7" name="TextBox 6"/>
+              <a:t>説明できる</a:t>
+            </a:r>
+          </a:p>
+        </p:txBody>
+      </p:sp>
+      <p:sp>
+        <p:nvSpPr>
+          <p:cNvPr id="6" name="TextBox 5"/>
           <p:cNvSpPr txBox="1"/>
           <p:nvPr/>
         </p:nvSpPr>
         <p:spPr>
           <a:xfrm>
-            <a:off x="1371600" y="1691640"/>
-            <a:ext cx="6858000" cy="548640"/>
+            <a:off x="2743200" y="1508760"/>
+            <a:ext cx="5486400" cy="548640"/>
           </a:xfrm>
           <a:prstGeom prst="rect">
             <a:avLst/>
@@ -4582,20 +4056,20 @@
               </a:defRPr>
             </a:pPr>
             <a:r>
-              <a:t>説明できる — 2026年度改定の全体像と4つの柱（理解）</a:t>
-            </a:r>
-          </a:p>
-        </p:txBody>
-      </p:sp>
-      <p:sp>
-        <p:nvSpPr>
-          <p:cNvPr id="8" name="Rectangle 7"/>
+              <a:t>改定の全体像と4つの柱</a:t>
+            </a:r>
+          </a:p>
+        </p:txBody>
+      </p:sp>
+      <p:sp>
+        <p:nvSpPr>
+          <p:cNvPr id="7" name="Rectangle 6"/>
           <p:cNvSpPr/>
           <p:nvPr/>
         </p:nvSpPr>
         <p:spPr>
           <a:xfrm>
-            <a:off x="731520" y="2560320"/>
+            <a:off x="731520" y="2377440"/>
             <a:ext cx="7680960" cy="822960"/>
           </a:xfrm>
           <a:prstGeom prst="rect">
@@ -4634,14 +4108,14 @@
       </p:sp>
       <p:sp>
         <p:nvSpPr>
-          <p:cNvPr id="9" name="TextBox 8"/>
+          <p:cNvPr id="8" name="TextBox 7"/>
           <p:cNvSpPr txBox="1"/>
           <p:nvPr/>
         </p:nvSpPr>
         <p:spPr>
           <a:xfrm>
-            <a:off x="914400" y="2651760"/>
-            <a:ext cx="365760" cy="548640"/>
+            <a:off x="914400" y="2468880"/>
+            <a:ext cx="1828800" cy="548640"/>
           </a:xfrm>
           <a:prstGeom prst="rect">
             <a:avLst/>
@@ -4655,7 +4129,7 @@
           <a:lstStyle/>
           <a:p>
             <a:pPr algn="l">
-              <a:defRPr sz="2800" b="1">
+              <a:defRPr sz="2000" b="1">
                 <a:solidFill>
                   <a:srgbClr val="E89B3B"/>
                 </a:solidFill>
@@ -4663,21 +4137,21 @@
               </a:defRPr>
             </a:pPr>
             <a:r>
-              <a:t>2</a:t>
-            </a:r>
-          </a:p>
-        </p:txBody>
-      </p:sp>
-      <p:sp>
-        <p:nvSpPr>
-          <p:cNvPr id="10" name="TextBox 9"/>
+              <a:t>判断できる</a:t>
+            </a:r>
+          </a:p>
+        </p:txBody>
+      </p:sp>
+      <p:sp>
+        <p:nvSpPr>
+          <p:cNvPr id="9" name="TextBox 8"/>
           <p:cNvSpPr txBox="1"/>
           <p:nvPr/>
         </p:nvSpPr>
         <p:spPr>
           <a:xfrm>
-            <a:off x="1371600" y="2697480"/>
-            <a:ext cx="6858000" cy="548640"/>
+            <a:off x="2743200" y="2514600"/>
+            <a:ext cx="5486400" cy="548640"/>
           </a:xfrm>
           <a:prstGeom prst="rect">
             <a:avLst/>
@@ -4699,20 +4173,20 @@
               </a:defRPr>
             </a:pPr>
             <a:r>
-              <a:t>整理できる — 外来・入院・救急・連携の設定別に改定ポイントを分類（分析）</a:t>
-            </a:r>
-          </a:p>
-        </p:txBody>
-      </p:sp>
-      <p:sp>
-        <p:nvSpPr>
-          <p:cNvPr id="11" name="Rectangle 10"/>
+              <a:t>自院の設定で何が変わるか</a:t>
+            </a:r>
+          </a:p>
+        </p:txBody>
+      </p:sp>
+      <p:sp>
+        <p:nvSpPr>
+          <p:cNvPr id="10" name="Rectangle 9"/>
           <p:cNvSpPr/>
           <p:nvPr/>
         </p:nvSpPr>
         <p:spPr>
           <a:xfrm>
-            <a:off x="731520" y="3566160"/>
+            <a:off x="731520" y="3383280"/>
             <a:ext cx="7680960" cy="822960"/>
           </a:xfrm>
           <a:prstGeom prst="rect">
@@ -4751,14 +4225,14 @@
       </p:sp>
       <p:sp>
         <p:nvSpPr>
-          <p:cNvPr id="12" name="TextBox 11"/>
+          <p:cNvPr id="11" name="TextBox 10"/>
           <p:cNvSpPr txBox="1"/>
           <p:nvPr/>
         </p:nvSpPr>
         <p:spPr>
           <a:xfrm>
-            <a:off x="914400" y="3657600"/>
-            <a:ext cx="365760" cy="548640"/>
+            <a:off x="914400" y="3474720"/>
+            <a:ext cx="1828800" cy="548640"/>
           </a:xfrm>
           <a:prstGeom prst="rect">
             <a:avLst/>
@@ -4772,7 +4246,7 @@
           <a:lstStyle/>
           <a:p>
             <a:pPr algn="l">
-              <a:defRPr sz="2800" b="1">
+              <a:defRPr sz="2000" b="1">
                 <a:solidFill>
                   <a:srgbClr val="E89B3B"/>
                 </a:solidFill>
@@ -4780,21 +4254,21 @@
               </a:defRPr>
             </a:pPr>
             <a:r>
-              <a:t>3</a:t>
-            </a:r>
-          </a:p>
-        </p:txBody>
-      </p:sp>
-      <p:sp>
-        <p:nvSpPr>
-          <p:cNvPr id="13" name="TextBox 12"/>
+              <a:t>提案できる</a:t>
+            </a:r>
+          </a:p>
+        </p:txBody>
+      </p:sp>
+      <p:sp>
+        <p:nvSpPr>
+          <p:cNvPr id="12" name="TextBox 11"/>
           <p:cNvSpPr txBox="1"/>
           <p:nvPr/>
         </p:nvSpPr>
         <p:spPr>
           <a:xfrm>
-            <a:off x="1371600" y="3703320"/>
-            <a:ext cx="6858000" cy="548640"/>
+            <a:off x="2743200" y="3520440"/>
+            <a:ext cx="5486400" cy="548640"/>
           </a:xfrm>
           <a:prstGeom prst="rect">
             <a:avLst/>
@@ -4816,7 +4290,7 @@
               </a:defRPr>
             </a:pPr>
             <a:r>
-              <a:t>提案できる — 自院でのBCP策定・医療DX対応の具体的アクション（創造）</a:t>
+              <a:t>BCP策定・医療DX対応の具体的アクション</a:t>
             </a:r>
           </a:p>
         </p:txBody>
@@ -4878,7 +4352,7 @@
               </a:defRPr>
             </a:pPr>
             <a:r>
-              <a:t>前提確認 — Quick Poll</a:t>
+              <a:t>Quick Poll</a:t>
             </a:r>
           </a:p>
         </p:txBody>
@@ -4892,7 +4366,7 @@
         <p:spPr>
           <a:xfrm>
             <a:off x="457200" y="777240"/>
-            <a:ext cx="2743200" cy="54864"/>
+            <a:ext cx="1828800" cy="54864"/>
           </a:xfrm>
           <a:prstGeom prst="rect">
             <a:avLst/>
@@ -4928,14 +4402,59 @@
       </p:sp>
       <p:sp>
         <p:nvSpPr>
-          <p:cNvPr id="4" name="TextBox 3"/>
+          <p:cNvPr id="4" name="Rectangle 3"/>
+          <p:cNvSpPr/>
+          <p:nvPr/>
+        </p:nvSpPr>
+        <p:spPr>
+          <a:xfrm>
+            <a:off x="731520" y="1280160"/>
+            <a:ext cx="7680960" cy="640080"/>
+          </a:xfrm>
+          <a:prstGeom prst="rect">
+            <a:avLst/>
+          </a:prstGeom>
+          <a:solidFill>
+            <a:srgbClr val="0D2B3E"/>
+          </a:solidFill>
+          <a:ln w="12700">
+            <a:solidFill>
+              <a:srgbClr val="4EB8A9"/>
+            </a:solidFill>
+          </a:ln>
+        </p:spPr>
+        <p:style>
+          <a:lnRef idx="1">
+            <a:schemeClr val="accent1"/>
+          </a:lnRef>
+          <a:fillRef idx="3">
+            <a:schemeClr val="accent1"/>
+          </a:fillRef>
+          <a:effectRef idx="2">
+            <a:schemeClr val="accent1"/>
+          </a:effectRef>
+          <a:fontRef idx="minor">
+            <a:schemeClr val="lt1"/>
+          </a:fontRef>
+        </p:style>
+        <p:txBody>
+          <a:bodyPr rtlCol="0" anchor="ctr"/>
+          <a:lstStyle/>
+          <a:p>
+            <a:pPr algn="ctr"/>
+          </a:p>
+        </p:txBody>
+      </p:sp>
+      <p:sp>
+        <p:nvSpPr>
+          <p:cNvPr id="5" name="TextBox 4"/>
           <p:cNvSpPr txBox="1"/>
           <p:nvPr/>
         </p:nvSpPr>
         <p:spPr>
           <a:xfrm>
-            <a:off x="731520" y="1097280"/>
-            <a:ext cx="7772400" cy="457200"/>
+            <a:off x="914400" y="1371600"/>
+            <a:ext cx="7315200" cy="457200"/>
           </a:xfrm>
           <a:prstGeom prst="rect">
             <a:avLst/>
@@ -4949,7 +4468,7 @@
           <a:lstStyle/>
           <a:p>
             <a:pPr algn="l">
-              <a:defRPr sz="1400" b="0">
+              <a:defRPr sz="1600" b="0">
                 <a:solidFill>
                   <a:srgbClr val="F5F0E8"/>
                 </a:solidFill>
@@ -4964,14 +4483,59 @@
       </p:sp>
       <p:sp>
         <p:nvSpPr>
-          <p:cNvPr id="5" name="TextBox 4"/>
+          <p:cNvPr id="6" name="Rectangle 5"/>
+          <p:cNvSpPr/>
+          <p:nvPr/>
+        </p:nvSpPr>
+        <p:spPr>
+          <a:xfrm>
+            <a:off x="731520" y="2103120"/>
+            <a:ext cx="7680960" cy="640080"/>
+          </a:xfrm>
+          <a:prstGeom prst="rect">
+            <a:avLst/>
+          </a:prstGeom>
+          <a:solidFill>
+            <a:srgbClr val="0D2B3E"/>
+          </a:solidFill>
+          <a:ln w="12700">
+            <a:solidFill>
+              <a:srgbClr val="4EB8A9"/>
+            </a:solidFill>
+          </a:ln>
+        </p:spPr>
+        <p:style>
+          <a:lnRef idx="1">
+            <a:schemeClr val="accent1"/>
+          </a:lnRef>
+          <a:fillRef idx="3">
+            <a:schemeClr val="accent1"/>
+          </a:fillRef>
+          <a:effectRef idx="2">
+            <a:schemeClr val="accent1"/>
+          </a:effectRef>
+          <a:fontRef idx="minor">
+            <a:schemeClr val="lt1"/>
+          </a:fontRef>
+        </p:style>
+        <p:txBody>
+          <a:bodyPr rtlCol="0" anchor="ctr"/>
+          <a:lstStyle/>
+          <a:p>
+            <a:pPr algn="ctr"/>
+          </a:p>
+        </p:txBody>
+      </p:sp>
+      <p:sp>
+        <p:nvSpPr>
+          <p:cNvPr id="7" name="TextBox 6"/>
           <p:cNvSpPr txBox="1"/>
           <p:nvPr/>
         </p:nvSpPr>
         <p:spPr>
           <a:xfrm>
-            <a:off x="731520" y="1737360"/>
-            <a:ext cx="7772400" cy="457200"/>
+            <a:off x="914400" y="2194560"/>
+            <a:ext cx="7315200" cy="457200"/>
           </a:xfrm>
           <a:prstGeom prst="rect">
             <a:avLst/>
@@ -4985,7 +4549,7 @@
           <a:lstStyle/>
           <a:p>
             <a:pPr algn="l">
-              <a:defRPr sz="1400" b="0">
+              <a:defRPr sz="1600" b="0">
                 <a:solidFill>
                   <a:srgbClr val="F5F0E8"/>
                 </a:solidFill>
@@ -5000,14 +4564,59 @@
       </p:sp>
       <p:sp>
         <p:nvSpPr>
-          <p:cNvPr id="6" name="TextBox 5"/>
+          <p:cNvPr id="8" name="Rectangle 7"/>
+          <p:cNvSpPr/>
+          <p:nvPr/>
+        </p:nvSpPr>
+        <p:spPr>
+          <a:xfrm>
+            <a:off x="731520" y="2926080"/>
+            <a:ext cx="7680960" cy="640080"/>
+          </a:xfrm>
+          <a:prstGeom prst="rect">
+            <a:avLst/>
+          </a:prstGeom>
+          <a:solidFill>
+            <a:srgbClr val="0D2B3E"/>
+          </a:solidFill>
+          <a:ln w="12700">
+            <a:solidFill>
+              <a:srgbClr val="4EB8A9"/>
+            </a:solidFill>
+          </a:ln>
+        </p:spPr>
+        <p:style>
+          <a:lnRef idx="1">
+            <a:schemeClr val="accent1"/>
+          </a:lnRef>
+          <a:fillRef idx="3">
+            <a:schemeClr val="accent1"/>
+          </a:fillRef>
+          <a:effectRef idx="2">
+            <a:schemeClr val="accent1"/>
+          </a:effectRef>
+          <a:fontRef idx="minor">
+            <a:schemeClr val="lt1"/>
+          </a:fontRef>
+        </p:style>
+        <p:txBody>
+          <a:bodyPr rtlCol="0" anchor="ctr"/>
+          <a:lstStyle/>
+          <a:p>
+            <a:pPr algn="ctr"/>
+          </a:p>
+        </p:txBody>
+      </p:sp>
+      <p:sp>
+        <p:nvSpPr>
+          <p:cNvPr id="9" name="TextBox 8"/>
           <p:cNvSpPr txBox="1"/>
           <p:nvPr/>
         </p:nvSpPr>
         <p:spPr>
           <a:xfrm>
-            <a:off x="731520" y="2377439"/>
-            <a:ext cx="7772400" cy="457200"/>
+            <a:off x="914400" y="3017520"/>
+            <a:ext cx="7315200" cy="457200"/>
           </a:xfrm>
           <a:prstGeom prst="rect">
             <a:avLst/>
@@ -5021,7 +4630,7 @@
           <a:lstStyle/>
           <a:p>
             <a:pPr algn="l">
-              <a:defRPr sz="1400" b="0">
+              <a:defRPr sz="1600" b="0">
                 <a:solidFill>
                   <a:srgbClr val="F5F0E8"/>
                 </a:solidFill>
@@ -5029,57 +4638,21 @@
               </a:defRPr>
             </a:pPr>
             <a:r>
-              <a:t>✋  「地域包括診療加算」の施設基準を知っている人？</a:t>
-            </a:r>
-          </a:p>
-        </p:txBody>
-      </p:sp>
-      <p:sp>
-        <p:nvSpPr>
-          <p:cNvPr id="7" name="TextBox 6"/>
-          <p:cNvSpPr txBox="1"/>
-          <p:nvPr/>
-        </p:nvSpPr>
-        <p:spPr>
-          <a:xfrm>
-            <a:off x="731520" y="3017520"/>
-            <a:ext cx="7772400" cy="457200"/>
-          </a:xfrm>
-          <a:prstGeom prst="rect">
-            <a:avLst/>
-          </a:prstGeom>
-          <a:noFill/>
-        </p:spPr>
-        <p:txBody>
-          <a:bodyPr wrap="square" lIns="45720" rIns="45720" tIns="27432" bIns="27432">
-            <a:spAutoFit/>
-          </a:bodyPr>
-          <a:lstStyle/>
-          <a:p>
-            <a:pPr algn="l">
-              <a:defRPr sz="1400" b="0">
-                <a:solidFill>
-                  <a:srgbClr val="F5F0E8"/>
-                </a:solidFill>
-                <a:latin typeface="Calibri"/>
-              </a:defRPr>
-            </a:pPr>
-            <a:r>
-              <a:t>✋  BCPって何の略？（Business Continuity Plan）</a:t>
-            </a:r>
-          </a:p>
-        </p:txBody>
-      </p:sp>
-      <p:sp>
-        <p:nvSpPr>
-          <p:cNvPr id="8" name="Rectangle 7"/>
+              <a:t>✋  BCPって何の略？</a:t>
+            </a:r>
+          </a:p>
+        </p:txBody>
+      </p:sp>
+      <p:sp>
+        <p:nvSpPr>
+          <p:cNvPr id="10" name="Rectangle 9"/>
           <p:cNvSpPr/>
           <p:nvPr/>
         </p:nvSpPr>
         <p:spPr>
           <a:xfrm>
-            <a:off x="457200" y="3840480"/>
-            <a:ext cx="54864" cy="914400"/>
+            <a:off x="457200" y="3931920"/>
+            <a:ext cx="54864" cy="548640"/>
           </a:xfrm>
           <a:prstGeom prst="rect">
             <a:avLst/>
@@ -5115,14 +4688,14 @@
       </p:sp>
       <p:sp>
         <p:nvSpPr>
-          <p:cNvPr id="9" name="Rectangle 8"/>
+          <p:cNvPr id="11" name="Rectangle 10"/>
           <p:cNvSpPr/>
           <p:nvPr/>
         </p:nvSpPr>
         <p:spPr>
           <a:xfrm>
-            <a:off x="566928" y="3840480"/>
-            <a:ext cx="8119872" cy="914400"/>
+            <a:off x="566928" y="3931920"/>
+            <a:ext cx="8119872" cy="548640"/>
           </a:xfrm>
           <a:prstGeom prst="rect">
             <a:avLst/>
@@ -5160,14 +4733,14 @@
       </p:sp>
       <p:sp>
         <p:nvSpPr>
-          <p:cNvPr id="10" name="TextBox 9"/>
+          <p:cNvPr id="12" name="TextBox 11"/>
           <p:cNvSpPr txBox="1"/>
           <p:nvPr/>
         </p:nvSpPr>
         <p:spPr>
           <a:xfrm>
-            <a:off x="685800" y="3913632"/>
-            <a:ext cx="7863840" cy="768096"/>
+            <a:off x="685800" y="4005072"/>
+            <a:ext cx="7863840" cy="402335"/>
           </a:xfrm>
           <a:prstGeom prst="rect">
             <a:avLst/>
@@ -5189,11 +4762,7 @@
               </a:defRPr>
             </a:pPr>
             <a:r>
-              <a:t>2024年改定では生活習慣病管理料の見直しや医療DX推進体制整備加算が新設。</a:t>
-            </a:r>
-            <a:br/>
-            <a:r>
-              <a:t>2026年改定はその延長線上にありつつ、大幅な再編が行われています。</a:t>
+              <a:t>2024年改定でDX推進体制整備加算が新設。2026年はその延長線上にありつつ大幅再編。</a:t>
             </a:r>
           </a:p>
         </p:txBody>
@@ -5255,7 +4824,7 @@
               </a:defRPr>
             </a:pPr>
             <a:r>
-              <a:t>改定全体像 — 4つの柱</a:t>
+              <a:t>改定の4つの柱</a:t>
             </a:r>
           </a:p>
         </p:txBody>
@@ -5268,8 +4837,8 @@
         </p:nvSpPr>
         <p:spPr>
           <a:xfrm>
-            <a:off x="457200" y="685800"/>
-            <a:ext cx="2286000" cy="54864"/>
+            <a:off x="457200" y="658368"/>
+            <a:ext cx="1828800" cy="54864"/>
           </a:xfrm>
           <a:prstGeom prst="rect">
             <a:avLst/>
@@ -5303,403 +4872,806 @@
           </a:p>
         </p:txBody>
       </p:sp>
-      <p:graphicFrame>
-        <p:nvGraphicFramePr>
-          <p:cNvPr id="4" name="Table 3"/>
-          <p:cNvGraphicFramePr>
-            <a:graphicFrameLocks noGrp="1"/>
-          </p:cNvGraphicFramePr>
-          <p:nvPr/>
-        </p:nvGraphicFramePr>
-        <p:xfrm>
-          <a:off x="274320" y="914400"/>
-          <a:ext cx="8595360" cy="1828800"/>
-        </p:xfrm>
-        <a:graphic>
-          <a:graphicData uri="http://schemas.openxmlformats.org/drawingml/2006/table">
-            <a:tbl>
-              <a:tblPr firstRow="1" bandRow="1">
-                <a:tableStyleId>{5C22544A-7EE6-4342-B048-85BDC9FD1C3A}</a:tableStyleId>
-              </a:tblPr>
-              <a:tblGrid>
-                <a:gridCol w="2011680"/>
-                <a:gridCol w="3657600"/>
-                <a:gridCol w="2926080"/>
-              </a:tblGrid>
-              <a:tr h="365760">
-                <a:tc>
-                  <a:txBody>
-                    <a:bodyPr/>
-                    <a:lstStyle/>
-                    <a:p>
-                      <a:pPr>
-                        <a:defRPr sz="1000" b="1">
-                          <a:solidFill>
-                            <a:srgbClr val="F5F0E8"/>
-                          </a:solidFill>
-                          <a:latin typeface="Calibri"/>
-                        </a:defRPr>
-                      </a:pPr>
-                      <a:r>
-                        <a:t>柱</a:t>
-                      </a:r>
-                    </a:p>
-                  </a:txBody>
-                  <a:tcPr marL="45720" marR="45720" marT="18288" marB="18288">
-                    <a:solidFill>
-                      <a:srgbClr val="0D2B3E"/>
-                    </a:solidFill>
-                  </a:tcPr>
-                </a:tc>
-                <a:tc>
-                  <a:txBody>
-                    <a:bodyPr/>
-                    <a:lstStyle/>
-                    <a:p>
-                      <a:pPr>
-                        <a:defRPr sz="1000" b="1">
-                          <a:solidFill>
-                            <a:srgbClr val="F5F0E8"/>
-                          </a:solidFill>
-                          <a:latin typeface="Calibri"/>
-                        </a:defRPr>
-                      </a:pPr>
-                      <a:r>
-                        <a:t>内容</a:t>
-                      </a:r>
-                    </a:p>
-                  </a:txBody>
-                  <a:tcPr marL="45720" marR="45720" marT="18288" marB="18288">
-                    <a:solidFill>
-                      <a:srgbClr val="0D2B3E"/>
-                    </a:solidFill>
-                  </a:tcPr>
-                </a:tc>
-                <a:tc>
-                  <a:txBody>
-                    <a:bodyPr/>
-                    <a:lstStyle/>
-                    <a:p>
-                      <a:pPr>
-                        <a:defRPr sz="1000" b="1">
-                          <a:solidFill>
-                            <a:srgbClr val="F5F0E8"/>
-                          </a:solidFill>
-                          <a:latin typeface="Calibri"/>
-                        </a:defRPr>
-                      </a:pPr>
-                      <a:r>
-                        <a:t>総合診療との関連</a:t>
-                      </a:r>
-                    </a:p>
-                  </a:txBody>
-                  <a:tcPr marL="45720" marR="45720" marT="18288" marB="18288">
-                    <a:solidFill>
-                      <a:srgbClr val="0D2B3E"/>
-                    </a:solidFill>
-                  </a:tcPr>
-                </a:tc>
-              </a:tr>
-              <a:tr h="365760">
-                <a:tc>
-                  <a:txBody>
-                    <a:bodyPr/>
-                    <a:lstStyle/>
-                    <a:p>
-                      <a:pPr>
-                        <a:defRPr sz="1000">
-                          <a:solidFill>
-                            <a:srgbClr val="1A1A2E"/>
-                          </a:solidFill>
-                          <a:latin typeface="Calibri"/>
-                        </a:defRPr>
-                      </a:pPr>
-                      <a:r>
-                        <a:t>1. 賃上げ・物価対応</a:t>
-                      </a:r>
-                    </a:p>
-                  </a:txBody>
-                  <a:tcPr marL="45720" marR="45720" marT="18288" marB="18288">
-                    <a:solidFill>
-                      <a:srgbClr val="E8F0F0"/>
-                    </a:solidFill>
-                  </a:tcPr>
-                </a:tc>
-                <a:tc>
-                  <a:txBody>
-                    <a:bodyPr/>
-                    <a:lstStyle/>
-                    <a:p>
-                      <a:pPr>
-                        <a:defRPr sz="1000">
-                          <a:solidFill>
-                            <a:srgbClr val="1A1A2E"/>
-                          </a:solidFill>
-                          <a:latin typeface="Calibri"/>
-                        </a:defRPr>
-                      </a:pPr>
-                      <a:r>
-                        <a:t>ベースアップ評価料拡充、物価対応料新設</a:t>
-                      </a:r>
-                    </a:p>
-                  </a:txBody>
-                  <a:tcPr marL="45720" marR="45720" marT="18288" marB="18288">
-                    <a:solidFill>
-                      <a:srgbClr val="E8F0F0"/>
-                    </a:solidFill>
-                  </a:tcPr>
-                </a:tc>
-                <a:tc>
-                  <a:txBody>
-                    <a:bodyPr/>
-                    <a:lstStyle/>
-                    <a:p>
-                      <a:pPr>
-                        <a:defRPr sz="1000">
-                          <a:solidFill>
-                            <a:srgbClr val="1A1A2E"/>
-                          </a:solidFill>
-                          <a:latin typeface="Calibri"/>
-                        </a:defRPr>
-                      </a:pPr>
-                      <a:r>
-                        <a:t>全スタッフの給与に直結</a:t>
-                      </a:r>
-                    </a:p>
-                  </a:txBody>
-                  <a:tcPr marL="45720" marR="45720" marT="18288" marB="18288">
-                    <a:solidFill>
-                      <a:srgbClr val="E8F0F0"/>
-                    </a:solidFill>
-                  </a:tcPr>
-                </a:tc>
-              </a:tr>
-              <a:tr h="365760">
-                <a:tc>
-                  <a:txBody>
-                    <a:bodyPr/>
-                    <a:lstStyle/>
-                    <a:p>
-                      <a:pPr>
-                        <a:defRPr sz="1000">
-                          <a:solidFill>
-                            <a:srgbClr val="1A1A2E"/>
-                          </a:solidFill>
-                          <a:latin typeface="Calibri"/>
-                        </a:defRPr>
-                      </a:pPr>
-                      <a:r>
-                        <a:t>2. 医療DX推進</a:t>
-                      </a:r>
-                    </a:p>
-                  </a:txBody>
-                  <a:tcPr marL="45720" marR="45720" marT="18288" marB="18288">
-                    <a:solidFill>
-                      <a:srgbClr val="F5F0E8"/>
-                    </a:solidFill>
-                  </a:tcPr>
-                </a:tc>
-                <a:tc>
-                  <a:txBody>
-                    <a:bodyPr/>
-                    <a:lstStyle/>
-                    <a:p>
-                      <a:pPr>
-                        <a:defRPr sz="1000">
-                          <a:solidFill>
-                            <a:srgbClr val="1A1A2E"/>
-                          </a:solidFill>
-                          <a:latin typeface="Calibri"/>
-                        </a:defRPr>
-                      </a:pPr>
-                      <a:r>
-                        <a:t>既存加算廃止→電子的診療情報連携体制整備加算に統合</a:t>
-                      </a:r>
-                    </a:p>
-                  </a:txBody>
-                  <a:tcPr marL="45720" marR="45720" marT="18288" marB="18288">
-                    <a:solidFill>
-                      <a:srgbClr val="F5F0E8"/>
-                    </a:solidFill>
-                  </a:tcPr>
-                </a:tc>
-                <a:tc>
-                  <a:txBody>
-                    <a:bodyPr/>
-                    <a:lstStyle/>
-                    <a:p>
-                      <a:pPr>
-                        <a:defRPr sz="1000">
-                          <a:solidFill>
-                            <a:srgbClr val="1A1A2E"/>
-                          </a:solidFill>
-                          <a:latin typeface="Calibri"/>
-                        </a:defRPr>
-                      </a:pPr>
-                      <a:r>
-                        <a:t>マイナ保険証利用率が算定に影響</a:t>
-                      </a:r>
-                    </a:p>
-                  </a:txBody>
-                  <a:tcPr marL="45720" marR="45720" marT="18288" marB="18288">
-                    <a:solidFill>
-                      <a:srgbClr val="F5F0E8"/>
-                    </a:solidFill>
-                  </a:tcPr>
-                </a:tc>
-              </a:tr>
-              <a:tr h="365760">
-                <a:tc>
-                  <a:txBody>
-                    <a:bodyPr/>
-                    <a:lstStyle/>
-                    <a:p>
-                      <a:pPr>
-                        <a:defRPr sz="1000">
-                          <a:solidFill>
-                            <a:srgbClr val="1A1A2E"/>
-                          </a:solidFill>
-                          <a:latin typeface="Calibri"/>
-                        </a:defRPr>
-                      </a:pPr>
-                      <a:r>
-                        <a:t>3. かかりつけ医機能強化</a:t>
-                      </a:r>
-                    </a:p>
-                  </a:txBody>
-                  <a:tcPr marL="45720" marR="45720" marT="18288" marB="18288">
-                    <a:solidFill>
-                      <a:srgbClr val="E8F0F0"/>
-                    </a:solidFill>
-                  </a:tcPr>
-                </a:tc>
-                <a:tc>
-                  <a:txBody>
-                    <a:bodyPr/>
-                    <a:lstStyle/>
-                    <a:p>
-                      <a:pPr>
-                        <a:defRPr sz="1000">
-                          <a:solidFill>
-                            <a:srgbClr val="1A1A2E"/>
-                          </a:solidFill>
-                          <a:latin typeface="Calibri"/>
-                        </a:defRPr>
-                      </a:pPr>
-                      <a:r>
-                        <a:t>地域包括診療加算/料の再編、BCP義務化</a:t>
-                      </a:r>
-                    </a:p>
-                  </a:txBody>
-                  <a:tcPr marL="45720" marR="45720" marT="18288" marB="18288">
-                    <a:solidFill>
-                      <a:srgbClr val="E8F0F0"/>
-                    </a:solidFill>
-                  </a:tcPr>
-                </a:tc>
-                <a:tc>
-                  <a:txBody>
-                    <a:bodyPr/>
-                    <a:lstStyle/>
-                    <a:p>
-                      <a:pPr>
-                        <a:defRPr sz="1000">
-                          <a:solidFill>
-                            <a:srgbClr val="1A1A2E"/>
-                          </a:solidFill>
-                          <a:latin typeface="Calibri"/>
-                        </a:defRPr>
-                      </a:pPr>
-                      <a:r>
-                        <a:t>家庭医の中核業務そのもの</a:t>
-                      </a:r>
-                    </a:p>
-                  </a:txBody>
-                  <a:tcPr marL="45720" marR="45720" marT="18288" marB="18288">
-                    <a:solidFill>
-                      <a:srgbClr val="E8F0F0"/>
-                    </a:solidFill>
-                  </a:tcPr>
-                </a:tc>
-              </a:tr>
-              <a:tr h="365760">
-                <a:tc>
-                  <a:txBody>
-                    <a:bodyPr/>
-                    <a:lstStyle/>
-                    <a:p>
-                      <a:pPr>
-                        <a:defRPr sz="1000">
-                          <a:solidFill>
-                            <a:srgbClr val="1A1A2E"/>
-                          </a:solidFill>
-                          <a:latin typeface="Calibri"/>
-                        </a:defRPr>
-                      </a:pPr>
-                      <a:r>
-                        <a:t>4. 急性期再編と連携強化</a:t>
-                      </a:r>
-                    </a:p>
-                  </a:txBody>
-                  <a:tcPr marL="45720" marR="45720" marT="18288" marB="18288">
-                    <a:solidFill>
-                      <a:srgbClr val="F5F0E8"/>
-                    </a:solidFill>
-                  </a:tcPr>
-                </a:tc>
-                <a:tc>
-                  <a:txBody>
-                    <a:bodyPr/>
-                    <a:lstStyle/>
-                    <a:p>
-                      <a:pPr>
-                        <a:defRPr sz="1000">
-                          <a:solidFill>
-                            <a:srgbClr val="1A1A2E"/>
-                          </a:solidFill>
-                          <a:latin typeface="Calibri"/>
-                        </a:defRPr>
-                      </a:pPr>
-                      <a:r>
-                        <a:t>入院料の細分化、救急外来の新評価</a:t>
-                      </a:r>
-                    </a:p>
-                  </a:txBody>
-                  <a:tcPr marL="45720" marR="45720" marT="18288" marB="18288">
-                    <a:solidFill>
-                      <a:srgbClr val="F5F0E8"/>
-                    </a:solidFill>
-                  </a:tcPr>
-                </a:tc>
-                <a:tc>
-                  <a:txBody>
-                    <a:bodyPr/>
-                    <a:lstStyle/>
-                    <a:p>
-                      <a:pPr>
-                        <a:defRPr sz="1000">
-                          <a:solidFill>
-                            <a:srgbClr val="1A1A2E"/>
-                          </a:solidFill>
-                          <a:latin typeface="Calibri"/>
-                        </a:defRPr>
-                      </a:pPr>
-                      <a:r>
-                        <a:t>病院総合診療科・救急の評価が変わる</a:t>
-                      </a:r>
-                    </a:p>
-                  </a:txBody>
-                  <a:tcPr marL="45720" marR="45720" marT="18288" marB="18288">
-                    <a:solidFill>
-                      <a:srgbClr val="F5F0E8"/>
-                    </a:solidFill>
-                  </a:tcPr>
-                </a:tc>
-              </a:tr>
-            </a:tbl>
-          </a:graphicData>
-        </a:graphic>
-      </p:graphicFrame>
+      <p:sp>
+        <p:nvSpPr>
+          <p:cNvPr id="4" name="Rectangle 3"/>
+          <p:cNvSpPr/>
+          <p:nvPr/>
+        </p:nvSpPr>
+        <p:spPr>
+          <a:xfrm>
+            <a:off x="365760" y="914400"/>
+            <a:ext cx="4114800" cy="1645920"/>
+          </a:xfrm>
+          <a:prstGeom prst="rect">
+            <a:avLst/>
+          </a:prstGeom>
+          <a:solidFill>
+            <a:srgbClr val="E8F0F0"/>
+          </a:solidFill>
+          <a:ln w="12700">
+            <a:solidFill>
+              <a:srgbClr val="4EB8A9"/>
+            </a:solidFill>
+          </a:ln>
+        </p:spPr>
+        <p:style>
+          <a:lnRef idx="1">
+            <a:schemeClr val="accent1"/>
+          </a:lnRef>
+          <a:fillRef idx="3">
+            <a:schemeClr val="accent1"/>
+          </a:fillRef>
+          <a:effectRef idx="2">
+            <a:schemeClr val="accent1"/>
+          </a:effectRef>
+          <a:fontRef idx="minor">
+            <a:schemeClr val="lt1"/>
+          </a:fontRef>
+        </p:style>
+        <p:txBody>
+          <a:bodyPr rtlCol="0" anchor="ctr"/>
+          <a:lstStyle/>
+          <a:p>
+            <a:pPr algn="ctr"/>
+          </a:p>
+        </p:txBody>
+      </p:sp>
+      <p:sp>
+        <p:nvSpPr>
+          <p:cNvPr id="5" name="Rectangle 4"/>
+          <p:cNvSpPr/>
+          <p:nvPr/>
+        </p:nvSpPr>
+        <p:spPr>
+          <a:xfrm>
+            <a:off x="502920" y="1051560"/>
+            <a:ext cx="457200" cy="457200"/>
+          </a:xfrm>
+          <a:prstGeom prst="rect">
+            <a:avLst/>
+          </a:prstGeom>
+          <a:solidFill>
+            <a:srgbClr val="E89B3B"/>
+          </a:solidFill>
+          <a:ln>
+            <a:noFill/>
+          </a:ln>
+        </p:spPr>
+        <p:style>
+          <a:lnRef idx="1">
+            <a:schemeClr val="accent1"/>
+          </a:lnRef>
+          <a:fillRef idx="3">
+            <a:schemeClr val="accent1"/>
+          </a:fillRef>
+          <a:effectRef idx="2">
+            <a:schemeClr val="accent1"/>
+          </a:effectRef>
+          <a:fontRef idx="minor">
+            <a:schemeClr val="lt1"/>
+          </a:fontRef>
+        </p:style>
+        <p:txBody>
+          <a:bodyPr rtlCol="0" anchor="ctr"/>
+          <a:lstStyle/>
+          <a:p>
+            <a:pPr algn="ctr"/>
+          </a:p>
+        </p:txBody>
+      </p:sp>
+      <p:sp>
+        <p:nvSpPr>
+          <p:cNvPr id="6" name="TextBox 5"/>
+          <p:cNvSpPr txBox="1"/>
+          <p:nvPr/>
+        </p:nvSpPr>
+        <p:spPr>
+          <a:xfrm>
+            <a:off x="502920" y="1051560"/>
+            <a:ext cx="457200" cy="457200"/>
+          </a:xfrm>
+          <a:prstGeom prst="rect">
+            <a:avLst/>
+          </a:prstGeom>
+          <a:noFill/>
+        </p:spPr>
+        <p:txBody>
+          <a:bodyPr wrap="square" lIns="45720" rIns="45720" tIns="27432" bIns="27432">
+            <a:spAutoFit/>
+          </a:bodyPr>
+          <a:lstStyle/>
+          <a:p>
+            <a:pPr algn="ctr">
+              <a:defRPr sz="2200" b="1">
+                <a:solidFill>
+                  <a:srgbClr val="0D2B3E"/>
+                </a:solidFill>
+                <a:latin typeface="Calibri"/>
+              </a:defRPr>
+            </a:pPr>
+            <a:r>
+              <a:t>1</a:t>
+            </a:r>
+          </a:p>
+        </p:txBody>
+      </p:sp>
+      <p:sp>
+        <p:nvSpPr>
+          <p:cNvPr id="7" name="TextBox 6"/>
+          <p:cNvSpPr txBox="1"/>
+          <p:nvPr/>
+        </p:nvSpPr>
+        <p:spPr>
+          <a:xfrm>
+            <a:off x="1097280" y="1051560"/>
+            <a:ext cx="3200400" cy="411480"/>
+          </a:xfrm>
+          <a:prstGeom prst="rect">
+            <a:avLst/>
+          </a:prstGeom>
+          <a:noFill/>
+        </p:spPr>
+        <p:txBody>
+          <a:bodyPr wrap="square" lIns="45720" rIns="45720" tIns="27432" bIns="27432">
+            <a:spAutoFit/>
+          </a:bodyPr>
+          <a:lstStyle/>
+          <a:p>
+            <a:pPr algn="l">
+              <a:defRPr sz="1500" b="1">
+                <a:solidFill>
+                  <a:srgbClr val="1A1A2E"/>
+                </a:solidFill>
+                <a:latin typeface="Calibri"/>
+              </a:defRPr>
+            </a:pPr>
+            <a:r>
+              <a:t>賃上げ・物価対応</a:t>
+            </a:r>
+          </a:p>
+        </p:txBody>
+      </p:sp>
+      <p:sp>
+        <p:nvSpPr>
+          <p:cNvPr id="8" name="TextBox 7"/>
+          <p:cNvSpPr txBox="1"/>
+          <p:nvPr/>
+        </p:nvSpPr>
+        <p:spPr>
+          <a:xfrm>
+            <a:off x="1097280" y="1508760"/>
+            <a:ext cx="3200400" cy="822960"/>
+          </a:xfrm>
+          <a:prstGeom prst="rect">
+            <a:avLst/>
+          </a:prstGeom>
+          <a:noFill/>
+        </p:spPr>
+        <p:txBody>
+          <a:bodyPr wrap="square" lIns="45720" rIns="45720" tIns="27432" bIns="27432">
+            <a:spAutoFit/>
+          </a:bodyPr>
+          <a:lstStyle/>
+          <a:p>
+            <a:pPr algn="l">
+              <a:defRPr sz="1100" b="0">
+                <a:solidFill>
+                  <a:srgbClr val="1A1A2E"/>
+                </a:solidFill>
+                <a:latin typeface="Calibri"/>
+              </a:defRPr>
+            </a:pPr>
+            <a:r>
+              <a:t>ベースアップ評価料を大幅拡充</a:t>
+            </a:r>
+            <a:br/>
+            <a:r>
+              <a:t>全職員対象に</a:t>
+            </a:r>
+          </a:p>
+        </p:txBody>
+      </p:sp>
+      <p:sp>
+        <p:nvSpPr>
+          <p:cNvPr id="9" name="Rectangle 8"/>
+          <p:cNvSpPr/>
+          <p:nvPr/>
+        </p:nvSpPr>
+        <p:spPr>
+          <a:xfrm>
+            <a:off x="4754880" y="914400"/>
+            <a:ext cx="4114800" cy="1645920"/>
+          </a:xfrm>
+          <a:prstGeom prst="rect">
+            <a:avLst/>
+          </a:prstGeom>
+          <a:solidFill>
+            <a:srgbClr val="E8F0F0"/>
+          </a:solidFill>
+          <a:ln w="12700">
+            <a:solidFill>
+              <a:srgbClr val="4EB8A9"/>
+            </a:solidFill>
+          </a:ln>
+        </p:spPr>
+        <p:style>
+          <a:lnRef idx="1">
+            <a:schemeClr val="accent1"/>
+          </a:lnRef>
+          <a:fillRef idx="3">
+            <a:schemeClr val="accent1"/>
+          </a:fillRef>
+          <a:effectRef idx="2">
+            <a:schemeClr val="accent1"/>
+          </a:effectRef>
+          <a:fontRef idx="minor">
+            <a:schemeClr val="lt1"/>
+          </a:fontRef>
+        </p:style>
+        <p:txBody>
+          <a:bodyPr rtlCol="0" anchor="ctr"/>
+          <a:lstStyle/>
+          <a:p>
+            <a:pPr algn="ctr"/>
+          </a:p>
+        </p:txBody>
+      </p:sp>
+      <p:sp>
+        <p:nvSpPr>
+          <p:cNvPr id="10" name="Rectangle 9"/>
+          <p:cNvSpPr/>
+          <p:nvPr/>
+        </p:nvSpPr>
+        <p:spPr>
+          <a:xfrm>
+            <a:off x="4892040" y="1051560"/>
+            <a:ext cx="457200" cy="457200"/>
+          </a:xfrm>
+          <a:prstGeom prst="rect">
+            <a:avLst/>
+          </a:prstGeom>
+          <a:solidFill>
+            <a:srgbClr val="E89B3B"/>
+          </a:solidFill>
+          <a:ln>
+            <a:noFill/>
+          </a:ln>
+        </p:spPr>
+        <p:style>
+          <a:lnRef idx="1">
+            <a:schemeClr val="accent1"/>
+          </a:lnRef>
+          <a:fillRef idx="3">
+            <a:schemeClr val="accent1"/>
+          </a:fillRef>
+          <a:effectRef idx="2">
+            <a:schemeClr val="accent1"/>
+          </a:effectRef>
+          <a:fontRef idx="minor">
+            <a:schemeClr val="lt1"/>
+          </a:fontRef>
+        </p:style>
+        <p:txBody>
+          <a:bodyPr rtlCol="0" anchor="ctr"/>
+          <a:lstStyle/>
+          <a:p>
+            <a:pPr algn="ctr"/>
+          </a:p>
+        </p:txBody>
+      </p:sp>
+      <p:sp>
+        <p:nvSpPr>
+          <p:cNvPr id="11" name="TextBox 10"/>
+          <p:cNvSpPr txBox="1"/>
+          <p:nvPr/>
+        </p:nvSpPr>
+        <p:spPr>
+          <a:xfrm>
+            <a:off x="4892040" y="1051560"/>
+            <a:ext cx="457200" cy="457200"/>
+          </a:xfrm>
+          <a:prstGeom prst="rect">
+            <a:avLst/>
+          </a:prstGeom>
+          <a:noFill/>
+        </p:spPr>
+        <p:txBody>
+          <a:bodyPr wrap="square" lIns="45720" rIns="45720" tIns="27432" bIns="27432">
+            <a:spAutoFit/>
+          </a:bodyPr>
+          <a:lstStyle/>
+          <a:p>
+            <a:pPr algn="ctr">
+              <a:defRPr sz="2200" b="1">
+                <a:solidFill>
+                  <a:srgbClr val="0D2B3E"/>
+                </a:solidFill>
+                <a:latin typeface="Calibri"/>
+              </a:defRPr>
+            </a:pPr>
+            <a:r>
+              <a:t>2</a:t>
+            </a:r>
+          </a:p>
+        </p:txBody>
+      </p:sp>
+      <p:sp>
+        <p:nvSpPr>
+          <p:cNvPr id="12" name="TextBox 11"/>
+          <p:cNvSpPr txBox="1"/>
+          <p:nvPr/>
+        </p:nvSpPr>
+        <p:spPr>
+          <a:xfrm>
+            <a:off x="5486400" y="1051560"/>
+            <a:ext cx="3200400" cy="411480"/>
+          </a:xfrm>
+          <a:prstGeom prst="rect">
+            <a:avLst/>
+          </a:prstGeom>
+          <a:noFill/>
+        </p:spPr>
+        <p:txBody>
+          <a:bodyPr wrap="square" lIns="45720" rIns="45720" tIns="27432" bIns="27432">
+            <a:spAutoFit/>
+          </a:bodyPr>
+          <a:lstStyle/>
+          <a:p>
+            <a:pPr algn="l">
+              <a:defRPr sz="1500" b="1">
+                <a:solidFill>
+                  <a:srgbClr val="1A1A2E"/>
+                </a:solidFill>
+                <a:latin typeface="Calibri"/>
+              </a:defRPr>
+            </a:pPr>
+            <a:r>
+              <a:t>医療DX推進</a:t>
+            </a:r>
+          </a:p>
+        </p:txBody>
+      </p:sp>
+      <p:sp>
+        <p:nvSpPr>
+          <p:cNvPr id="13" name="TextBox 12"/>
+          <p:cNvSpPr txBox="1"/>
+          <p:nvPr/>
+        </p:nvSpPr>
+        <p:spPr>
+          <a:xfrm>
+            <a:off x="5486400" y="1508760"/>
+            <a:ext cx="3200400" cy="822960"/>
+          </a:xfrm>
+          <a:prstGeom prst="rect">
+            <a:avLst/>
+          </a:prstGeom>
+          <a:noFill/>
+        </p:spPr>
+        <p:txBody>
+          <a:bodyPr wrap="square" lIns="45720" rIns="45720" tIns="27432" bIns="27432">
+            <a:spAutoFit/>
+          </a:bodyPr>
+          <a:lstStyle/>
+          <a:p>
+            <a:pPr algn="l">
+              <a:defRPr sz="1100" b="0">
+                <a:solidFill>
+                  <a:srgbClr val="1A1A2E"/>
+                </a:solidFill>
+                <a:latin typeface="Calibri"/>
+              </a:defRPr>
+            </a:pPr>
+            <a:r>
+              <a:t>既存加算を統合→1本化</a:t>
+            </a:r>
+            <a:br/>
+            <a:r>
+              <a:t>マイナ保険証利用率がカギ</a:t>
+            </a:r>
+          </a:p>
+        </p:txBody>
+      </p:sp>
+      <p:sp>
+        <p:nvSpPr>
+          <p:cNvPr id="14" name="Rectangle 13"/>
+          <p:cNvSpPr/>
+          <p:nvPr/>
+        </p:nvSpPr>
+        <p:spPr>
+          <a:xfrm>
+            <a:off x="365760" y="2834640"/>
+            <a:ext cx="4114800" cy="1645920"/>
+          </a:xfrm>
+          <a:prstGeom prst="rect">
+            <a:avLst/>
+          </a:prstGeom>
+          <a:solidFill>
+            <a:srgbClr val="E8F0F0"/>
+          </a:solidFill>
+          <a:ln w="12700">
+            <a:solidFill>
+              <a:srgbClr val="4EB8A9"/>
+            </a:solidFill>
+          </a:ln>
+        </p:spPr>
+        <p:style>
+          <a:lnRef idx="1">
+            <a:schemeClr val="accent1"/>
+          </a:lnRef>
+          <a:fillRef idx="3">
+            <a:schemeClr val="accent1"/>
+          </a:fillRef>
+          <a:effectRef idx="2">
+            <a:schemeClr val="accent1"/>
+          </a:effectRef>
+          <a:fontRef idx="minor">
+            <a:schemeClr val="lt1"/>
+          </a:fontRef>
+        </p:style>
+        <p:txBody>
+          <a:bodyPr rtlCol="0" anchor="ctr"/>
+          <a:lstStyle/>
+          <a:p>
+            <a:pPr algn="ctr"/>
+          </a:p>
+        </p:txBody>
+      </p:sp>
+      <p:sp>
+        <p:nvSpPr>
+          <p:cNvPr id="15" name="Rectangle 14"/>
+          <p:cNvSpPr/>
+          <p:nvPr/>
+        </p:nvSpPr>
+        <p:spPr>
+          <a:xfrm>
+            <a:off x="502920" y="2971800"/>
+            <a:ext cx="457200" cy="457200"/>
+          </a:xfrm>
+          <a:prstGeom prst="rect">
+            <a:avLst/>
+          </a:prstGeom>
+          <a:solidFill>
+            <a:srgbClr val="E89B3B"/>
+          </a:solidFill>
+          <a:ln>
+            <a:noFill/>
+          </a:ln>
+        </p:spPr>
+        <p:style>
+          <a:lnRef idx="1">
+            <a:schemeClr val="accent1"/>
+          </a:lnRef>
+          <a:fillRef idx="3">
+            <a:schemeClr val="accent1"/>
+          </a:fillRef>
+          <a:effectRef idx="2">
+            <a:schemeClr val="accent1"/>
+          </a:effectRef>
+          <a:fontRef idx="minor">
+            <a:schemeClr val="lt1"/>
+          </a:fontRef>
+        </p:style>
+        <p:txBody>
+          <a:bodyPr rtlCol="0" anchor="ctr"/>
+          <a:lstStyle/>
+          <a:p>
+            <a:pPr algn="ctr"/>
+          </a:p>
+        </p:txBody>
+      </p:sp>
+      <p:sp>
+        <p:nvSpPr>
+          <p:cNvPr id="16" name="TextBox 15"/>
+          <p:cNvSpPr txBox="1"/>
+          <p:nvPr/>
+        </p:nvSpPr>
+        <p:spPr>
+          <a:xfrm>
+            <a:off x="502920" y="2971800"/>
+            <a:ext cx="457200" cy="457200"/>
+          </a:xfrm>
+          <a:prstGeom prst="rect">
+            <a:avLst/>
+          </a:prstGeom>
+          <a:noFill/>
+        </p:spPr>
+        <p:txBody>
+          <a:bodyPr wrap="square" lIns="45720" rIns="45720" tIns="27432" bIns="27432">
+            <a:spAutoFit/>
+          </a:bodyPr>
+          <a:lstStyle/>
+          <a:p>
+            <a:pPr algn="ctr">
+              <a:defRPr sz="2200" b="1">
+                <a:solidFill>
+                  <a:srgbClr val="0D2B3E"/>
+                </a:solidFill>
+                <a:latin typeface="Calibri"/>
+              </a:defRPr>
+            </a:pPr>
+            <a:r>
+              <a:t>3</a:t>
+            </a:r>
+          </a:p>
+        </p:txBody>
+      </p:sp>
+      <p:sp>
+        <p:nvSpPr>
+          <p:cNvPr id="17" name="TextBox 16"/>
+          <p:cNvSpPr txBox="1"/>
+          <p:nvPr/>
+        </p:nvSpPr>
+        <p:spPr>
+          <a:xfrm>
+            <a:off x="1097280" y="2971800"/>
+            <a:ext cx="3200400" cy="411480"/>
+          </a:xfrm>
+          <a:prstGeom prst="rect">
+            <a:avLst/>
+          </a:prstGeom>
+          <a:noFill/>
+        </p:spPr>
+        <p:txBody>
+          <a:bodyPr wrap="square" lIns="45720" rIns="45720" tIns="27432" bIns="27432">
+            <a:spAutoFit/>
+          </a:bodyPr>
+          <a:lstStyle/>
+          <a:p>
+            <a:pPr algn="l">
+              <a:defRPr sz="1500" b="1">
+                <a:solidFill>
+                  <a:srgbClr val="1A1A2E"/>
+                </a:solidFill>
+                <a:latin typeface="Calibri"/>
+              </a:defRPr>
+            </a:pPr>
+            <a:r>
+              <a:t>かかりつけ医機能強化</a:t>
+            </a:r>
+          </a:p>
+        </p:txBody>
+      </p:sp>
+      <p:sp>
+        <p:nvSpPr>
+          <p:cNvPr id="18" name="TextBox 17"/>
+          <p:cNvSpPr txBox="1"/>
+          <p:nvPr/>
+        </p:nvSpPr>
+        <p:spPr>
+          <a:xfrm>
+            <a:off x="1097280" y="3429000"/>
+            <a:ext cx="3200400" cy="822960"/>
+          </a:xfrm>
+          <a:prstGeom prst="rect">
+            <a:avLst/>
+          </a:prstGeom>
+          <a:noFill/>
+        </p:spPr>
+        <p:txBody>
+          <a:bodyPr wrap="square" lIns="45720" rIns="45720" tIns="27432" bIns="27432">
+            <a:spAutoFit/>
+          </a:bodyPr>
+          <a:lstStyle/>
+          <a:p>
+            <a:pPr algn="l">
+              <a:defRPr sz="1100" b="0">
+                <a:solidFill>
+                  <a:srgbClr val="1A1A2E"/>
+                </a:solidFill>
+                <a:latin typeface="Calibri"/>
+              </a:defRPr>
+            </a:pPr>
+            <a:r>
+              <a:t>地域包括診療加算の再編</a:t>
+            </a:r>
+            <a:br/>
+            <a:r>
+              <a:t>BCP策定が施設基準に</a:t>
+            </a:r>
+          </a:p>
+        </p:txBody>
+      </p:sp>
+      <p:sp>
+        <p:nvSpPr>
+          <p:cNvPr id="19" name="Rectangle 18"/>
+          <p:cNvSpPr/>
+          <p:nvPr/>
+        </p:nvSpPr>
+        <p:spPr>
+          <a:xfrm>
+            <a:off x="4754880" y="2834640"/>
+            <a:ext cx="4114800" cy="1645920"/>
+          </a:xfrm>
+          <a:prstGeom prst="rect">
+            <a:avLst/>
+          </a:prstGeom>
+          <a:solidFill>
+            <a:srgbClr val="E8F0F0"/>
+          </a:solidFill>
+          <a:ln w="12700">
+            <a:solidFill>
+              <a:srgbClr val="4EB8A9"/>
+            </a:solidFill>
+          </a:ln>
+        </p:spPr>
+        <p:style>
+          <a:lnRef idx="1">
+            <a:schemeClr val="accent1"/>
+          </a:lnRef>
+          <a:fillRef idx="3">
+            <a:schemeClr val="accent1"/>
+          </a:fillRef>
+          <a:effectRef idx="2">
+            <a:schemeClr val="accent1"/>
+          </a:effectRef>
+          <a:fontRef idx="minor">
+            <a:schemeClr val="lt1"/>
+          </a:fontRef>
+        </p:style>
+        <p:txBody>
+          <a:bodyPr rtlCol="0" anchor="ctr"/>
+          <a:lstStyle/>
+          <a:p>
+            <a:pPr algn="ctr"/>
+          </a:p>
+        </p:txBody>
+      </p:sp>
+      <p:sp>
+        <p:nvSpPr>
+          <p:cNvPr id="20" name="Rectangle 19"/>
+          <p:cNvSpPr/>
+          <p:nvPr/>
+        </p:nvSpPr>
+        <p:spPr>
+          <a:xfrm>
+            <a:off x="4892040" y="2971800"/>
+            <a:ext cx="457200" cy="457200"/>
+          </a:xfrm>
+          <a:prstGeom prst="rect">
+            <a:avLst/>
+          </a:prstGeom>
+          <a:solidFill>
+            <a:srgbClr val="E89B3B"/>
+          </a:solidFill>
+          <a:ln>
+            <a:noFill/>
+          </a:ln>
+        </p:spPr>
+        <p:style>
+          <a:lnRef idx="1">
+            <a:schemeClr val="accent1"/>
+          </a:lnRef>
+          <a:fillRef idx="3">
+            <a:schemeClr val="accent1"/>
+          </a:fillRef>
+          <a:effectRef idx="2">
+            <a:schemeClr val="accent1"/>
+          </a:effectRef>
+          <a:fontRef idx="minor">
+            <a:schemeClr val="lt1"/>
+          </a:fontRef>
+        </p:style>
+        <p:txBody>
+          <a:bodyPr rtlCol="0" anchor="ctr"/>
+          <a:lstStyle/>
+          <a:p>
+            <a:pPr algn="ctr"/>
+          </a:p>
+        </p:txBody>
+      </p:sp>
+      <p:sp>
+        <p:nvSpPr>
+          <p:cNvPr id="21" name="TextBox 20"/>
+          <p:cNvSpPr txBox="1"/>
+          <p:nvPr/>
+        </p:nvSpPr>
+        <p:spPr>
+          <a:xfrm>
+            <a:off x="4892040" y="2971800"/>
+            <a:ext cx="457200" cy="457200"/>
+          </a:xfrm>
+          <a:prstGeom prst="rect">
+            <a:avLst/>
+          </a:prstGeom>
+          <a:noFill/>
+        </p:spPr>
+        <p:txBody>
+          <a:bodyPr wrap="square" lIns="45720" rIns="45720" tIns="27432" bIns="27432">
+            <a:spAutoFit/>
+          </a:bodyPr>
+          <a:lstStyle/>
+          <a:p>
+            <a:pPr algn="ctr">
+              <a:defRPr sz="2200" b="1">
+                <a:solidFill>
+                  <a:srgbClr val="0D2B3E"/>
+                </a:solidFill>
+                <a:latin typeface="Calibri"/>
+              </a:defRPr>
+            </a:pPr>
+            <a:r>
+              <a:t>4</a:t>
+            </a:r>
+          </a:p>
+        </p:txBody>
+      </p:sp>
+      <p:sp>
+        <p:nvSpPr>
+          <p:cNvPr id="22" name="TextBox 21"/>
+          <p:cNvSpPr txBox="1"/>
+          <p:nvPr/>
+        </p:nvSpPr>
+        <p:spPr>
+          <a:xfrm>
+            <a:off x="5486400" y="2971800"/>
+            <a:ext cx="3200400" cy="411480"/>
+          </a:xfrm>
+          <a:prstGeom prst="rect">
+            <a:avLst/>
+          </a:prstGeom>
+          <a:noFill/>
+        </p:spPr>
+        <p:txBody>
+          <a:bodyPr wrap="square" lIns="45720" rIns="45720" tIns="27432" bIns="27432">
+            <a:spAutoFit/>
+          </a:bodyPr>
+          <a:lstStyle/>
+          <a:p>
+            <a:pPr algn="l">
+              <a:defRPr sz="1500" b="1">
+                <a:solidFill>
+                  <a:srgbClr val="1A1A2E"/>
+                </a:solidFill>
+                <a:latin typeface="Calibri"/>
+              </a:defRPr>
+            </a:pPr>
+            <a:r>
+              <a:t>急性期再編と連携</a:t>
+            </a:r>
+          </a:p>
+        </p:txBody>
+      </p:sp>
+      <p:sp>
+        <p:nvSpPr>
+          <p:cNvPr id="23" name="TextBox 22"/>
+          <p:cNvSpPr txBox="1"/>
+          <p:nvPr/>
+        </p:nvSpPr>
+        <p:spPr>
+          <a:xfrm>
+            <a:off x="5486400" y="3429000"/>
+            <a:ext cx="3200400" cy="822960"/>
+          </a:xfrm>
+          <a:prstGeom prst="rect">
+            <a:avLst/>
+          </a:prstGeom>
+          <a:noFill/>
+        </p:spPr>
+        <p:txBody>
+          <a:bodyPr wrap="square" lIns="45720" rIns="45720" tIns="27432" bIns="27432">
+            <a:spAutoFit/>
+          </a:bodyPr>
+          <a:lstStyle/>
+          <a:p>
+            <a:pPr algn="l">
+              <a:defRPr sz="1100" b="0">
+                <a:solidFill>
+                  <a:srgbClr val="1A1A2E"/>
+                </a:solidFill>
+                <a:latin typeface="Calibri"/>
+              </a:defRPr>
+            </a:pPr>
+            <a:r>
+              <a:t>入院料の細分化</a:t>
+            </a:r>
+            <a:br/>
+            <a:r>
+              <a:t>救急外来の新評価</a:t>
+            </a:r>
+          </a:p>
+        </p:txBody>
+      </p:sp>
     </p:spTree>
   </p:cSld>
   <p:clrMapOvr>
@@ -5714,7 +5686,7 @@
     <p:bg>
       <p:bgPr>
         <a:solidFill>
-          <a:srgbClr val="F5F0E8"/>
+          <a:srgbClr val="0D2B3E"/>
         </a:solidFill>
         <a:effectLst/>
       </p:bgPr>
@@ -5734,8 +5706,8 @@
         </p:nvSpPr>
         <p:spPr>
           <a:xfrm>
-            <a:off x="457200" y="182880"/>
-            <a:ext cx="8229600" cy="457200"/>
+            <a:off x="457200" y="274320"/>
+            <a:ext cx="4572000" cy="365760"/>
           </a:xfrm>
           <a:prstGeom prst="rect">
             <a:avLst/>
@@ -5749,29 +5721,216 @@
           <a:lstStyle/>
           <a:p>
             <a:pPr algn="l">
-              <a:defRPr sz="2000" b="1">
-                <a:solidFill>
-                  <a:srgbClr val="1A1A2E"/>
+              <a:defRPr sz="1400" b="0">
+                <a:solidFill>
+                  <a:srgbClr val="7A8A9A"/>
                 </a:solidFill>
                 <a:latin typeface="Calibri"/>
               </a:defRPr>
             </a:pPr>
             <a:r>
-              <a:t>設定別ポイント (A) 外来（診療所）</a:t>
-            </a:r>
-          </a:p>
-        </p:txBody>
-      </p:sp>
-      <p:sp>
-        <p:nvSpPr>
-          <p:cNvPr id="3" name="Rectangle 2"/>
+              <a:t>柱1: あなたの給料</a:t>
+            </a:r>
+          </a:p>
+        </p:txBody>
+      </p:sp>
+      <p:sp>
+        <p:nvSpPr>
+          <p:cNvPr id="3" name="TextBox 2"/>
+          <p:cNvSpPr txBox="1"/>
+          <p:nvPr/>
+        </p:nvSpPr>
+        <p:spPr>
+          <a:xfrm>
+            <a:off x="457200" y="640080"/>
+            <a:ext cx="4572000" cy="457200"/>
+          </a:xfrm>
+          <a:prstGeom prst="rect">
+            <a:avLst/>
+          </a:prstGeom>
+          <a:noFill/>
+        </p:spPr>
+        <p:txBody>
+          <a:bodyPr wrap="square" lIns="45720" rIns="45720" tIns="27432" bIns="27432">
+            <a:spAutoFit/>
+          </a:bodyPr>
+          <a:lstStyle/>
+          <a:p>
+            <a:pPr algn="l">
+              <a:defRPr sz="2200" b="1">
+                <a:solidFill>
+                  <a:srgbClr val="F5F0E8"/>
+                </a:solidFill>
+                <a:latin typeface="Calibri"/>
+              </a:defRPr>
+            </a:pPr>
+            <a:r>
+              <a:t>ベースアップ評価料</a:t>
+            </a:r>
+          </a:p>
+        </p:txBody>
+      </p:sp>
+      <p:sp>
+        <p:nvSpPr>
+          <p:cNvPr id="4" name="Rectangle 3"/>
           <p:cNvSpPr/>
           <p:nvPr/>
         </p:nvSpPr>
         <p:spPr>
           <a:xfrm>
-            <a:off x="457200" y="640080"/>
-            <a:ext cx="1828800" cy="54864"/>
+            <a:off x="731520" y="1371600"/>
+            <a:ext cx="3200400" cy="1828800"/>
+          </a:xfrm>
+          <a:prstGeom prst="rect">
+            <a:avLst/>
+          </a:prstGeom>
+          <a:solidFill>
+            <a:srgbClr val="0D2B3E"/>
+          </a:solidFill>
+          <a:ln>
+            <a:noFill/>
+          </a:ln>
+        </p:spPr>
+        <p:style>
+          <a:lnRef idx="1">
+            <a:schemeClr val="accent1"/>
+          </a:lnRef>
+          <a:fillRef idx="3">
+            <a:schemeClr val="accent1"/>
+          </a:fillRef>
+          <a:effectRef idx="2">
+            <a:schemeClr val="accent1"/>
+          </a:effectRef>
+          <a:fontRef idx="minor">
+            <a:schemeClr val="lt1"/>
+          </a:fontRef>
+        </p:style>
+        <p:txBody>
+          <a:bodyPr rtlCol="0" anchor="ctr"/>
+          <a:lstStyle/>
+          <a:p>
+            <a:pPr algn="ctr"/>
+          </a:p>
+        </p:txBody>
+      </p:sp>
+      <p:sp>
+        <p:nvSpPr>
+          <p:cNvPr id="5" name="TextBox 4"/>
+          <p:cNvSpPr txBox="1"/>
+          <p:nvPr/>
+        </p:nvSpPr>
+        <p:spPr>
+          <a:xfrm>
+            <a:off x="731520" y="1463040"/>
+            <a:ext cx="3200400" cy="731520"/>
+          </a:xfrm>
+          <a:prstGeom prst="rect">
+            <a:avLst/>
+          </a:prstGeom>
+          <a:noFill/>
+        </p:spPr>
+        <p:txBody>
+          <a:bodyPr wrap="square" lIns="45720" rIns="45720" tIns="27432" bIns="27432">
+            <a:spAutoFit/>
+          </a:bodyPr>
+          <a:lstStyle/>
+          <a:p>
+            <a:pPr algn="ctr">
+              <a:defRPr sz="3600" b="1">
+                <a:solidFill>
+                  <a:srgbClr val="7A8A9A"/>
+                </a:solidFill>
+                <a:latin typeface="Calibri"/>
+              </a:defRPr>
+            </a:pPr>
+            <a:r>
+              <a:t>6点</a:t>
+            </a:r>
+          </a:p>
+        </p:txBody>
+      </p:sp>
+      <p:sp>
+        <p:nvSpPr>
+          <p:cNvPr id="6" name="TextBox 5"/>
+          <p:cNvSpPr txBox="1"/>
+          <p:nvPr/>
+        </p:nvSpPr>
+        <p:spPr>
+          <a:xfrm>
+            <a:off x="731520" y="2194560"/>
+            <a:ext cx="3200400" cy="274320"/>
+          </a:xfrm>
+          <a:prstGeom prst="rect">
+            <a:avLst/>
+          </a:prstGeom>
+          <a:noFill/>
+        </p:spPr>
+        <p:txBody>
+          <a:bodyPr wrap="square" lIns="45720" rIns="45720" tIns="27432" bIns="27432">
+            <a:spAutoFit/>
+          </a:bodyPr>
+          <a:lstStyle/>
+          <a:p>
+            <a:pPr algn="ctr">
+              <a:defRPr sz="1200" b="0">
+                <a:solidFill>
+                  <a:srgbClr val="7A8A9A"/>
+                </a:solidFill>
+                <a:latin typeface="Calibri"/>
+              </a:defRPr>
+            </a:pPr>
+            <a:r>
+              <a:t>旧</a:t>
+            </a:r>
+          </a:p>
+        </p:txBody>
+      </p:sp>
+      <p:sp>
+        <p:nvSpPr>
+          <p:cNvPr id="7" name="TextBox 6"/>
+          <p:cNvSpPr txBox="1"/>
+          <p:nvPr/>
+        </p:nvSpPr>
+        <p:spPr>
+          <a:xfrm>
+            <a:off x="4114800" y="1737360"/>
+            <a:ext cx="914400" cy="731520"/>
+          </a:xfrm>
+          <a:prstGeom prst="rect">
+            <a:avLst/>
+          </a:prstGeom>
+          <a:noFill/>
+        </p:spPr>
+        <p:txBody>
+          <a:bodyPr wrap="square" lIns="45720" rIns="45720" tIns="27432" bIns="27432">
+            <a:spAutoFit/>
+          </a:bodyPr>
+          <a:lstStyle/>
+          <a:p>
+            <a:pPr algn="ctr">
+              <a:defRPr sz="3600" b="1">
+                <a:solidFill>
+                  <a:srgbClr val="E89B3B"/>
+                </a:solidFill>
+                <a:latin typeface="Calibri"/>
+              </a:defRPr>
+            </a:pPr>
+            <a:r>
+              <a:t>→</a:t>
+            </a:r>
+          </a:p>
+        </p:txBody>
+      </p:sp>
+      <p:sp>
+        <p:nvSpPr>
+          <p:cNvPr id="8" name="Rectangle 7"/>
+          <p:cNvSpPr/>
+          <p:nvPr/>
+        </p:nvSpPr>
+        <p:spPr>
+          <a:xfrm>
+            <a:off x="5212080" y="1371600"/>
+            <a:ext cx="3200400" cy="1828800"/>
           </a:xfrm>
           <a:prstGeom prst="rect">
             <a:avLst/>
@@ -5805,625 +5964,143 @@
           </a:p>
         </p:txBody>
       </p:sp>
-      <p:graphicFrame>
-        <p:nvGraphicFramePr>
-          <p:cNvPr id="4" name="Table 3"/>
-          <p:cNvGraphicFramePr>
-            <a:graphicFrameLocks noGrp="1"/>
-          </p:cNvGraphicFramePr>
-          <p:nvPr/>
-        </p:nvGraphicFramePr>
-        <p:xfrm>
-          <a:off x="274320" y="822960"/>
-          <a:ext cx="8595360" cy="2414016"/>
-        </p:xfrm>
-        <a:graphic>
-          <a:graphicData uri="http://schemas.openxmlformats.org/drawingml/2006/table">
-            <a:tbl>
-              <a:tblPr firstRow="1" bandRow="1">
-                <a:tableStyleId>{5C22544A-7EE6-4342-B048-85BDC9FD1C3A}</a:tableStyleId>
-              </a:tblPr>
-              <a:tblGrid>
-                <a:gridCol w="2286000"/>
-                <a:gridCol w="3657600"/>
-                <a:gridCol w="2651760"/>
-              </a:tblGrid>
-              <a:tr h="301752">
-                <a:tc>
-                  <a:txBody>
-                    <a:bodyPr/>
-                    <a:lstStyle/>
-                    <a:p>
-                      <a:pPr>
-                        <a:defRPr sz="900" b="1">
-                          <a:solidFill>
-                            <a:srgbClr val="F5F0E8"/>
-                          </a:solidFill>
-                          <a:latin typeface="Calibri"/>
-                        </a:defRPr>
-                      </a:pPr>
-                      <a:r>
-                        <a:t>項目</a:t>
-                      </a:r>
-                    </a:p>
-                  </a:txBody>
-                  <a:tcPr marL="45720" marR="45720" marT="18288" marB="18288">
-                    <a:solidFill>
-                      <a:srgbClr val="0D2B3E"/>
-                    </a:solidFill>
-                  </a:tcPr>
-                </a:tc>
-                <a:tc>
-                  <a:txBody>
-                    <a:bodyPr/>
-                    <a:lstStyle/>
-                    <a:p>
-                      <a:pPr>
-                        <a:defRPr sz="900" b="1">
-                          <a:solidFill>
-                            <a:srgbClr val="F5F0E8"/>
-                          </a:solidFill>
-                          <a:latin typeface="Calibri"/>
-                        </a:defRPr>
-                      </a:pPr>
-                      <a:r>
-                        <a:t>変更内容</a:t>
-                      </a:r>
-                    </a:p>
-                  </a:txBody>
-                  <a:tcPr marL="45720" marR="45720" marT="18288" marB="18288">
-                    <a:solidFill>
-                      <a:srgbClr val="0D2B3E"/>
-                    </a:solidFill>
-                  </a:tcPr>
-                </a:tc>
-                <a:tc>
-                  <a:txBody>
-                    <a:bodyPr/>
-                    <a:lstStyle/>
-                    <a:p>
-                      <a:pPr>
-                        <a:defRPr sz="900" b="1">
-                          <a:solidFill>
-                            <a:srgbClr val="F5F0E8"/>
-                          </a:solidFill>
-                          <a:latin typeface="Calibri"/>
-                        </a:defRPr>
-                      </a:pPr>
-                      <a:r>
-                        <a:t>ポイント</a:t>
-                      </a:r>
-                    </a:p>
-                  </a:txBody>
-                  <a:tcPr marL="45720" marR="45720" marT="18288" marB="18288">
-                    <a:solidFill>
-                      <a:srgbClr val="0D2B3E"/>
-                    </a:solidFill>
-                  </a:tcPr>
-                </a:tc>
-              </a:tr>
-              <a:tr h="301752">
-                <a:tc>
-                  <a:txBody>
-                    <a:bodyPr/>
-                    <a:lstStyle/>
-                    <a:p>
-                      <a:pPr>
-                        <a:defRPr sz="900">
-                          <a:solidFill>
-                            <a:srgbClr val="1A1A2E"/>
-                          </a:solidFill>
-                          <a:latin typeface="Calibri"/>
-                        </a:defRPr>
-                      </a:pPr>
-                      <a:r>
-                        <a:t>再診料</a:t>
-                      </a:r>
-                    </a:p>
-                  </a:txBody>
-                  <a:tcPr marL="45720" marR="45720" marT="18288" marB="18288">
-                    <a:solidFill>
-                      <a:srgbClr val="E8F0F0"/>
-                    </a:solidFill>
-                  </a:tcPr>
-                </a:tc>
-                <a:tc>
-                  <a:txBody>
-                    <a:bodyPr/>
-                    <a:lstStyle/>
-                    <a:p>
-                      <a:pPr>
-                        <a:defRPr sz="900">
-                          <a:solidFill>
-                            <a:srgbClr val="1A1A2E"/>
-                          </a:solidFill>
-                          <a:latin typeface="Calibri"/>
-                        </a:defRPr>
-                      </a:pPr>
-                      <a:r>
-                        <a:t>75点→76点（+1点）</a:t>
-                      </a:r>
-                    </a:p>
-                  </a:txBody>
-                  <a:tcPr marL="45720" marR="45720" marT="18288" marB="18288">
-                    <a:solidFill>
-                      <a:srgbClr val="E8F0F0"/>
-                    </a:solidFill>
-                  </a:tcPr>
-                </a:tc>
-                <a:tc>
-                  <a:txBody>
-                    <a:bodyPr/>
-                    <a:lstStyle/>
-                    <a:p>
-                      <a:pPr>
-                        <a:defRPr sz="900">
-                          <a:solidFill>
-                            <a:srgbClr val="1A1A2E"/>
-                          </a:solidFill>
-                          <a:latin typeface="Calibri"/>
-                        </a:defRPr>
-                      </a:pPr>
-                      <a:r>
-                        <a:t>微増だが全再診に影響</a:t>
-                      </a:r>
-                    </a:p>
-                  </a:txBody>
-                  <a:tcPr marL="45720" marR="45720" marT="18288" marB="18288">
-                    <a:solidFill>
-                      <a:srgbClr val="E8F0F0"/>
-                    </a:solidFill>
-                  </a:tcPr>
-                </a:tc>
-              </a:tr>
-              <a:tr h="301752">
-                <a:tc>
-                  <a:txBody>
-                    <a:bodyPr/>
-                    <a:lstStyle/>
-                    <a:p>
-                      <a:pPr>
-                        <a:defRPr sz="900">
-                          <a:solidFill>
-                            <a:srgbClr val="1A1A2E"/>
-                          </a:solidFill>
-                          <a:latin typeface="Calibri"/>
-                        </a:defRPr>
-                      </a:pPr>
-                      <a:r>
-                        <a:t>機能強化加算</a:t>
-                      </a:r>
-                    </a:p>
-                  </a:txBody>
-                  <a:tcPr marL="45720" marR="45720" marT="18288" marB="18288">
-                    <a:solidFill>
-                      <a:srgbClr val="F5F0E8"/>
-                    </a:solidFill>
-                  </a:tcPr>
-                </a:tc>
-                <a:tc>
-                  <a:txBody>
-                    <a:bodyPr/>
-                    <a:lstStyle/>
-                    <a:p>
-                      <a:pPr>
-                        <a:defRPr sz="900">
-                          <a:solidFill>
-                            <a:srgbClr val="1A1A2E"/>
-                          </a:solidFill>
-                          <a:latin typeface="Calibri"/>
-                        </a:defRPr>
-                      </a:pPr>
-                      <a:r>
-                        <a:t>80点維持 + BCP策定が施設基準追加</a:t>
-                      </a:r>
-                    </a:p>
-                  </a:txBody>
-                  <a:tcPr marL="45720" marR="45720" marT="18288" marB="18288">
-                    <a:solidFill>
-                      <a:srgbClr val="F5F0E8"/>
-                    </a:solidFill>
-                  </a:tcPr>
-                </a:tc>
-                <a:tc>
-                  <a:txBody>
-                    <a:bodyPr/>
-                    <a:lstStyle/>
-                    <a:p>
-                      <a:pPr>
-                        <a:defRPr sz="900">
-                          <a:solidFill>
-                            <a:srgbClr val="1A1A2E"/>
-                          </a:solidFill>
-                          <a:latin typeface="Calibri"/>
-                        </a:defRPr>
-                      </a:pPr>
-                      <a:r>
-                        <a:t>経過措置: 2027年5月末</a:t>
-                      </a:r>
-                    </a:p>
-                  </a:txBody>
-                  <a:tcPr marL="45720" marR="45720" marT="18288" marB="18288">
-                    <a:solidFill>
-                      <a:srgbClr val="F5F0E8"/>
-                    </a:solidFill>
-                  </a:tcPr>
-                </a:tc>
-              </a:tr>
-              <a:tr h="301752">
-                <a:tc>
-                  <a:txBody>
-                    <a:bodyPr/>
-                    <a:lstStyle/>
-                    <a:p>
-                      <a:pPr>
-                        <a:defRPr sz="900">
-                          <a:solidFill>
-                            <a:srgbClr val="1A1A2E"/>
-                          </a:solidFill>
-                          <a:latin typeface="Calibri"/>
-                        </a:defRPr>
-                      </a:pPr>
-                      <a:r>
-                        <a:t>地域包括診療加算</a:t>
-                      </a:r>
-                    </a:p>
-                  </a:txBody>
-                  <a:tcPr marL="45720" marR="45720" marT="18288" marB="18288">
-                    <a:solidFill>
-                      <a:srgbClr val="E8F0F0"/>
-                    </a:solidFill>
-                  </a:tcPr>
-                </a:tc>
-                <a:tc>
-                  <a:txBody>
-                    <a:bodyPr/>
-                    <a:lstStyle/>
-                    <a:p>
-                      <a:pPr>
-                        <a:defRPr sz="900">
-                          <a:solidFill>
-                            <a:srgbClr val="1A1A2E"/>
-                          </a:solidFill>
-                          <a:latin typeface="Calibri"/>
-                        </a:defRPr>
-                      </a:pPr>
-                      <a:r>
-                        <a:t>認知症地域包括加算を統合・2区分化</a:t>
-                      </a:r>
-                    </a:p>
-                  </a:txBody>
-                  <a:tcPr marL="45720" marR="45720" marT="18288" marB="18288">
-                    <a:solidFill>
-                      <a:srgbClr val="E8F0F0"/>
-                    </a:solidFill>
-                  </a:tcPr>
-                </a:tc>
-                <a:tc>
-                  <a:txBody>
-                    <a:bodyPr/>
-                    <a:lstStyle/>
-                    <a:p>
-                      <a:pPr>
-                        <a:defRPr sz="900">
-                          <a:solidFill>
-                            <a:srgbClr val="1A1A2E"/>
-                          </a:solidFill>
-                          <a:latin typeface="Calibri"/>
-                        </a:defRPr>
-                      </a:pPr>
-                      <a:r>
-                        <a:t>加算1:(1)38点/(2)28点</a:t>
-                      </a:r>
-                    </a:p>
-                  </a:txBody>
-                  <a:tcPr marL="45720" marR="45720" marT="18288" marB="18288">
-                    <a:solidFill>
-                      <a:srgbClr val="E8F0F0"/>
-                    </a:solidFill>
-                  </a:tcPr>
-                </a:tc>
-              </a:tr>
-              <a:tr h="301752">
-                <a:tc>
-                  <a:txBody>
-                    <a:bodyPr/>
-                    <a:lstStyle/>
-                    <a:p>
-                      <a:pPr>
-                        <a:defRPr sz="900">
-                          <a:solidFill>
-                            <a:srgbClr val="1A1A2E"/>
-                          </a:solidFill>
-                          <a:latin typeface="Calibri"/>
-                        </a:defRPr>
-                      </a:pPr>
-                      <a:r>
-                        <a:t>生活習慣病管理料</a:t>
-                      </a:r>
-                    </a:p>
-                  </a:txBody>
-                  <a:tcPr marL="45720" marR="45720" marT="18288" marB="18288">
-                    <a:solidFill>
-                      <a:srgbClr val="F5F0E8"/>
-                    </a:solidFill>
-                  </a:tcPr>
-                </a:tc>
-                <a:tc>
-                  <a:txBody>
-                    <a:bodyPr/>
-                    <a:lstStyle/>
-                    <a:p>
-                      <a:pPr>
-                        <a:defRPr sz="900">
-                          <a:solidFill>
-                            <a:srgbClr val="1A1A2E"/>
-                          </a:solidFill>
-                          <a:latin typeface="Calibri"/>
-                        </a:defRPr>
-                      </a:pPr>
-                      <a:r>
-                        <a:t>眼科・歯科連携加算を新設</a:t>
-                      </a:r>
-                    </a:p>
-                  </a:txBody>
-                  <a:tcPr marL="45720" marR="45720" marT="18288" marB="18288">
-                    <a:solidFill>
-                      <a:srgbClr val="F5F0E8"/>
-                    </a:solidFill>
-                  </a:tcPr>
-                </a:tc>
-                <a:tc>
-                  <a:txBody>
-                    <a:bodyPr/>
-                    <a:lstStyle/>
-                    <a:p>
-                      <a:pPr>
-                        <a:defRPr sz="900">
-                          <a:solidFill>
-                            <a:srgbClr val="1A1A2E"/>
-                          </a:solidFill>
-                          <a:latin typeface="Calibri"/>
-                        </a:defRPr>
-                      </a:pPr>
-                      <a:r>
-                        <a:t>糖尿病合併症予防</a:t>
-                      </a:r>
-                    </a:p>
-                  </a:txBody>
-                  <a:tcPr marL="45720" marR="45720" marT="18288" marB="18288">
-                    <a:solidFill>
-                      <a:srgbClr val="F5F0E8"/>
-                    </a:solidFill>
-                  </a:tcPr>
-                </a:tc>
-              </a:tr>
-              <a:tr h="301752">
-                <a:tc>
-                  <a:txBody>
-                    <a:bodyPr/>
-                    <a:lstStyle/>
-                    <a:p>
-                      <a:pPr>
-                        <a:defRPr sz="900">
-                          <a:solidFill>
-                            <a:srgbClr val="1A1A2E"/>
-                          </a:solidFill>
-                          <a:latin typeface="Calibri"/>
-                        </a:defRPr>
-                      </a:pPr>
-                      <a:r>
-                        <a:t>物価対応料</a:t>
-                      </a:r>
-                    </a:p>
-                  </a:txBody>
-                  <a:tcPr marL="45720" marR="45720" marT="18288" marB="18288">
-                    <a:solidFill>
-                      <a:srgbClr val="E8F0F0"/>
-                    </a:solidFill>
-                  </a:tcPr>
-                </a:tc>
-                <a:tc>
-                  <a:txBody>
-                    <a:bodyPr/>
-                    <a:lstStyle/>
-                    <a:p>
-                      <a:pPr>
-                        <a:defRPr sz="900">
-                          <a:solidFill>
-                            <a:srgbClr val="1A1A2E"/>
-                          </a:solidFill>
-                          <a:latin typeface="Calibri"/>
-                        </a:defRPr>
-                      </a:pPr>
-                      <a:r>
-                        <a:t>初診2点/再診2点（新設）</a:t>
-                      </a:r>
-                    </a:p>
-                  </a:txBody>
-                  <a:tcPr marL="45720" marR="45720" marT="18288" marB="18288">
-                    <a:solidFill>
-                      <a:srgbClr val="E8F0F0"/>
-                    </a:solidFill>
-                  </a:tcPr>
-                </a:tc>
-                <a:tc>
-                  <a:txBody>
-                    <a:bodyPr/>
-                    <a:lstStyle/>
-                    <a:p>
-                      <a:pPr>
-                        <a:defRPr sz="900">
-                          <a:solidFill>
-                            <a:srgbClr val="1A1A2E"/>
-                          </a:solidFill>
-                          <a:latin typeface="Calibri"/>
-                        </a:defRPr>
-                      </a:pPr>
-                      <a:r>
-                        <a:t>2027年度に倍増予定</a:t>
-                      </a:r>
-                    </a:p>
-                  </a:txBody>
-                  <a:tcPr marL="45720" marR="45720" marT="18288" marB="18288">
-                    <a:solidFill>
-                      <a:srgbClr val="E8F0F0"/>
-                    </a:solidFill>
-                  </a:tcPr>
-                </a:tc>
-              </a:tr>
-              <a:tr h="301752">
-                <a:tc>
-                  <a:txBody>
-                    <a:bodyPr/>
-                    <a:lstStyle/>
-                    <a:p>
-                      <a:pPr>
-                        <a:defRPr sz="900">
-                          <a:solidFill>
-                            <a:srgbClr val="1A1A2E"/>
-                          </a:solidFill>
-                          <a:latin typeface="Calibri"/>
-                        </a:defRPr>
-                      </a:pPr>
-                      <a:r>
-                        <a:t>ベースアップ評価料(I)</a:t>
-                      </a:r>
-                    </a:p>
-                  </a:txBody>
-                  <a:tcPr marL="45720" marR="45720" marT="18288" marB="18288">
-                    <a:solidFill>
-                      <a:srgbClr val="F5F0E8"/>
-                    </a:solidFill>
-                  </a:tcPr>
-                </a:tc>
-                <a:tc>
-                  <a:txBody>
-                    <a:bodyPr/>
-                    <a:lstStyle/>
-                    <a:p>
-                      <a:pPr>
-                        <a:defRPr sz="900">
-                          <a:solidFill>
-                            <a:srgbClr val="1A1A2E"/>
-                          </a:solidFill>
-                          <a:latin typeface="Calibri"/>
-                        </a:defRPr>
-                      </a:pPr>
-                      <a:r>
-                        <a:t>6点→17点（+11点）</a:t>
-                      </a:r>
-                    </a:p>
-                  </a:txBody>
-                  <a:tcPr marL="45720" marR="45720" marT="18288" marB="18288">
-                    <a:solidFill>
-                      <a:srgbClr val="F5F0E8"/>
-                    </a:solidFill>
-                  </a:tcPr>
-                </a:tc>
-                <a:tc>
-                  <a:txBody>
-                    <a:bodyPr/>
-                    <a:lstStyle/>
-                    <a:p>
-                      <a:pPr>
-                        <a:defRPr sz="900">
-                          <a:solidFill>
-                            <a:srgbClr val="1A1A2E"/>
-                          </a:solidFill>
-                          <a:latin typeface="Calibri"/>
-                        </a:defRPr>
-                      </a:pPr>
-                      <a:r>
-                        <a:t>全職員対象に拡大</a:t>
-                      </a:r>
-                    </a:p>
-                  </a:txBody>
-                  <a:tcPr marL="45720" marR="45720" marT="18288" marB="18288">
-                    <a:solidFill>
-                      <a:srgbClr val="F5F0E8"/>
-                    </a:solidFill>
-                  </a:tcPr>
-                </a:tc>
-              </a:tr>
-              <a:tr h="301752">
-                <a:tc>
-                  <a:txBody>
-                    <a:bodyPr/>
-                    <a:lstStyle/>
-                    <a:p>
-                      <a:pPr>
-                        <a:defRPr sz="900">
-                          <a:solidFill>
-                            <a:srgbClr val="1A1A2E"/>
-                          </a:solidFill>
-                          <a:latin typeface="Calibri"/>
-                        </a:defRPr>
-                      </a:pPr>
-                      <a:r>
-                        <a:t>外来データ提出加算</a:t>
-                      </a:r>
-                    </a:p>
-                  </a:txBody>
-                  <a:tcPr marL="45720" marR="45720" marT="18288" marB="18288">
-                    <a:solidFill>
-                      <a:srgbClr val="E8F0F0"/>
-                    </a:solidFill>
-                  </a:tcPr>
-                </a:tc>
-                <a:tc>
-                  <a:txBody>
-                    <a:bodyPr/>
-                    <a:lstStyle/>
-                    <a:p>
-                      <a:pPr>
-                        <a:defRPr sz="900">
-                          <a:solidFill>
-                            <a:srgbClr val="1A1A2E"/>
-                          </a:solidFill>
-                          <a:latin typeface="Calibri"/>
-                        </a:defRPr>
-                      </a:pPr>
-                      <a:r>
-                        <a:t>10点/月（新設）</a:t>
-                      </a:r>
-                    </a:p>
-                  </a:txBody>
-                  <a:tcPr marL="45720" marR="45720" marT="18288" marB="18288">
-                    <a:solidFill>
-                      <a:srgbClr val="E8F0F0"/>
-                    </a:solidFill>
-                  </a:tcPr>
-                </a:tc>
-                <a:tc>
-                  <a:txBody>
-                    <a:bodyPr/>
-                    <a:lstStyle/>
-                    <a:p>
-                      <a:pPr>
-                        <a:defRPr sz="900">
-                          <a:solidFill>
-                            <a:srgbClr val="1A1A2E"/>
-                          </a:solidFill>
-                          <a:latin typeface="Calibri"/>
-                        </a:defRPr>
-                      </a:pPr>
-                      <a:r>
-                        <a:t>データ継続提出で加算</a:t>
-                      </a:r>
-                    </a:p>
-                  </a:txBody>
-                  <a:tcPr marL="45720" marR="45720" marT="18288" marB="18288">
-                    <a:solidFill>
-                      <a:srgbClr val="E8F0F0"/>
-                    </a:solidFill>
-                  </a:tcPr>
-                </a:tc>
-              </a:tr>
-            </a:tbl>
-          </a:graphicData>
-        </a:graphic>
-      </p:graphicFrame>
+      <p:sp>
+        <p:nvSpPr>
+          <p:cNvPr id="9" name="TextBox 8"/>
+          <p:cNvSpPr txBox="1"/>
+          <p:nvPr/>
+        </p:nvSpPr>
+        <p:spPr>
+          <a:xfrm>
+            <a:off x="5212080" y="1463040"/>
+            <a:ext cx="3200400" cy="731520"/>
+          </a:xfrm>
+          <a:prstGeom prst="rect">
+            <a:avLst/>
+          </a:prstGeom>
+          <a:noFill/>
+        </p:spPr>
+        <p:txBody>
+          <a:bodyPr wrap="square" lIns="45720" rIns="45720" tIns="27432" bIns="27432">
+            <a:spAutoFit/>
+          </a:bodyPr>
+          <a:lstStyle/>
+          <a:p>
+            <a:pPr algn="ctr">
+              <a:defRPr sz="4400" b="1">
+                <a:solidFill>
+                  <a:srgbClr val="0D2B3E"/>
+                </a:solidFill>
+                <a:latin typeface="Calibri"/>
+              </a:defRPr>
+            </a:pPr>
+            <a:r>
+              <a:t>17点</a:t>
+            </a:r>
+          </a:p>
+        </p:txBody>
+      </p:sp>
+      <p:sp>
+        <p:nvSpPr>
+          <p:cNvPr id="10" name="TextBox 9"/>
+          <p:cNvSpPr txBox="1"/>
+          <p:nvPr/>
+        </p:nvSpPr>
+        <p:spPr>
+          <a:xfrm>
+            <a:off x="5212080" y="2194560"/>
+            <a:ext cx="3200400" cy="274320"/>
+          </a:xfrm>
+          <a:prstGeom prst="rect">
+            <a:avLst/>
+          </a:prstGeom>
+          <a:noFill/>
+        </p:spPr>
+        <p:txBody>
+          <a:bodyPr wrap="square" lIns="45720" rIns="45720" tIns="27432" bIns="27432">
+            <a:spAutoFit/>
+          </a:bodyPr>
+          <a:lstStyle/>
+          <a:p>
+            <a:pPr algn="ctr">
+              <a:defRPr sz="1200" b="0">
+                <a:solidFill>
+                  <a:srgbClr val="0D2B3E"/>
+                </a:solidFill>
+                <a:latin typeface="Calibri"/>
+              </a:defRPr>
+            </a:pPr>
+            <a:r>
+              <a:t>新（+11点）</a:t>
+            </a:r>
+          </a:p>
+        </p:txBody>
+      </p:sp>
+      <p:sp>
+        <p:nvSpPr>
+          <p:cNvPr id="11" name="TextBox 10"/>
+          <p:cNvSpPr txBox="1"/>
+          <p:nvPr/>
+        </p:nvSpPr>
+        <p:spPr>
+          <a:xfrm>
+            <a:off x="731520" y="3474720"/>
+            <a:ext cx="7772400" cy="1371600"/>
+          </a:xfrm>
+          <a:prstGeom prst="rect">
+            <a:avLst/>
+          </a:prstGeom>
+          <a:noFill/>
+        </p:spPr>
+        <p:txBody>
+          <a:bodyPr wrap="square" lIns="45720" rIns="45720" tIns="27432" bIns="27432">
+            <a:spAutoFit/>
+          </a:bodyPr>
+          <a:lstStyle/>
+          <a:p>
+            <a:pPr>
+              <a:defRPr sz="1200">
+                <a:solidFill>
+                  <a:srgbClr val="F5F0E8"/>
+                </a:solidFill>
+                <a:latin typeface="Calibri"/>
+              </a:defRPr>
+              <a:buChar char="●"/>
+            </a:pPr>
+            <a:r>
+              <a:t>対象: 医療従事者 → 事務職員含む全職員に拡大</a:t>
+            </a:r>
+          </a:p>
+          <a:p>
+            <a:pPr>
+              <a:defRPr sz="1200">
+                <a:solidFill>
+                  <a:srgbClr val="F5F0E8"/>
+                </a:solidFill>
+                <a:latin typeface="Calibri"/>
+              </a:defRPr>
+              <a:buChar char="●"/>
+            </a:pPr>
+            <a:r>
+              <a:t>物価対応料: 初診2点・再診2点（新設、2027年度に倍増予定）</a:t>
+            </a:r>
+          </a:p>
+          <a:p>
+            <a:pPr>
+              <a:defRPr sz="1200">
+                <a:solidFill>
+                  <a:srgbClr val="F5F0E8"/>
+                </a:solidFill>
+                <a:latin typeface="Calibri"/>
+              </a:defRPr>
+              <a:buChar char="●"/>
+            </a:pPr>
+            <a:r>
+              <a:t>再診料: 75点 → 76点（微増だが全再診に波及）</a:t>
+            </a:r>
+          </a:p>
+        </p:txBody>
+      </p:sp>
     </p:spTree>
   </p:cSld>
   <p:clrMapOvr>
@@ -6458,8 +6135,8 @@
         </p:nvSpPr>
         <p:spPr>
           <a:xfrm>
-            <a:off x="457200" y="182880"/>
-            <a:ext cx="8229600" cy="457200"/>
+            <a:off x="457200" y="274320"/>
+            <a:ext cx="4572000" cy="365760"/>
           </a:xfrm>
           <a:prstGeom prst="rect">
             <a:avLst/>
@@ -6473,7 +6150,43 @@
           <a:lstStyle/>
           <a:p>
             <a:pPr algn="l">
-              <a:defRPr sz="2000" b="1">
+              <a:defRPr sz="1400" b="0">
+                <a:solidFill>
+                  <a:srgbClr val="7A8A9A"/>
+                </a:solidFill>
+                <a:latin typeface="Calibri"/>
+              </a:defRPr>
+            </a:pPr>
+            <a:r>
+              <a:t>柱2: 医療DXの再編</a:t>
+            </a:r>
+          </a:p>
+        </p:txBody>
+      </p:sp>
+      <p:sp>
+        <p:nvSpPr>
+          <p:cNvPr id="3" name="TextBox 2"/>
+          <p:cNvSpPr txBox="1"/>
+          <p:nvPr/>
+        </p:nvSpPr>
+        <p:spPr>
+          <a:xfrm>
+            <a:off x="457200" y="640080"/>
+            <a:ext cx="8229600" cy="457200"/>
+          </a:xfrm>
+          <a:prstGeom prst="rect">
+            <a:avLst/>
+          </a:prstGeom>
+          <a:noFill/>
+        </p:spPr>
+        <p:txBody>
+          <a:bodyPr wrap="square" lIns="45720" rIns="45720" tIns="27432" bIns="27432">
+            <a:spAutoFit/>
+          </a:bodyPr>
+          <a:lstStyle/>
+          <a:p>
+            <a:pPr algn="l">
+              <a:defRPr sz="2200" b="1">
                 <a:solidFill>
                   <a:srgbClr val="1A1A2E"/>
                 </a:solidFill>
@@ -6481,20 +6194,20 @@
               </a:defRPr>
             </a:pPr>
             <a:r>
-              <a:t>設定別ポイント (B) 入院（病院総合診療科）</a:t>
-            </a:r>
-          </a:p>
-        </p:txBody>
-      </p:sp>
-      <p:sp>
-        <p:nvSpPr>
-          <p:cNvPr id="3" name="Rectangle 2"/>
+              <a:t>既存2加算 → 1つに統合</a:t>
+            </a:r>
+          </a:p>
+        </p:txBody>
+      </p:sp>
+      <p:sp>
+        <p:nvSpPr>
+          <p:cNvPr id="4" name="Rectangle 3"/>
           <p:cNvSpPr/>
           <p:nvPr/>
         </p:nvSpPr>
         <p:spPr>
           <a:xfrm>
-            <a:off x="457200" y="640080"/>
+            <a:off x="457200" y="1097280"/>
             <a:ext cx="1828800" cy="54864"/>
           </a:xfrm>
           <a:prstGeom prst="rect">
@@ -6529,487 +6242,286 @@
           </a:p>
         </p:txBody>
       </p:sp>
-      <p:graphicFrame>
-        <p:nvGraphicFramePr>
-          <p:cNvPr id="4" name="Table 3"/>
-          <p:cNvGraphicFramePr>
-            <a:graphicFrameLocks noGrp="1"/>
-          </p:cNvGraphicFramePr>
-          <p:nvPr/>
-        </p:nvGraphicFramePr>
-        <p:xfrm>
-          <a:off x="274320" y="822960"/>
-          <a:ext cx="8595360" cy="2084832"/>
-        </p:xfrm>
-        <a:graphic>
-          <a:graphicData uri="http://schemas.openxmlformats.org/drawingml/2006/table">
-            <a:tbl>
-              <a:tblPr firstRow="1" bandRow="1">
-                <a:tableStyleId>{5C22544A-7EE6-4342-B048-85BDC9FD1C3A}</a:tableStyleId>
-              </a:tblPr>
-              <a:tblGrid>
-                <a:gridCol w="2286000"/>
-                <a:gridCol w="3657600"/>
-                <a:gridCol w="2651760"/>
-              </a:tblGrid>
-              <a:tr h="347472">
-                <a:tc>
-                  <a:txBody>
-                    <a:bodyPr/>
-                    <a:lstStyle/>
-                    <a:p>
-                      <a:pPr>
-                        <a:defRPr sz="1000" b="1">
-                          <a:solidFill>
-                            <a:srgbClr val="F5F0E8"/>
-                          </a:solidFill>
-                          <a:latin typeface="Calibri"/>
-                        </a:defRPr>
-                      </a:pPr>
-                      <a:r>
-                        <a:t>項目</a:t>
-                      </a:r>
-                    </a:p>
-                  </a:txBody>
-                  <a:tcPr marL="45720" marR="45720" marT="18288" marB="18288">
-                    <a:solidFill>
-                      <a:srgbClr val="0D2B3E"/>
-                    </a:solidFill>
-                  </a:tcPr>
-                </a:tc>
-                <a:tc>
-                  <a:txBody>
-                    <a:bodyPr/>
-                    <a:lstStyle/>
-                    <a:p>
-                      <a:pPr>
-                        <a:defRPr sz="1000" b="1">
-                          <a:solidFill>
-                            <a:srgbClr val="F5F0E8"/>
-                          </a:solidFill>
-                          <a:latin typeface="Calibri"/>
-                        </a:defRPr>
-                      </a:pPr>
-                      <a:r>
-                        <a:t>変更内容</a:t>
-                      </a:r>
-                    </a:p>
-                  </a:txBody>
-                  <a:tcPr marL="45720" marR="45720" marT="18288" marB="18288">
-                    <a:solidFill>
-                      <a:srgbClr val="0D2B3E"/>
-                    </a:solidFill>
-                  </a:tcPr>
-                </a:tc>
-                <a:tc>
-                  <a:txBody>
-                    <a:bodyPr/>
-                    <a:lstStyle/>
-                    <a:p>
-                      <a:pPr>
-                        <a:defRPr sz="1000" b="1">
-                          <a:solidFill>
-                            <a:srgbClr val="F5F0E8"/>
-                          </a:solidFill>
-                          <a:latin typeface="Calibri"/>
-                        </a:defRPr>
-                      </a:pPr>
-                      <a:r>
-                        <a:t>ポイント</a:t>
-                      </a:r>
-                    </a:p>
-                  </a:txBody>
-                  <a:tcPr marL="45720" marR="45720" marT="18288" marB="18288">
-                    <a:solidFill>
-                      <a:srgbClr val="0D2B3E"/>
-                    </a:solidFill>
-                  </a:tcPr>
-                </a:tc>
-              </a:tr>
-              <a:tr h="347472">
-                <a:tc>
-                  <a:txBody>
-                    <a:bodyPr/>
-                    <a:lstStyle/>
-                    <a:p>
-                      <a:pPr>
-                        <a:defRPr sz="1000">
-                          <a:solidFill>
-                            <a:srgbClr val="1A1A2E"/>
-                          </a:solidFill>
-                          <a:latin typeface="Calibri"/>
-                        </a:defRPr>
-                      </a:pPr>
-                      <a:r>
-                        <a:t>地域包括医療病棟</a:t>
-                      </a:r>
-                    </a:p>
-                  </a:txBody>
-                  <a:tcPr marL="45720" marR="45720" marT="18288" marB="18288">
-                    <a:solidFill>
-                      <a:srgbClr val="E8F0F0"/>
-                    </a:solidFill>
-                  </a:tcPr>
-                </a:tc>
-                <a:tc>
-                  <a:txBody>
-                    <a:bodyPr/>
-                    <a:lstStyle/>
-                    <a:p>
-                      <a:pPr>
-                        <a:defRPr sz="1000">
-                          <a:solidFill>
-                            <a:srgbClr val="1A1A2E"/>
-                          </a:solidFill>
-                          <a:latin typeface="Calibri"/>
-                        </a:defRPr>
-                      </a:pPr>
-                      <a:r>
-                        <a:t>6区分に細分化（3367-3066点）</a:t>
-                      </a:r>
-                    </a:p>
-                  </a:txBody>
-                  <a:tcPr marL="45720" marR="45720" marT="18288" marB="18288">
-                    <a:solidFill>
-                      <a:srgbClr val="E8F0F0"/>
-                    </a:solidFill>
-                  </a:tcPr>
-                </a:tc>
-                <a:tc>
-                  <a:txBody>
-                    <a:bodyPr/>
-                    <a:lstStyle/>
-                    <a:p>
-                      <a:pPr>
-                        <a:defRPr sz="1000">
-                          <a:solidFill>
-                            <a:srgbClr val="1A1A2E"/>
-                          </a:solidFill>
-                          <a:latin typeface="Calibri"/>
-                        </a:defRPr>
-                      </a:pPr>
-                      <a:r>
-                        <a:t>急性期併設有無・救急/予定で区分</a:t>
-                      </a:r>
-                    </a:p>
-                  </a:txBody>
-                  <a:tcPr marL="45720" marR="45720" marT="18288" marB="18288">
-                    <a:solidFill>
-                      <a:srgbClr val="E8F0F0"/>
-                    </a:solidFill>
-                  </a:tcPr>
-                </a:tc>
-              </a:tr>
-              <a:tr h="347472">
-                <a:tc>
-                  <a:txBody>
-                    <a:bodyPr/>
-                    <a:lstStyle/>
-                    <a:p>
-                      <a:pPr>
-                        <a:defRPr sz="1000">
-                          <a:solidFill>
-                            <a:srgbClr val="1A1A2E"/>
-                          </a:solidFill>
-                          <a:latin typeface="Calibri"/>
-                        </a:defRPr>
-                      </a:pPr>
-                      <a:r>
-                        <a:t>地域包括ケア病棟</a:t>
-                      </a:r>
-                    </a:p>
-                  </a:txBody>
-                  <a:tcPr marL="45720" marR="45720" marT="18288" marB="18288">
-                    <a:solidFill>
-                      <a:srgbClr val="F5F0E8"/>
-                    </a:solidFill>
-                  </a:tcPr>
-                </a:tc>
-                <a:tc>
-                  <a:txBody>
-                    <a:bodyPr/>
-                    <a:lstStyle/>
-                    <a:p>
-                      <a:pPr>
-                        <a:defRPr sz="1000">
-                          <a:solidFill>
-                            <a:srgbClr val="1A1A2E"/>
-                          </a:solidFill>
-                          <a:latin typeface="Calibri"/>
-                        </a:defRPr>
-                      </a:pPr>
-                      <a:r>
-                        <a:t>入院料1: 2838→2955点</a:t>
-                      </a:r>
-                    </a:p>
-                  </a:txBody>
-                  <a:tcPr marL="45720" marR="45720" marT="18288" marB="18288">
-                    <a:solidFill>
-                      <a:srgbClr val="F5F0E8"/>
-                    </a:solidFill>
-                  </a:tcPr>
-                </a:tc>
-                <a:tc>
-                  <a:txBody>
-                    <a:bodyPr/>
-                    <a:lstStyle/>
-                    <a:p>
-                      <a:pPr>
-                        <a:defRPr sz="1000">
-                          <a:solidFill>
-                            <a:srgbClr val="1A1A2E"/>
-                          </a:solidFill>
-                          <a:latin typeface="Calibri"/>
-                        </a:defRPr>
-                      </a:pPr>
-                      <a:r>
-                        <a:t>包括期医療の充実評価</a:t>
-                      </a:r>
-                    </a:p>
-                  </a:txBody>
-                  <a:tcPr marL="45720" marR="45720" marT="18288" marB="18288">
-                    <a:solidFill>
-                      <a:srgbClr val="F5F0E8"/>
-                    </a:solidFill>
-                  </a:tcPr>
-                </a:tc>
-              </a:tr>
-              <a:tr h="347472">
-                <a:tc>
-                  <a:txBody>
-                    <a:bodyPr/>
-                    <a:lstStyle/>
-                    <a:p>
-                      <a:pPr>
-                        <a:defRPr sz="1000">
-                          <a:solidFill>
-                            <a:srgbClr val="1A1A2E"/>
-                          </a:solidFill>
-                          <a:latin typeface="Calibri"/>
-                        </a:defRPr>
-                      </a:pPr>
-                      <a:r>
-                        <a:t>総合的診療機能</a:t>
-                      </a:r>
-                    </a:p>
-                  </a:txBody>
-                  <a:tcPr marL="45720" marR="45720" marT="18288" marB="18288">
-                    <a:solidFill>
-                      <a:srgbClr val="E8F0F0"/>
-                    </a:solidFill>
-                  </a:tcPr>
-                </a:tc>
-                <a:tc>
-                  <a:txBody>
-                    <a:bodyPr/>
-                    <a:lstStyle/>
-                    <a:p>
-                      <a:pPr>
-                        <a:defRPr sz="1000">
-                          <a:solidFill>
-                            <a:srgbClr val="1A1A2E"/>
-                          </a:solidFill>
-                          <a:latin typeface="Calibri"/>
-                        </a:defRPr>
-                      </a:pPr>
-                      <a:r>
-                        <a:t>小児・周産期等の幅広い対応を高評価</a:t>
-                      </a:r>
-                    </a:p>
-                  </a:txBody>
-                  <a:tcPr marL="45720" marR="45720" marT="18288" marB="18288">
-                    <a:solidFill>
-                      <a:srgbClr val="E8F0F0"/>
-                    </a:solidFill>
-                  </a:tcPr>
-                </a:tc>
-                <a:tc>
-                  <a:txBody>
-                    <a:bodyPr/>
-                    <a:lstStyle/>
-                    <a:p>
-                      <a:pPr>
-                        <a:defRPr sz="1000">
-                          <a:solidFill>
-                            <a:srgbClr val="1A1A2E"/>
-                          </a:solidFill>
-                          <a:latin typeface="Calibri"/>
-                        </a:defRPr>
-                      </a:pPr>
-                      <a:r>
-                        <a:t>「地域最後の砦」に有利</a:t>
-                      </a:r>
-                    </a:p>
-                  </a:txBody>
-                  <a:tcPr marL="45720" marR="45720" marT="18288" marB="18288">
-                    <a:solidFill>
-                      <a:srgbClr val="E8F0F0"/>
-                    </a:solidFill>
-                  </a:tcPr>
-                </a:tc>
-              </a:tr>
-              <a:tr h="347472">
-                <a:tc>
-                  <a:txBody>
-                    <a:bodyPr/>
-                    <a:lstStyle/>
-                    <a:p>
-                      <a:pPr>
-                        <a:defRPr sz="1000">
-                          <a:solidFill>
-                            <a:srgbClr val="1A1A2E"/>
-                          </a:solidFill>
-                          <a:latin typeface="Calibri"/>
-                        </a:defRPr>
-                      </a:pPr>
-                      <a:r>
-                        <a:t>急性期一般入院料</a:t>
-                      </a:r>
-                    </a:p>
-                  </a:txBody>
-                  <a:tcPr marL="45720" marR="45720" marT="18288" marB="18288">
-                    <a:solidFill>
-                      <a:srgbClr val="F5F0E8"/>
-                    </a:solidFill>
-                  </a:tcPr>
-                </a:tc>
-                <a:tc>
-                  <a:txBody>
-                    <a:bodyPr/>
-                    <a:lstStyle/>
-                    <a:p>
-                      <a:pPr>
-                        <a:defRPr sz="1000">
-                          <a:solidFill>
-                            <a:srgbClr val="1A1A2E"/>
-                          </a:solidFill>
-                          <a:latin typeface="Calibri"/>
-                        </a:defRPr>
-                      </a:pPr>
-                      <a:r>
-                        <a:t>新区分の新設</a:t>
-                      </a:r>
-                    </a:p>
-                  </a:txBody>
-                  <a:tcPr marL="45720" marR="45720" marT="18288" marB="18288">
-                    <a:solidFill>
-                      <a:srgbClr val="F5F0E8"/>
-                    </a:solidFill>
-                  </a:tcPr>
-                </a:tc>
-                <a:tc>
-                  <a:txBody>
-                    <a:bodyPr/>
-                    <a:lstStyle/>
-                    <a:p>
-                      <a:pPr>
-                        <a:defRPr sz="1000">
-                          <a:solidFill>
-                            <a:srgbClr val="1A1A2E"/>
-                          </a:solidFill>
-                          <a:latin typeface="Calibri"/>
-                        </a:defRPr>
-                      </a:pPr>
-                      <a:r>
-                        <a:t>高度/一般の役割分担加速</a:t>
-                      </a:r>
-                    </a:p>
-                  </a:txBody>
-                  <a:tcPr marL="45720" marR="45720" marT="18288" marB="18288">
-                    <a:solidFill>
-                      <a:srgbClr val="F5F0E8"/>
-                    </a:solidFill>
-                  </a:tcPr>
-                </a:tc>
-              </a:tr>
-              <a:tr h="347472">
-                <a:tc>
-                  <a:txBody>
-                    <a:bodyPr/>
-                    <a:lstStyle/>
-                    <a:p>
-                      <a:pPr>
-                        <a:defRPr sz="1000">
-                          <a:solidFill>
-                            <a:srgbClr val="1A1A2E"/>
-                          </a:solidFill>
-                          <a:latin typeface="Calibri"/>
-                        </a:defRPr>
-                      </a:pPr>
-                      <a:r>
-                        <a:t>入院時物価対応料</a:t>
-                      </a:r>
-                    </a:p>
-                  </a:txBody>
-                  <a:tcPr marL="45720" marR="45720" marT="18288" marB="18288">
-                    <a:solidFill>
-                      <a:srgbClr val="E8F0F0"/>
-                    </a:solidFill>
-                  </a:tcPr>
-                </a:tc>
-                <a:tc>
-                  <a:txBody>
-                    <a:bodyPr/>
-                    <a:lstStyle/>
-                    <a:p>
-                      <a:pPr>
-                        <a:defRPr sz="1000">
-                          <a:solidFill>
-                            <a:srgbClr val="1A1A2E"/>
-                          </a:solidFill>
-                          <a:latin typeface="Calibri"/>
-                        </a:defRPr>
-                      </a:pPr>
-                      <a:r>
-                        <a:t>新設</a:t>
-                      </a:r>
-                    </a:p>
-                  </a:txBody>
-                  <a:tcPr marL="45720" marR="45720" marT="18288" marB="18288">
-                    <a:solidFill>
-                      <a:srgbClr val="E8F0F0"/>
-                    </a:solidFill>
-                  </a:tcPr>
-                </a:tc>
-                <a:tc>
-                  <a:txBody>
-                    <a:bodyPr/>
-                    <a:lstStyle/>
-                    <a:p>
-                      <a:pPr>
-                        <a:defRPr sz="1000">
-                          <a:solidFill>
-                            <a:srgbClr val="1A1A2E"/>
-                          </a:solidFill>
-                          <a:latin typeface="Calibri"/>
-                        </a:defRPr>
-                      </a:pPr>
-                      <a:r>
-                        <a:t>食材費・光熱水費対応</a:t>
-                      </a:r>
-                    </a:p>
-                  </a:txBody>
-                  <a:tcPr marL="45720" marR="45720" marT="18288" marB="18288">
-                    <a:solidFill>
-                      <a:srgbClr val="E8F0F0"/>
-                    </a:solidFill>
-                  </a:tcPr>
-                </a:tc>
-              </a:tr>
-            </a:tbl>
-          </a:graphicData>
-        </a:graphic>
-      </p:graphicFrame>
-      <p:sp>
-        <p:nvSpPr>
-          <p:cNvPr id="5" name="Rectangle 4"/>
+      <p:sp>
+        <p:nvSpPr>
+          <p:cNvPr id="5" name="TextBox 4"/>
+          <p:cNvSpPr txBox="1"/>
+          <p:nvPr/>
+        </p:nvSpPr>
+        <p:spPr>
+          <a:xfrm>
+            <a:off x="457200" y="1371600"/>
+            <a:ext cx="2743200" cy="274320"/>
+          </a:xfrm>
+          <a:prstGeom prst="rect">
+            <a:avLst/>
+          </a:prstGeom>
+          <a:noFill/>
+        </p:spPr>
+        <p:txBody>
+          <a:bodyPr wrap="square" lIns="45720" rIns="45720" tIns="27432" bIns="27432">
+            <a:spAutoFit/>
+          </a:bodyPr>
+          <a:lstStyle/>
+          <a:p>
+            <a:pPr algn="l">
+              <a:defRPr sz="1200" b="0">
+                <a:solidFill>
+                  <a:srgbClr val="7A8A9A"/>
+                </a:solidFill>
+                <a:latin typeface="Calibri"/>
+              </a:defRPr>
+            </a:pPr>
+            <a:r>
+              <a:t>旧制度</a:t>
+            </a:r>
+          </a:p>
+        </p:txBody>
+      </p:sp>
+      <p:sp>
+        <p:nvSpPr>
+          <p:cNvPr id="6" name="Rectangle 5"/>
           <p:cNvSpPr/>
           <p:nvPr/>
         </p:nvSpPr>
         <p:spPr>
           <a:xfrm>
-            <a:off x="457200" y="3383280"/>
-            <a:ext cx="54864" cy="548640"/>
+            <a:off x="457200" y="1645920"/>
+            <a:ext cx="3200400" cy="457200"/>
+          </a:xfrm>
+          <a:prstGeom prst="rect">
+            <a:avLst/>
+          </a:prstGeom>
+          <a:solidFill>
+            <a:srgbClr val="E8F0F0"/>
+          </a:solidFill>
+          <a:ln w="12700">
+            <a:solidFill>
+              <a:srgbClr val="7A8A9A"/>
+            </a:solidFill>
+          </a:ln>
+        </p:spPr>
+        <p:style>
+          <a:lnRef idx="1">
+            <a:schemeClr val="accent1"/>
+          </a:lnRef>
+          <a:fillRef idx="3">
+            <a:schemeClr val="accent1"/>
+          </a:fillRef>
+          <a:effectRef idx="2">
+            <a:schemeClr val="accent1"/>
+          </a:effectRef>
+          <a:fontRef idx="minor">
+            <a:schemeClr val="lt1"/>
+          </a:fontRef>
+        </p:style>
+        <p:txBody>
+          <a:bodyPr rtlCol="0" anchor="ctr"/>
+          <a:lstStyle/>
+          <a:p>
+            <a:pPr algn="ctr"/>
+          </a:p>
+        </p:txBody>
+      </p:sp>
+      <p:sp>
+        <p:nvSpPr>
+          <p:cNvPr id="7" name="TextBox 6"/>
+          <p:cNvSpPr txBox="1"/>
+          <p:nvPr/>
+        </p:nvSpPr>
+        <p:spPr>
+          <a:xfrm>
+            <a:off x="640080" y="1691640"/>
+            <a:ext cx="3017520" cy="365760"/>
+          </a:xfrm>
+          <a:prstGeom prst="rect">
+            <a:avLst/>
+          </a:prstGeom>
+          <a:noFill/>
+        </p:spPr>
+        <p:txBody>
+          <a:bodyPr wrap="square" lIns="45720" rIns="45720" tIns="27432" bIns="27432">
+            <a:spAutoFit/>
+          </a:bodyPr>
+          <a:lstStyle/>
+          <a:p>
+            <a:pPr algn="l">
+              <a:defRPr sz="1100" b="0">
+                <a:solidFill>
+                  <a:srgbClr val="1A1A2E"/>
+                </a:solidFill>
+                <a:latin typeface="Calibri"/>
+              </a:defRPr>
+            </a:pPr>
+            <a:r>
+              <a:t>医療DX推進体制整備加算</a:t>
+            </a:r>
+          </a:p>
+        </p:txBody>
+      </p:sp>
+      <p:sp>
+        <p:nvSpPr>
+          <p:cNvPr id="8" name="Rectangle 7"/>
+          <p:cNvSpPr/>
+          <p:nvPr/>
+        </p:nvSpPr>
+        <p:spPr>
+          <a:xfrm>
+            <a:off x="457200" y="2194560"/>
+            <a:ext cx="3200400" cy="457200"/>
+          </a:xfrm>
+          <a:prstGeom prst="rect">
+            <a:avLst/>
+          </a:prstGeom>
+          <a:solidFill>
+            <a:srgbClr val="E8F0F0"/>
+          </a:solidFill>
+          <a:ln w="12700">
+            <a:solidFill>
+              <a:srgbClr val="7A8A9A"/>
+            </a:solidFill>
+          </a:ln>
+        </p:spPr>
+        <p:style>
+          <a:lnRef idx="1">
+            <a:schemeClr val="accent1"/>
+          </a:lnRef>
+          <a:fillRef idx="3">
+            <a:schemeClr val="accent1"/>
+          </a:fillRef>
+          <a:effectRef idx="2">
+            <a:schemeClr val="accent1"/>
+          </a:effectRef>
+          <a:fontRef idx="minor">
+            <a:schemeClr val="lt1"/>
+          </a:fontRef>
+        </p:style>
+        <p:txBody>
+          <a:bodyPr rtlCol="0" anchor="ctr"/>
+          <a:lstStyle/>
+          <a:p>
+            <a:pPr algn="ctr"/>
+          </a:p>
+        </p:txBody>
+      </p:sp>
+      <p:sp>
+        <p:nvSpPr>
+          <p:cNvPr id="9" name="TextBox 8"/>
+          <p:cNvSpPr txBox="1"/>
+          <p:nvPr/>
+        </p:nvSpPr>
+        <p:spPr>
+          <a:xfrm>
+            <a:off x="640080" y="2240280"/>
+            <a:ext cx="3017520" cy="365760"/>
+          </a:xfrm>
+          <a:prstGeom prst="rect">
+            <a:avLst/>
+          </a:prstGeom>
+          <a:noFill/>
+        </p:spPr>
+        <p:txBody>
+          <a:bodyPr wrap="square" lIns="45720" rIns="45720" tIns="27432" bIns="27432">
+            <a:spAutoFit/>
+          </a:bodyPr>
+          <a:lstStyle/>
+          <a:p>
+            <a:pPr algn="l">
+              <a:defRPr sz="1100" b="0">
+                <a:solidFill>
+                  <a:srgbClr val="1A1A2E"/>
+                </a:solidFill>
+                <a:latin typeface="Calibri"/>
+              </a:defRPr>
+            </a:pPr>
+            <a:r>
+              <a:t>医療情報取得加算</a:t>
+            </a:r>
+          </a:p>
+        </p:txBody>
+      </p:sp>
+      <p:sp>
+        <p:nvSpPr>
+          <p:cNvPr id="10" name="TextBox 9"/>
+          <p:cNvSpPr txBox="1"/>
+          <p:nvPr/>
+        </p:nvSpPr>
+        <p:spPr>
+          <a:xfrm>
+            <a:off x="3840480" y="1828800"/>
+            <a:ext cx="731520" cy="731520"/>
+          </a:xfrm>
+          <a:prstGeom prst="rect">
+            <a:avLst/>
+          </a:prstGeom>
+          <a:noFill/>
+        </p:spPr>
+        <p:txBody>
+          <a:bodyPr wrap="square" lIns="45720" rIns="45720" tIns="27432" bIns="27432">
+            <a:spAutoFit/>
+          </a:bodyPr>
+          <a:lstStyle/>
+          <a:p>
+            <a:pPr algn="ctr">
+              <a:defRPr sz="3200" b="1">
+                <a:solidFill>
+                  <a:srgbClr val="E89B3B"/>
+                </a:solidFill>
+                <a:latin typeface="Calibri"/>
+              </a:defRPr>
+            </a:pPr>
+            <a:r>
+              <a:t>→</a:t>
+            </a:r>
+          </a:p>
+        </p:txBody>
+      </p:sp>
+      <p:sp>
+        <p:nvSpPr>
+          <p:cNvPr id="11" name="TextBox 10"/>
+          <p:cNvSpPr txBox="1"/>
+          <p:nvPr/>
+        </p:nvSpPr>
+        <p:spPr>
+          <a:xfrm>
+            <a:off x="4754880" y="1371600"/>
+            <a:ext cx="4114800" cy="274320"/>
+          </a:xfrm>
+          <a:prstGeom prst="rect">
+            <a:avLst/>
+          </a:prstGeom>
+          <a:noFill/>
+        </p:spPr>
+        <p:txBody>
+          <a:bodyPr wrap="square" lIns="45720" rIns="45720" tIns="27432" bIns="27432">
+            <a:spAutoFit/>
+          </a:bodyPr>
+          <a:lstStyle/>
+          <a:p>
+            <a:pPr algn="l">
+              <a:defRPr sz="1200" b="0">
+                <a:solidFill>
+                  <a:srgbClr val="7A8A9A"/>
+                </a:solidFill>
+                <a:latin typeface="Calibri"/>
+              </a:defRPr>
+            </a:pPr>
+            <a:r>
+              <a:t>新制度</a:t>
+            </a:r>
+          </a:p>
+        </p:txBody>
+      </p:sp>
+      <p:sp>
+        <p:nvSpPr>
+          <p:cNvPr id="12" name="Rectangle 11"/>
+          <p:cNvSpPr/>
+          <p:nvPr/>
+        </p:nvSpPr>
+        <p:spPr>
+          <a:xfrm>
+            <a:off x="4754880" y="1645920"/>
+            <a:ext cx="4114800" cy="1005840"/>
           </a:xfrm>
           <a:prstGeom prst="rect">
             <a:avLst/>
@@ -7045,25 +6557,99 @@
       </p:sp>
       <p:sp>
         <p:nvSpPr>
-          <p:cNvPr id="6" name="Rectangle 5"/>
+          <p:cNvPr id="13" name="TextBox 12"/>
+          <p:cNvSpPr txBox="1"/>
+          <p:nvPr/>
+        </p:nvSpPr>
+        <p:spPr>
+          <a:xfrm>
+            <a:off x="4937760" y="1691640"/>
+            <a:ext cx="3840480" cy="640080"/>
+          </a:xfrm>
+          <a:prstGeom prst="rect">
+            <a:avLst/>
+          </a:prstGeom>
+          <a:noFill/>
+        </p:spPr>
+        <p:txBody>
+          <a:bodyPr wrap="square" lIns="45720" rIns="45720" tIns="27432" bIns="27432">
+            <a:spAutoFit/>
+          </a:bodyPr>
+          <a:lstStyle/>
+          <a:p>
+            <a:pPr algn="l">
+              <a:defRPr sz="1400" b="1">
+                <a:solidFill>
+                  <a:srgbClr val="0D2B3E"/>
+                </a:solidFill>
+                <a:latin typeface="Calibri"/>
+              </a:defRPr>
+            </a:pPr>
+            <a:r>
+              <a:t>電子的診療情報連携</a:t>
+            </a:r>
+            <a:br/>
+            <a:r>
+              <a:t>体制整備加算</a:t>
+            </a:r>
+          </a:p>
+        </p:txBody>
+      </p:sp>
+      <p:sp>
+        <p:nvSpPr>
+          <p:cNvPr id="14" name="TextBox 13"/>
+          <p:cNvSpPr txBox="1"/>
+          <p:nvPr/>
+        </p:nvSpPr>
+        <p:spPr>
+          <a:xfrm>
+            <a:off x="4937760" y="2331720"/>
+            <a:ext cx="3840480" cy="274320"/>
+          </a:xfrm>
+          <a:prstGeom prst="rect">
+            <a:avLst/>
+          </a:prstGeom>
+          <a:noFill/>
+        </p:spPr>
+        <p:txBody>
+          <a:bodyPr wrap="square" lIns="45720" rIns="45720" tIns="27432" bIns="27432">
+            <a:spAutoFit/>
+          </a:bodyPr>
+          <a:lstStyle/>
+          <a:p>
+            <a:pPr algn="l">
+              <a:defRPr sz="1100" b="0">
+                <a:solidFill>
+                  <a:srgbClr val="0D2B3E"/>
+                </a:solidFill>
+                <a:latin typeface="Calibri"/>
+              </a:defRPr>
+            </a:pPr>
+            <a:r>
+              <a:t>初診: 最大15点（3区分）</a:t>
+            </a:r>
+          </a:p>
+        </p:txBody>
+      </p:sp>
+      <p:sp>
+        <p:nvSpPr>
+          <p:cNvPr id="15" name="Rectangle 14"/>
           <p:cNvSpPr/>
           <p:nvPr/>
         </p:nvSpPr>
         <p:spPr>
           <a:xfrm>
-            <a:off x="566928" y="3383280"/>
-            <a:ext cx="8119872" cy="548640"/>
+            <a:off x="457200" y="3017520"/>
+            <a:ext cx="1371600" cy="457200"/>
           </a:xfrm>
           <a:prstGeom prst="rect">
             <a:avLst/>
           </a:prstGeom>
           <a:solidFill>
-            <a:srgbClr val="FFFFFF"/>
+            <a:srgbClr val="E89B3B"/>
           </a:solidFill>
-          <a:ln w="12700">
-            <a:solidFill>
-              <a:srgbClr val="4EB8A9"/>
-            </a:solidFill>
+          <a:ln>
+            <a:noFill/>
           </a:ln>
         </p:spPr>
         <p:style>
@@ -7090,14 +6676,14 @@
       </p:sp>
       <p:sp>
         <p:nvSpPr>
-          <p:cNvPr id="7" name="TextBox 6"/>
+          <p:cNvPr id="16" name="TextBox 15"/>
           <p:cNvSpPr txBox="1"/>
           <p:nvPr/>
         </p:nvSpPr>
         <p:spPr>
           <a:xfrm>
-            <a:off x="685800" y="3456432"/>
-            <a:ext cx="7863840" cy="402335"/>
+            <a:off x="457200" y="3063239"/>
+            <a:ext cx="1371600" cy="365760"/>
           </a:xfrm>
           <a:prstGeom prst="rect">
             <a:avLst/>
@@ -7110,16 +6696,282 @@
           </a:bodyPr>
           <a:lstStyle/>
           <a:p>
+            <a:pPr algn="ctr">
+              <a:defRPr sz="1300" b="1">
+                <a:solidFill>
+                  <a:srgbClr val="0D2B3E"/>
+                </a:solidFill>
+                <a:latin typeface="Calibri"/>
+              </a:defRPr>
+            </a:pPr>
+            <a:r>
+              <a:t>区分1 15点</a:t>
+            </a:r>
+          </a:p>
+        </p:txBody>
+      </p:sp>
+      <p:sp>
+        <p:nvSpPr>
+          <p:cNvPr id="17" name="TextBox 16"/>
+          <p:cNvSpPr txBox="1"/>
+          <p:nvPr/>
+        </p:nvSpPr>
+        <p:spPr>
+          <a:xfrm>
+            <a:off x="2011680" y="3063239"/>
+            <a:ext cx="6858000" cy="365760"/>
+          </a:xfrm>
+          <a:prstGeom prst="rect">
+            <a:avLst/>
+          </a:prstGeom>
+          <a:noFill/>
+        </p:spPr>
+        <p:txBody>
+          <a:bodyPr wrap="square" lIns="45720" rIns="45720" tIns="27432" bIns="27432">
+            <a:spAutoFit/>
+          </a:bodyPr>
+          <a:lstStyle/>
+          <a:p>
             <a:pPr algn="l">
-              <a:defRPr sz="1100" b="0">
+              <a:defRPr sz="1200" b="0">
                 <a:solidFill>
                   <a:srgbClr val="1A1A2E"/>
                 </a:solidFill>
-                <a:latin typeface="Georgia"/>
-              </a:defRPr>
-            </a:pPr>
-            <a:r>
-              <a:t>地域包括医療病棟の細分化→「どの区分を取るか」が経営戦略に直結</a:t>
+                <a:latin typeface="Calibri"/>
+              </a:defRPr>
+            </a:pPr>
+            <a:r>
+              <a:t>マイナ利用率30%以上 + 電子処方箋実績</a:t>
+            </a:r>
+          </a:p>
+        </p:txBody>
+      </p:sp>
+      <p:sp>
+        <p:nvSpPr>
+          <p:cNvPr id="18" name="Rectangle 17"/>
+          <p:cNvSpPr/>
+          <p:nvPr/>
+        </p:nvSpPr>
+        <p:spPr>
+          <a:xfrm>
+            <a:off x="457200" y="3611879"/>
+            <a:ext cx="1371600" cy="457200"/>
+          </a:xfrm>
+          <a:prstGeom prst="rect">
+            <a:avLst/>
+          </a:prstGeom>
+          <a:solidFill>
+            <a:srgbClr val="E89B3B"/>
+          </a:solidFill>
+          <a:ln>
+            <a:noFill/>
+          </a:ln>
+        </p:spPr>
+        <p:style>
+          <a:lnRef idx="1">
+            <a:schemeClr val="accent1"/>
+          </a:lnRef>
+          <a:fillRef idx="3">
+            <a:schemeClr val="accent1"/>
+          </a:fillRef>
+          <a:effectRef idx="2">
+            <a:schemeClr val="accent1"/>
+          </a:effectRef>
+          <a:fontRef idx="minor">
+            <a:schemeClr val="lt1"/>
+          </a:fontRef>
+        </p:style>
+        <p:txBody>
+          <a:bodyPr rtlCol="0" anchor="ctr"/>
+          <a:lstStyle/>
+          <a:p>
+            <a:pPr algn="ctr"/>
+          </a:p>
+        </p:txBody>
+      </p:sp>
+      <p:sp>
+        <p:nvSpPr>
+          <p:cNvPr id="19" name="TextBox 18"/>
+          <p:cNvSpPr txBox="1"/>
+          <p:nvPr/>
+        </p:nvSpPr>
+        <p:spPr>
+          <a:xfrm>
+            <a:off x="457200" y="3657599"/>
+            <a:ext cx="1371600" cy="365760"/>
+          </a:xfrm>
+          <a:prstGeom prst="rect">
+            <a:avLst/>
+          </a:prstGeom>
+          <a:noFill/>
+        </p:spPr>
+        <p:txBody>
+          <a:bodyPr wrap="square" lIns="45720" rIns="45720" tIns="27432" bIns="27432">
+            <a:spAutoFit/>
+          </a:bodyPr>
+          <a:lstStyle/>
+          <a:p>
+            <a:pPr algn="ctr">
+              <a:defRPr sz="1300" b="1">
+                <a:solidFill>
+                  <a:srgbClr val="0D2B3E"/>
+                </a:solidFill>
+                <a:latin typeface="Calibri"/>
+              </a:defRPr>
+            </a:pPr>
+            <a:r>
+              <a:t>区分2 9点</a:t>
+            </a:r>
+          </a:p>
+        </p:txBody>
+      </p:sp>
+      <p:sp>
+        <p:nvSpPr>
+          <p:cNvPr id="20" name="TextBox 19"/>
+          <p:cNvSpPr txBox="1"/>
+          <p:nvPr/>
+        </p:nvSpPr>
+        <p:spPr>
+          <a:xfrm>
+            <a:off x="2011680" y="3657599"/>
+            <a:ext cx="6858000" cy="365760"/>
+          </a:xfrm>
+          <a:prstGeom prst="rect">
+            <a:avLst/>
+          </a:prstGeom>
+          <a:noFill/>
+        </p:spPr>
+        <p:txBody>
+          <a:bodyPr wrap="square" lIns="45720" rIns="45720" tIns="27432" bIns="27432">
+            <a:spAutoFit/>
+          </a:bodyPr>
+          <a:lstStyle/>
+          <a:p>
+            <a:pPr algn="l">
+              <a:defRPr sz="1200" b="0">
+                <a:solidFill>
+                  <a:srgbClr val="1A1A2E"/>
+                </a:solidFill>
+                <a:latin typeface="Calibri"/>
+              </a:defRPr>
+            </a:pPr>
+            <a:r>
+              <a:t>電子処方箋体制あり</a:t>
+            </a:r>
+          </a:p>
+        </p:txBody>
+      </p:sp>
+      <p:sp>
+        <p:nvSpPr>
+          <p:cNvPr id="21" name="Rectangle 20"/>
+          <p:cNvSpPr/>
+          <p:nvPr/>
+        </p:nvSpPr>
+        <p:spPr>
+          <a:xfrm>
+            <a:off x="457200" y="4206240"/>
+            <a:ext cx="1371600" cy="457200"/>
+          </a:xfrm>
+          <a:prstGeom prst="rect">
+            <a:avLst/>
+          </a:prstGeom>
+          <a:solidFill>
+            <a:srgbClr val="E89B3B"/>
+          </a:solidFill>
+          <a:ln>
+            <a:noFill/>
+          </a:ln>
+        </p:spPr>
+        <p:style>
+          <a:lnRef idx="1">
+            <a:schemeClr val="accent1"/>
+          </a:lnRef>
+          <a:fillRef idx="3">
+            <a:schemeClr val="accent1"/>
+          </a:fillRef>
+          <a:effectRef idx="2">
+            <a:schemeClr val="accent1"/>
+          </a:effectRef>
+          <a:fontRef idx="minor">
+            <a:schemeClr val="lt1"/>
+          </a:fontRef>
+        </p:style>
+        <p:txBody>
+          <a:bodyPr rtlCol="0" anchor="ctr"/>
+          <a:lstStyle/>
+          <a:p>
+            <a:pPr algn="ctr"/>
+          </a:p>
+        </p:txBody>
+      </p:sp>
+      <p:sp>
+        <p:nvSpPr>
+          <p:cNvPr id="22" name="TextBox 21"/>
+          <p:cNvSpPr txBox="1"/>
+          <p:nvPr/>
+        </p:nvSpPr>
+        <p:spPr>
+          <a:xfrm>
+            <a:off x="457200" y="4251959"/>
+            <a:ext cx="1371600" cy="365760"/>
+          </a:xfrm>
+          <a:prstGeom prst="rect">
+            <a:avLst/>
+          </a:prstGeom>
+          <a:noFill/>
+        </p:spPr>
+        <p:txBody>
+          <a:bodyPr wrap="square" lIns="45720" rIns="45720" tIns="27432" bIns="27432">
+            <a:spAutoFit/>
+          </a:bodyPr>
+          <a:lstStyle/>
+          <a:p>
+            <a:pPr algn="ctr">
+              <a:defRPr sz="1300" b="1">
+                <a:solidFill>
+                  <a:srgbClr val="0D2B3E"/>
+                </a:solidFill>
+                <a:latin typeface="Calibri"/>
+              </a:defRPr>
+            </a:pPr>
+            <a:r>
+              <a:t>区分3 4点</a:t>
+            </a:r>
+          </a:p>
+        </p:txBody>
+      </p:sp>
+      <p:sp>
+        <p:nvSpPr>
+          <p:cNvPr id="23" name="TextBox 22"/>
+          <p:cNvSpPr txBox="1"/>
+          <p:nvPr/>
+        </p:nvSpPr>
+        <p:spPr>
+          <a:xfrm>
+            <a:off x="2011680" y="4251959"/>
+            <a:ext cx="6858000" cy="365760"/>
+          </a:xfrm>
+          <a:prstGeom prst="rect">
+            <a:avLst/>
+          </a:prstGeom>
+          <a:noFill/>
+        </p:spPr>
+        <p:txBody>
+          <a:bodyPr wrap="square" lIns="45720" rIns="45720" tIns="27432" bIns="27432">
+            <a:spAutoFit/>
+          </a:bodyPr>
+          <a:lstStyle/>
+          <a:p>
+            <a:pPr algn="l">
+              <a:defRPr sz="1200" b="0">
+                <a:solidFill>
+                  <a:srgbClr val="1A1A2E"/>
+                </a:solidFill>
+                <a:latin typeface="Calibri"/>
+              </a:defRPr>
+            </a:pPr>
+            <a:r>
+              <a:t>マイナ保険証基本体制のみ</a:t>
             </a:r>
           </a:p>
         </p:txBody>
@@ -7138,7 +6990,7 @@
     <p:bg>
       <p:bgPr>
         <a:solidFill>
-          <a:srgbClr val="F5F0E8"/>
+          <a:srgbClr val="0D2B3E"/>
         </a:solidFill>
         <a:effectLst/>
       </p:bgPr>
@@ -7158,8 +7010,8 @@
         </p:nvSpPr>
         <p:spPr>
           <a:xfrm>
-            <a:off x="457200" y="137160"/>
-            <a:ext cx="8229600" cy="365760"/>
+            <a:off x="457200" y="274320"/>
+            <a:ext cx="4572000" cy="365760"/>
           </a:xfrm>
           <a:prstGeom prst="rect">
             <a:avLst/>
@@ -7173,29 +7025,65 @@
           <a:lstStyle/>
           <a:p>
             <a:pPr algn="l">
-              <a:defRPr sz="2000" b="1">
-                <a:solidFill>
-                  <a:srgbClr val="1A1A2E"/>
+              <a:defRPr sz="1400" b="0">
+                <a:solidFill>
+                  <a:srgbClr val="7A8A9A"/>
                 </a:solidFill>
                 <a:latin typeface="Calibri"/>
               </a:defRPr>
             </a:pPr>
             <a:r>
-              <a:t>設定別ポイント (C) 救急 + (D) 連携</a:t>
-            </a:r>
-          </a:p>
-        </p:txBody>
-      </p:sp>
-      <p:sp>
-        <p:nvSpPr>
-          <p:cNvPr id="3" name="Rectangle 2"/>
+              <a:t>柱3: かかりつけ医機能強化</a:t>
+            </a:r>
+          </a:p>
+        </p:txBody>
+      </p:sp>
+      <p:sp>
+        <p:nvSpPr>
+          <p:cNvPr id="3" name="TextBox 2"/>
+          <p:cNvSpPr txBox="1"/>
+          <p:nvPr/>
+        </p:nvSpPr>
+        <p:spPr>
+          <a:xfrm>
+            <a:off x="457200" y="731520"/>
+            <a:ext cx="8229600" cy="548640"/>
+          </a:xfrm>
+          <a:prstGeom prst="rect">
+            <a:avLst/>
+          </a:prstGeom>
+          <a:noFill/>
+        </p:spPr>
+        <p:txBody>
+          <a:bodyPr wrap="square" lIns="45720" rIns="45720" tIns="27432" bIns="27432">
+            <a:spAutoFit/>
+          </a:bodyPr>
+          <a:lstStyle/>
+          <a:p>
+            <a:pPr algn="l">
+              <a:defRPr sz="2800" b="1">
+                <a:solidFill>
+                  <a:srgbClr val="E89B3B"/>
+                </a:solidFill>
+                <a:latin typeface="Calibri"/>
+              </a:defRPr>
+            </a:pPr>
+            <a:r>
+              <a:t>BCP策定が義務化</a:t>
+            </a:r>
+          </a:p>
+        </p:txBody>
+      </p:sp>
+      <p:sp>
+        <p:nvSpPr>
+          <p:cNvPr id="4" name="Rectangle 3"/>
           <p:cNvSpPr/>
           <p:nvPr/>
         </p:nvSpPr>
         <p:spPr>
           <a:xfrm>
-            <a:off x="457200" y="502920"/>
-            <a:ext cx="1828800" cy="54864"/>
+            <a:off x="457200" y="1371600"/>
+            <a:ext cx="2743200" cy="54864"/>
           </a:xfrm>
           <a:prstGeom prst="rect">
             <a:avLst/>
@@ -7231,13 +7119,56 @@
       </p:sp>
       <p:sp>
         <p:nvSpPr>
-          <p:cNvPr id="4" name="TextBox 3"/>
+          <p:cNvPr id="5" name="Rectangle 4"/>
+          <p:cNvSpPr/>
+          <p:nvPr/>
+        </p:nvSpPr>
+        <p:spPr>
+          <a:xfrm>
+            <a:off x="5029200" y="1645920"/>
+            <a:ext cx="3657600" cy="1371600"/>
+          </a:xfrm>
+          <a:prstGeom prst="rect">
+            <a:avLst/>
+          </a:prstGeom>
+          <a:solidFill>
+            <a:srgbClr val="E89B3B"/>
+          </a:solidFill>
+          <a:ln>
+            <a:noFill/>
+          </a:ln>
+        </p:spPr>
+        <p:style>
+          <a:lnRef idx="1">
+            <a:schemeClr val="accent1"/>
+          </a:lnRef>
+          <a:fillRef idx="3">
+            <a:schemeClr val="accent1"/>
+          </a:fillRef>
+          <a:effectRef idx="2">
+            <a:schemeClr val="accent1"/>
+          </a:effectRef>
+          <a:fontRef idx="minor">
+            <a:schemeClr val="lt1"/>
+          </a:fontRef>
+        </p:style>
+        <p:txBody>
+          <a:bodyPr rtlCol="0" anchor="ctr"/>
+          <a:lstStyle/>
+          <a:p>
+            <a:pPr algn="ctr"/>
+          </a:p>
+        </p:txBody>
+      </p:sp>
+      <p:sp>
+        <p:nvSpPr>
+          <p:cNvPr id="6" name="TextBox 5"/>
           <p:cNvSpPr txBox="1"/>
           <p:nvPr/>
         </p:nvSpPr>
         <p:spPr>
           <a:xfrm>
-            <a:off x="457200" y="640080"/>
+            <a:off x="5029200" y="1691640"/>
             <a:ext cx="3657600" cy="274320"/>
           </a:xfrm>
           <a:prstGeom prst="rect">
@@ -7251,306 +7182,30 @@
           </a:bodyPr>
           <a:lstStyle/>
           <a:p>
-            <a:pPr algn="l">
-              <a:defRPr sz="1300" b="1">
-                <a:solidFill>
-                  <a:srgbClr val="E89B3B"/>
+            <a:pPr algn="ctr">
+              <a:defRPr sz="1100" b="0">
+                <a:solidFill>
+                  <a:srgbClr val="0D2B3E"/>
                 </a:solidFill>
                 <a:latin typeface="Calibri"/>
               </a:defRPr>
             </a:pPr>
             <a:r>
-              <a:t>救急</a:t>
-            </a:r>
-          </a:p>
-        </p:txBody>
-      </p:sp>
-      <p:graphicFrame>
-        <p:nvGraphicFramePr>
-          <p:cNvPr id="5" name="Table 4"/>
-          <p:cNvGraphicFramePr>
-            <a:graphicFrameLocks noGrp="1"/>
-          </p:cNvGraphicFramePr>
-          <p:nvPr/>
-        </p:nvGraphicFramePr>
-        <p:xfrm>
-          <a:off x="274320" y="868680"/>
-          <a:ext cx="4114800" cy="1508760"/>
-        </p:xfrm>
-        <a:graphic>
-          <a:graphicData uri="http://schemas.openxmlformats.org/drawingml/2006/table">
-            <a:tbl>
-              <a:tblPr firstRow="1" bandRow="1">
-                <a:tableStyleId>{5C22544A-7EE6-4342-B048-85BDC9FD1C3A}</a:tableStyleId>
-              </a:tblPr>
-              <a:tblGrid>
-                <a:gridCol w="1828800"/>
-                <a:gridCol w="2286000"/>
-              </a:tblGrid>
-              <a:tr h="301752">
-                <a:tc>
-                  <a:txBody>
-                    <a:bodyPr/>
-                    <a:lstStyle/>
-                    <a:p>
-                      <a:pPr>
-                        <a:defRPr sz="900" b="1">
-                          <a:solidFill>
-                            <a:srgbClr val="F5F0E8"/>
-                          </a:solidFill>
-                          <a:latin typeface="Calibri"/>
-                        </a:defRPr>
-                      </a:pPr>
-                      <a:r>
-                        <a:t>項目</a:t>
-                      </a:r>
-                    </a:p>
-                  </a:txBody>
-                  <a:tcPr marL="45720" marR="45720" marT="18288" marB="18288">
-                    <a:solidFill>
-                      <a:srgbClr val="0D2B3E"/>
-                    </a:solidFill>
-                  </a:tcPr>
-                </a:tc>
-                <a:tc>
-                  <a:txBody>
-                    <a:bodyPr/>
-                    <a:lstStyle/>
-                    <a:p>
-                      <a:pPr>
-                        <a:defRPr sz="900" b="1">
-                          <a:solidFill>
-                            <a:srgbClr val="F5F0E8"/>
-                          </a:solidFill>
-                          <a:latin typeface="Calibri"/>
-                        </a:defRPr>
-                      </a:pPr>
-                      <a:r>
-                        <a:t>変更内容</a:t>
-                      </a:r>
-                    </a:p>
-                  </a:txBody>
-                  <a:tcPr marL="45720" marR="45720" marT="18288" marB="18288">
-                    <a:solidFill>
-                      <a:srgbClr val="0D2B3E"/>
-                    </a:solidFill>
-                  </a:tcPr>
-                </a:tc>
-              </a:tr>
-              <a:tr h="301752">
-                <a:tc>
-                  <a:txBody>
-                    <a:bodyPr/>
-                    <a:lstStyle/>
-                    <a:p>
-                      <a:pPr>
-                        <a:defRPr sz="900">
-                          <a:solidFill>
-                            <a:srgbClr val="1A1A2E"/>
-                          </a:solidFill>
-                          <a:latin typeface="Calibri"/>
-                        </a:defRPr>
-                      </a:pPr>
-                      <a:r>
-                        <a:t>院内トリアージ</a:t>
-                      </a:r>
-                    </a:p>
-                  </a:txBody>
-                  <a:tcPr marL="45720" marR="45720" marT="18288" marB="18288">
-                    <a:solidFill>
-                      <a:srgbClr val="E8F0F0"/>
-                    </a:solidFill>
-                  </a:tcPr>
-                </a:tc>
-                <a:tc>
-                  <a:txBody>
-                    <a:bodyPr/>
-                    <a:lstStyle/>
-                    <a:p>
-                      <a:pPr>
-                        <a:defRPr sz="900">
-                          <a:solidFill>
-                            <a:srgbClr val="1A1A2E"/>
-                          </a:solidFill>
-                          <a:latin typeface="Calibri"/>
-                        </a:defRPr>
-                      </a:pPr>
-                      <a:r>
-                        <a:t>廃止→体制加算に再編</a:t>
-                      </a:r>
-                    </a:p>
-                  </a:txBody>
-                  <a:tcPr marL="45720" marR="45720" marT="18288" marB="18288">
-                    <a:solidFill>
-                      <a:srgbClr val="E8F0F0"/>
-                    </a:solidFill>
-                  </a:tcPr>
-                </a:tc>
-              </a:tr>
-              <a:tr h="301752">
-                <a:tc>
-                  <a:txBody>
-                    <a:bodyPr/>
-                    <a:lstStyle/>
-                    <a:p>
-                      <a:pPr>
-                        <a:defRPr sz="900">
-                          <a:solidFill>
-                            <a:srgbClr val="1A1A2E"/>
-                          </a:solidFill>
-                          <a:latin typeface="Calibri"/>
-                        </a:defRPr>
-                      </a:pPr>
-                      <a:r>
-                        <a:t>ウォークイン患者</a:t>
-                      </a:r>
-                    </a:p>
-                  </a:txBody>
-                  <a:tcPr marL="45720" marR="45720" marT="18288" marB="18288">
-                    <a:solidFill>
-                      <a:srgbClr val="F5F0E8"/>
-                    </a:solidFill>
-                  </a:tcPr>
-                </a:tc>
-                <a:tc>
-                  <a:txBody>
-                    <a:bodyPr/>
-                    <a:lstStyle/>
-                    <a:p>
-                      <a:pPr>
-                        <a:defRPr sz="900">
-                          <a:solidFill>
-                            <a:srgbClr val="1A1A2E"/>
-                          </a:solidFill>
-                          <a:latin typeface="Calibri"/>
-                        </a:defRPr>
-                      </a:pPr>
-                      <a:r>
-                        <a:t>夜間休日にも加算可能に</a:t>
-                      </a:r>
-                    </a:p>
-                  </a:txBody>
-                  <a:tcPr marL="45720" marR="45720" marT="18288" marB="18288">
-                    <a:solidFill>
-                      <a:srgbClr val="F5F0E8"/>
-                    </a:solidFill>
-                  </a:tcPr>
-                </a:tc>
-              </a:tr>
-              <a:tr h="301752">
-                <a:tc>
-                  <a:txBody>
-                    <a:bodyPr/>
-                    <a:lstStyle/>
-                    <a:p>
-                      <a:pPr>
-                        <a:defRPr sz="900">
-                          <a:solidFill>
-                            <a:srgbClr val="1A1A2E"/>
-                          </a:solidFill>
-                          <a:latin typeface="Calibri"/>
-                        </a:defRPr>
-                      </a:pPr>
-                      <a:r>
-                        <a:t>時間外救急搬送加算</a:t>
-                      </a:r>
-                    </a:p>
-                  </a:txBody>
-                  <a:tcPr marL="45720" marR="45720" marT="18288" marB="18288">
-                    <a:solidFill>
-                      <a:srgbClr val="E8F0F0"/>
-                    </a:solidFill>
-                  </a:tcPr>
-                </a:tc>
-                <a:tc>
-                  <a:txBody>
-                    <a:bodyPr/>
-                    <a:lstStyle/>
-                    <a:p>
-                      <a:pPr>
-                        <a:defRPr sz="900">
-                          <a:solidFill>
-                            <a:srgbClr val="1A1A2E"/>
-                          </a:solidFill>
-                          <a:latin typeface="Calibri"/>
-                        </a:defRPr>
-                      </a:pPr>
-                      <a:r>
-                        <a:t>休日夜間300/平日夜間250/休日日中200点</a:t>
-                      </a:r>
-                    </a:p>
-                  </a:txBody>
-                  <a:tcPr marL="45720" marR="45720" marT="18288" marB="18288">
-                    <a:solidFill>
-                      <a:srgbClr val="E8F0F0"/>
-                    </a:solidFill>
-                  </a:tcPr>
-                </a:tc>
-              </a:tr>
-              <a:tr h="301752">
-                <a:tc>
-                  <a:txBody>
-                    <a:bodyPr/>
-                    <a:lstStyle/>
-                    <a:p>
-                      <a:pPr>
-                        <a:defRPr sz="900">
-                          <a:solidFill>
-                            <a:srgbClr val="1A1A2E"/>
-                          </a:solidFill>
-                          <a:latin typeface="Calibri"/>
-                        </a:defRPr>
-                      </a:pPr>
-                      <a:r>
-                        <a:t>救急患者連携搬送料</a:t>
-                      </a:r>
-                    </a:p>
-                  </a:txBody>
-                  <a:tcPr marL="45720" marR="45720" marT="18288" marB="18288">
-                    <a:solidFill>
-                      <a:srgbClr val="F5F0E8"/>
-                    </a:solidFill>
-                  </a:tcPr>
-                </a:tc>
-                <a:tc>
-                  <a:txBody>
-                    <a:bodyPr/>
-                    <a:lstStyle/>
-                    <a:p>
-                      <a:pPr>
-                        <a:defRPr sz="900">
-                          <a:solidFill>
-                            <a:srgbClr val="1A1A2E"/>
-                          </a:solidFill>
-                          <a:latin typeface="Calibri"/>
-                        </a:defRPr>
-                      </a:pPr>
-                      <a:r>
-                        <a:t>+600点の引き上げ</a:t>
-                      </a:r>
-                    </a:p>
-                  </a:txBody>
-                  <a:tcPr marL="45720" marR="45720" marT="18288" marB="18288">
-                    <a:solidFill>
-                      <a:srgbClr val="F5F0E8"/>
-                    </a:solidFill>
-                  </a:tcPr>
-                </a:tc>
-              </a:tr>
-            </a:tbl>
-          </a:graphicData>
-        </a:graphic>
-      </p:graphicFrame>
-      <p:sp>
-        <p:nvSpPr>
-          <p:cNvPr id="6" name="TextBox 5"/>
+              <a:t>期限</a:t>
+            </a:r>
+          </a:p>
+        </p:txBody>
+      </p:sp>
+      <p:sp>
+        <p:nvSpPr>
+          <p:cNvPr id="7" name="TextBox 6"/>
           <p:cNvSpPr txBox="1"/>
           <p:nvPr/>
         </p:nvSpPr>
         <p:spPr>
           <a:xfrm>
-            <a:off x="4754880" y="640080"/>
-            <a:ext cx="4114800" cy="274320"/>
+            <a:off x="5029200" y="1965960"/>
+            <a:ext cx="3657600" cy="731520"/>
           </a:xfrm>
           <a:prstGeom prst="rect">
             <a:avLst/>
@@ -7563,296 +7218,244 @@
           </a:bodyPr>
           <a:lstStyle/>
           <a:p>
+            <a:pPr algn="ctr">
+              <a:defRPr sz="2800" b="1">
+                <a:solidFill>
+                  <a:srgbClr val="0D2B3E"/>
+                </a:solidFill>
+                <a:latin typeface="Calibri"/>
+              </a:defRPr>
+            </a:pPr>
+            <a:r>
+              <a:t>2027年5月末</a:t>
+            </a:r>
+          </a:p>
+        </p:txBody>
+      </p:sp>
+      <p:sp>
+        <p:nvSpPr>
+          <p:cNvPr id="8" name="TextBox 7"/>
+          <p:cNvSpPr txBox="1"/>
+          <p:nvPr/>
+        </p:nvSpPr>
+        <p:spPr>
+          <a:xfrm>
+            <a:off x="5029200" y="2651760"/>
+            <a:ext cx="3657600" cy="274320"/>
+          </a:xfrm>
+          <a:prstGeom prst="rect">
+            <a:avLst/>
+          </a:prstGeom>
+          <a:noFill/>
+        </p:spPr>
+        <p:txBody>
+          <a:bodyPr wrap="square" lIns="45720" rIns="45720" tIns="27432" bIns="27432">
+            <a:spAutoFit/>
+          </a:bodyPr>
+          <a:lstStyle/>
+          <a:p>
+            <a:pPr algn="ctr">
+              <a:defRPr sz="1100" b="0">
+                <a:solidFill>
+                  <a:srgbClr val="0D2B3E"/>
+                </a:solidFill>
+                <a:latin typeface="Calibri"/>
+              </a:defRPr>
+            </a:pPr>
+            <a:r>
+              <a:t>（経過措置期限）</a:t>
+            </a:r>
+          </a:p>
+        </p:txBody>
+      </p:sp>
+      <p:sp>
+        <p:nvSpPr>
+          <p:cNvPr id="9" name="TextBox 8"/>
+          <p:cNvSpPr txBox="1"/>
+          <p:nvPr/>
+        </p:nvSpPr>
+        <p:spPr>
+          <a:xfrm>
+            <a:off x="457200" y="1645920"/>
+            <a:ext cx="4114800" cy="274320"/>
+          </a:xfrm>
+          <a:prstGeom prst="rect">
+            <a:avLst/>
+          </a:prstGeom>
+          <a:noFill/>
+        </p:spPr>
+        <p:txBody>
+          <a:bodyPr wrap="square" lIns="45720" rIns="45720" tIns="27432" bIns="27432">
+            <a:spAutoFit/>
+          </a:bodyPr>
+          <a:lstStyle/>
+          <a:p>
             <a:pPr algn="l">
-              <a:defRPr sz="1300" b="1">
-                <a:solidFill>
-                  <a:srgbClr val="E89B3B"/>
+              <a:defRPr sz="1400" b="1">
+                <a:solidFill>
+                  <a:srgbClr val="F5F0E8"/>
                 </a:solidFill>
                 <a:latin typeface="Calibri"/>
               </a:defRPr>
             </a:pPr>
             <a:r>
-              <a:t>診療所 ⇄ 病院連携</a:t>
-            </a:r>
-          </a:p>
-        </p:txBody>
-      </p:sp>
-      <p:graphicFrame>
-        <p:nvGraphicFramePr>
-          <p:cNvPr id="7" name="Table 6"/>
-          <p:cNvGraphicFramePr>
-            <a:graphicFrameLocks noGrp="1"/>
-          </p:cNvGraphicFramePr>
-          <p:nvPr/>
-        </p:nvGraphicFramePr>
-        <p:xfrm>
-          <a:off x="4572000" y="868680"/>
-          <a:ext cx="4297680" cy="1508760"/>
-        </p:xfrm>
-        <a:graphic>
-          <a:graphicData uri="http://schemas.openxmlformats.org/drawingml/2006/table">
-            <a:tbl>
-              <a:tblPr firstRow="1" bandRow="1">
-                <a:tableStyleId>{5C22544A-7EE6-4342-B048-85BDC9FD1C3A}</a:tableStyleId>
-              </a:tblPr>
-              <a:tblGrid>
-                <a:gridCol w="1828800"/>
-                <a:gridCol w="2468880"/>
-              </a:tblGrid>
-              <a:tr h="301752">
-                <a:tc>
-                  <a:txBody>
-                    <a:bodyPr/>
-                    <a:lstStyle/>
-                    <a:p>
-                      <a:pPr>
-                        <a:defRPr sz="900" b="1">
-                          <a:solidFill>
-                            <a:srgbClr val="F5F0E8"/>
-                          </a:solidFill>
-                          <a:latin typeface="Calibri"/>
-                        </a:defRPr>
-                      </a:pPr>
-                      <a:r>
-                        <a:t>項目</a:t>
-                      </a:r>
-                    </a:p>
-                  </a:txBody>
-                  <a:tcPr marL="45720" marR="45720" marT="18288" marB="18288">
-                    <a:solidFill>
-                      <a:srgbClr val="0D2B3E"/>
-                    </a:solidFill>
-                  </a:tcPr>
-                </a:tc>
-                <a:tc>
-                  <a:txBody>
-                    <a:bodyPr/>
-                    <a:lstStyle/>
-                    <a:p>
-                      <a:pPr>
-                        <a:defRPr sz="900" b="1">
-                          <a:solidFill>
-                            <a:srgbClr val="F5F0E8"/>
-                          </a:solidFill>
-                          <a:latin typeface="Calibri"/>
-                        </a:defRPr>
-                      </a:pPr>
-                      <a:r>
-                        <a:t>変更内容</a:t>
-                      </a:r>
-                    </a:p>
-                  </a:txBody>
-                  <a:tcPr marL="45720" marR="45720" marT="18288" marB="18288">
-                    <a:solidFill>
-                      <a:srgbClr val="0D2B3E"/>
-                    </a:solidFill>
-                  </a:tcPr>
-                </a:tc>
-              </a:tr>
-              <a:tr h="301752">
-                <a:tc>
-                  <a:txBody>
-                    <a:bodyPr/>
-                    <a:lstStyle/>
-                    <a:p>
-                      <a:pPr>
-                        <a:defRPr sz="900">
-                          <a:solidFill>
-                            <a:srgbClr val="1A1A2E"/>
-                          </a:solidFill>
-                          <a:latin typeface="Calibri"/>
-                        </a:defRPr>
-                      </a:pPr>
-                      <a:r>
-                        <a:t>紹介患者受入加算</a:t>
-                      </a:r>
-                    </a:p>
-                  </a:txBody>
-                  <a:tcPr marL="45720" marR="45720" marT="18288" marB="18288">
-                    <a:solidFill>
-                      <a:srgbClr val="E8F0F0"/>
-                    </a:solidFill>
-                  </a:tcPr>
-                </a:tc>
-                <a:tc>
-                  <a:txBody>
-                    <a:bodyPr/>
-                    <a:lstStyle/>
-                    <a:p>
-                      <a:pPr>
-                        <a:defRPr sz="900">
-                          <a:solidFill>
-                            <a:srgbClr val="1A1A2E"/>
-                          </a:solidFill>
-                          <a:latin typeface="Calibri"/>
-                        </a:defRPr>
-                      </a:pPr>
-                      <a:r>
-                        <a:t>60点（新設）</a:t>
-                      </a:r>
-                    </a:p>
-                  </a:txBody>
-                  <a:tcPr marL="45720" marR="45720" marT="18288" marB="18288">
-                    <a:solidFill>
-                      <a:srgbClr val="E8F0F0"/>
-                    </a:solidFill>
-                  </a:tcPr>
-                </a:tc>
-              </a:tr>
-              <a:tr h="301752">
-                <a:tc>
-                  <a:txBody>
-                    <a:bodyPr/>
-                    <a:lstStyle/>
-                    <a:p>
-                      <a:pPr>
-                        <a:defRPr sz="900">
-                          <a:solidFill>
-                            <a:srgbClr val="1A1A2E"/>
-                          </a:solidFill>
-                          <a:latin typeface="Calibri"/>
-                        </a:defRPr>
-                      </a:pPr>
-                      <a:r>
-                        <a:t>救急患者連携搬送料</a:t>
-                      </a:r>
-                    </a:p>
-                  </a:txBody>
-                  <a:tcPr marL="45720" marR="45720" marT="18288" marB="18288">
-                    <a:solidFill>
-                      <a:srgbClr val="F5F0E8"/>
-                    </a:solidFill>
-                  </a:tcPr>
-                </a:tc>
-                <a:tc>
-                  <a:txBody>
-                    <a:bodyPr/>
-                    <a:lstStyle/>
-                    <a:p>
-                      <a:pPr>
-                        <a:defRPr sz="900">
-                          <a:solidFill>
-                            <a:srgbClr val="1A1A2E"/>
-                          </a:solidFill>
-                          <a:latin typeface="Calibri"/>
-                        </a:defRPr>
-                      </a:pPr>
-                      <a:r>
-                        <a:t>高次→地域の転院搬送を評価</a:t>
-                      </a:r>
-                    </a:p>
-                  </a:txBody>
-                  <a:tcPr marL="45720" marR="45720" marT="18288" marB="18288">
-                    <a:solidFill>
-                      <a:srgbClr val="F5F0E8"/>
-                    </a:solidFill>
-                  </a:tcPr>
-                </a:tc>
-              </a:tr>
-              <a:tr h="301752">
-                <a:tc>
-                  <a:txBody>
-                    <a:bodyPr/>
-                    <a:lstStyle/>
-                    <a:p>
-                      <a:pPr>
-                        <a:defRPr sz="900">
-                          <a:solidFill>
-                            <a:srgbClr val="1A1A2E"/>
-                          </a:solidFill>
-                          <a:latin typeface="Calibri"/>
-                        </a:defRPr>
-                      </a:pPr>
-                      <a:r>
-                        <a:t>電子的診療情報連携</a:t>
-                      </a:r>
-                    </a:p>
-                  </a:txBody>
-                  <a:tcPr marL="45720" marR="45720" marT="18288" marB="18288">
-                    <a:solidFill>
-                      <a:srgbClr val="E8F0F0"/>
-                    </a:solidFill>
-                  </a:tcPr>
-                </a:tc>
-                <a:tc>
-                  <a:txBody>
-                    <a:bodyPr/>
-                    <a:lstStyle/>
-                    <a:p>
-                      <a:pPr>
-                        <a:defRPr sz="900">
-                          <a:solidFill>
-                            <a:srgbClr val="1A1A2E"/>
-                          </a:solidFill>
-                          <a:latin typeface="Calibri"/>
-                        </a:defRPr>
-                      </a:pPr>
-                      <a:r>
-                        <a:t>電子カルテ情報共有サービス</a:t>
-                      </a:r>
-                    </a:p>
-                  </a:txBody>
-                  <a:tcPr marL="45720" marR="45720" marT="18288" marB="18288">
-                    <a:solidFill>
-                      <a:srgbClr val="E8F0F0"/>
-                    </a:solidFill>
-                  </a:tcPr>
-                </a:tc>
-              </a:tr>
-              <a:tr h="301752">
-                <a:tc>
-                  <a:txBody>
-                    <a:bodyPr/>
-                    <a:lstStyle/>
-                    <a:p>
-                      <a:pPr>
-                        <a:defRPr sz="900">
-                          <a:solidFill>
-                            <a:srgbClr val="1A1A2E"/>
-                          </a:solidFill>
-                          <a:latin typeface="Calibri"/>
-                        </a:defRPr>
-                      </a:pPr>
-                      <a:r>
-                        <a:t>眼科・歯科連携加算</a:t>
-                      </a:r>
-                    </a:p>
-                  </a:txBody>
-                  <a:tcPr marL="45720" marR="45720" marT="18288" marB="18288">
-                    <a:solidFill>
-                      <a:srgbClr val="F5F0E8"/>
-                    </a:solidFill>
-                  </a:tcPr>
-                </a:tc>
-                <a:tc>
-                  <a:txBody>
-                    <a:bodyPr/>
-                    <a:lstStyle/>
-                    <a:p>
-                      <a:pPr>
-                        <a:defRPr sz="900">
-                          <a:solidFill>
-                            <a:srgbClr val="1A1A2E"/>
-                          </a:solidFill>
-                          <a:latin typeface="Calibri"/>
-                        </a:defRPr>
-                      </a:pPr>
-                      <a:r>
-                        <a:t>新設（多職種連携）</a:t>
-                      </a:r>
-                    </a:p>
-                  </a:txBody>
-                  <a:tcPr marL="45720" marR="45720" marT="18288" marB="18288">
-                    <a:solidFill>
-                      <a:srgbClr val="F5F0E8"/>
-                    </a:solidFill>
-                  </a:tcPr>
-                </a:tc>
-              </a:tr>
-            </a:tbl>
-          </a:graphicData>
-        </a:graphic>
-      </p:graphicFrame>
+              <a:t>対象となる施設基準</a:t>
+            </a:r>
+          </a:p>
+        </p:txBody>
+      </p:sp>
+      <p:sp>
+        <p:nvSpPr>
+          <p:cNvPr id="10" name="TextBox 9"/>
+          <p:cNvSpPr txBox="1"/>
+          <p:nvPr/>
+        </p:nvSpPr>
+        <p:spPr>
+          <a:xfrm>
+            <a:off x="640080" y="2011680"/>
+            <a:ext cx="4114800" cy="1097280"/>
+          </a:xfrm>
+          <a:prstGeom prst="rect">
+            <a:avLst/>
+          </a:prstGeom>
+          <a:noFill/>
+        </p:spPr>
+        <p:txBody>
+          <a:bodyPr wrap="square" lIns="45720" rIns="45720" tIns="27432" bIns="27432">
+            <a:spAutoFit/>
+          </a:bodyPr>
+          <a:lstStyle/>
+          <a:p>
+            <a:pPr>
+              <a:defRPr sz="1300">
+                <a:solidFill>
+                  <a:srgbClr val="F5F0E8"/>
+                </a:solidFill>
+                <a:latin typeface="Calibri"/>
+              </a:defRPr>
+              <a:buChar char="●"/>
+            </a:pPr>
+            <a:r>
+              <a:t>機能強化加算（80点）</a:t>
+            </a:r>
+          </a:p>
+          <a:p>
+            <a:pPr>
+              <a:defRPr sz="1300">
+                <a:solidFill>
+                  <a:srgbClr val="F5F0E8"/>
+                </a:solidFill>
+                <a:latin typeface="Calibri"/>
+              </a:defRPr>
+              <a:buChar char="●"/>
+            </a:pPr>
+            <a:r>
+              <a:t>在宅療養支援診療所（在支診）</a:t>
+            </a:r>
+          </a:p>
+          <a:p>
+            <a:pPr>
+              <a:defRPr sz="1300">
+                <a:solidFill>
+                  <a:srgbClr val="F5F0E8"/>
+                </a:solidFill>
+                <a:latin typeface="Calibri"/>
+              </a:defRPr>
+              <a:buChar char="●"/>
+            </a:pPr>
+            <a:r>
+              <a:t>在宅療養支援病院（在支病）</a:t>
+            </a:r>
+          </a:p>
+        </p:txBody>
+      </p:sp>
+      <p:sp>
+        <p:nvSpPr>
+          <p:cNvPr id="11" name="TextBox 10"/>
+          <p:cNvSpPr txBox="1"/>
+          <p:nvPr/>
+        </p:nvSpPr>
+        <p:spPr>
+          <a:xfrm>
+            <a:off x="457200" y="3291840"/>
+            <a:ext cx="4114800" cy="274320"/>
+          </a:xfrm>
+          <a:prstGeom prst="rect">
+            <a:avLst/>
+          </a:prstGeom>
+          <a:noFill/>
+        </p:spPr>
+        <p:txBody>
+          <a:bodyPr wrap="square" lIns="45720" rIns="45720" tIns="27432" bIns="27432">
+            <a:spAutoFit/>
+          </a:bodyPr>
+          <a:lstStyle/>
+          <a:p>
+            <a:pPr algn="l">
+              <a:defRPr sz="1400" b="1">
+                <a:solidFill>
+                  <a:srgbClr val="F5F0E8"/>
+                </a:solidFill>
+                <a:latin typeface="Calibri"/>
+              </a:defRPr>
+            </a:pPr>
+            <a:r>
+              <a:t>策定すべき内容</a:t>
+            </a:r>
+          </a:p>
+        </p:txBody>
+      </p:sp>
+      <p:sp>
+        <p:nvSpPr>
+          <p:cNvPr id="12" name="TextBox 11"/>
+          <p:cNvSpPr txBox="1"/>
+          <p:nvPr/>
+        </p:nvSpPr>
+        <p:spPr>
+          <a:xfrm>
+            <a:off x="640080" y="3657600"/>
+            <a:ext cx="4114800" cy="731520"/>
+          </a:xfrm>
+          <a:prstGeom prst="rect">
+            <a:avLst/>
+          </a:prstGeom>
+          <a:noFill/>
+        </p:spPr>
+        <p:txBody>
+          <a:bodyPr wrap="square" lIns="45720" rIns="45720" tIns="27432" bIns="27432">
+            <a:spAutoFit/>
+          </a:bodyPr>
+          <a:lstStyle/>
+          <a:p>
+            <a:pPr>
+              <a:defRPr sz="1300">
+                <a:solidFill>
+                  <a:srgbClr val="F5F0E8"/>
+                </a:solidFill>
+                <a:latin typeface="Calibri"/>
+              </a:defRPr>
+              <a:buChar char="●"/>
+            </a:pPr>
+            <a:r>
+              <a:t>自然災害への対応計画</a:t>
+            </a:r>
+          </a:p>
+          <a:p>
+            <a:pPr>
+              <a:defRPr sz="1300">
+                <a:solidFill>
+                  <a:srgbClr val="F5F0E8"/>
+                </a:solidFill>
+                <a:latin typeface="Calibri"/>
+              </a:defRPr>
+              <a:buChar char="●"/>
+            </a:pPr>
+            <a:r>
+              <a:t>サイバーセキュリティ対策</a:t>
+            </a:r>
+          </a:p>
+        </p:txBody>
+      </p:sp>
     </p:spTree>
   </p:cSld>
   <p:clrMapOvr>
@@ -7902,7 +7505,7 @@
           <a:lstStyle/>
           <a:p>
             <a:pPr algn="l">
-              <a:defRPr sz="2200" b="1">
+              <a:defRPr sz="2400" b="1">
                 <a:solidFill>
                   <a:srgbClr val="F5F0E8"/>
                 </a:solidFill>
@@ -7910,7 +7513,7 @@
               </a:defRPr>
             </a:pPr>
             <a:r>
-              <a:t>医療DXとBCP — 2つの必須対応</a:t>
+              <a:t>ケースディスカッション</a:t>
             </a:r>
           </a:p>
         </p:txBody>
@@ -7923,8 +7526,8 @@
         </p:nvSpPr>
         <p:spPr>
           <a:xfrm>
-            <a:off x="457200" y="640080"/>
-            <a:ext cx="2743200" cy="54864"/>
+            <a:off x="457200" y="685800"/>
+            <a:ext cx="2286000" cy="54864"/>
           </a:xfrm>
           <a:prstGeom prst="rect">
             <a:avLst/>
@@ -7960,14 +7563,102 @@
       </p:sp>
       <p:sp>
         <p:nvSpPr>
-          <p:cNvPr id="4" name="TextBox 3"/>
+          <p:cNvPr id="4" name="Rectangle 3"/>
+          <p:cNvSpPr/>
+          <p:nvPr/>
+        </p:nvSpPr>
+        <p:spPr>
+          <a:xfrm>
+            <a:off x="457200" y="1005840"/>
+            <a:ext cx="54864" cy="914400"/>
+          </a:xfrm>
+          <a:prstGeom prst="rect">
+            <a:avLst/>
+          </a:prstGeom>
+          <a:solidFill>
+            <a:srgbClr val="E89B3B"/>
+          </a:solidFill>
+          <a:ln>
+            <a:noFill/>
+          </a:ln>
+        </p:spPr>
+        <p:style>
+          <a:lnRef idx="1">
+            <a:schemeClr val="accent1"/>
+          </a:lnRef>
+          <a:fillRef idx="3">
+            <a:schemeClr val="accent1"/>
+          </a:fillRef>
+          <a:effectRef idx="2">
+            <a:schemeClr val="accent1"/>
+          </a:effectRef>
+          <a:fontRef idx="minor">
+            <a:schemeClr val="lt1"/>
+          </a:fontRef>
+        </p:style>
+        <p:txBody>
+          <a:bodyPr rtlCol="0" anchor="ctr"/>
+          <a:lstStyle/>
+          <a:p>
+            <a:pPr algn="ctr"/>
+          </a:p>
+        </p:txBody>
+      </p:sp>
+      <p:sp>
+        <p:nvSpPr>
+          <p:cNvPr id="5" name="Rectangle 4"/>
+          <p:cNvSpPr/>
+          <p:nvPr/>
+        </p:nvSpPr>
+        <p:spPr>
+          <a:xfrm>
+            <a:off x="566928" y="1005840"/>
+            <a:ext cx="8119872" cy="914400"/>
+          </a:xfrm>
+          <a:prstGeom prst="rect">
+            <a:avLst/>
+          </a:prstGeom>
+          <a:solidFill>
+            <a:srgbClr val="FFFFFF"/>
+          </a:solidFill>
+          <a:ln w="12700">
+            <a:solidFill>
+              <a:srgbClr val="4EB8A9"/>
+            </a:solidFill>
+          </a:ln>
+        </p:spPr>
+        <p:style>
+          <a:lnRef idx="1">
+            <a:schemeClr val="accent1"/>
+          </a:lnRef>
+          <a:fillRef idx="3">
+            <a:schemeClr val="accent1"/>
+          </a:fillRef>
+          <a:effectRef idx="2">
+            <a:schemeClr val="accent1"/>
+          </a:effectRef>
+          <a:fontRef idx="minor">
+            <a:schemeClr val="lt1"/>
+          </a:fontRef>
+        </p:style>
+        <p:txBody>
+          <a:bodyPr rtlCol="0" anchor="ctr"/>
+          <a:lstStyle/>
+          <a:p>
+            <a:pPr algn="ctr"/>
+          </a:p>
+        </p:txBody>
+      </p:sp>
+      <p:sp>
+        <p:nvSpPr>
+          <p:cNvPr id="6" name="TextBox 5"/>
           <p:cNvSpPr txBox="1"/>
           <p:nvPr/>
         </p:nvSpPr>
         <p:spPr>
           <a:xfrm>
-            <a:off x="457200" y="822960"/>
-            <a:ext cx="4114800" cy="274320"/>
+            <a:off x="685800" y="1078992"/>
+            <a:ext cx="7863840" cy="768096"/>
           </a:xfrm>
           <a:prstGeom prst="rect">
             <a:avLst/>
@@ -7981,352 +7672,78 @@
           <a:lstStyle/>
           <a:p>
             <a:pPr algn="l">
-              <a:defRPr sz="1400" b="1">
-                <a:solidFill>
-                  <a:srgbClr val="E89B3B"/>
-                </a:solidFill>
-                <a:latin typeface="Calibri"/>
-              </a:defRPr>
-            </a:pPr>
-            <a:r>
-              <a:t>医療DXの再編</a:t>
-            </a:r>
-          </a:p>
-        </p:txBody>
-      </p:sp>
-      <p:graphicFrame>
-        <p:nvGraphicFramePr>
-          <p:cNvPr id="5" name="Table 4"/>
-          <p:cNvGraphicFramePr>
-            <a:graphicFrameLocks noGrp="1"/>
-          </p:cNvGraphicFramePr>
-          <p:nvPr/>
-        </p:nvGraphicFramePr>
-        <p:xfrm>
-          <a:off x="274320" y="1097280"/>
-          <a:ext cx="4297680" cy="1280160"/>
-        </p:xfrm>
-        <a:graphic>
-          <a:graphicData uri="http://schemas.openxmlformats.org/drawingml/2006/table">
-            <a:tbl>
-              <a:tblPr firstRow="1" bandRow="1">
-                <a:tableStyleId>{5C22544A-7EE6-4342-B048-85BDC9FD1C3A}</a:tableStyleId>
-              </a:tblPr>
-              <a:tblGrid>
-                <a:gridCol w="731520"/>
-                <a:gridCol w="914400"/>
-                <a:gridCol w="2651760"/>
-              </a:tblGrid>
-              <a:tr h="320040">
-                <a:tc>
-                  <a:txBody>
-                    <a:bodyPr/>
-                    <a:lstStyle/>
-                    <a:p>
-                      <a:pPr>
-                        <a:defRPr sz="900" b="1">
-                          <a:solidFill>
-                            <a:srgbClr val="F5F0E8"/>
-                          </a:solidFill>
-                          <a:latin typeface="Calibri"/>
-                        </a:defRPr>
-                      </a:pPr>
-                      <a:r>
-                        <a:t>区分</a:t>
-                      </a:r>
-                    </a:p>
-                  </a:txBody>
-                  <a:tcPr marL="45720" marR="45720" marT="18288" marB="18288">
-                    <a:solidFill>
-                      <a:srgbClr val="0D2B3E"/>
-                    </a:solidFill>
-                  </a:tcPr>
-                </a:tc>
-                <a:tc>
-                  <a:txBody>
-                    <a:bodyPr/>
-                    <a:lstStyle/>
-                    <a:p>
-                      <a:pPr>
-                        <a:defRPr sz="900" b="1">
-                          <a:solidFill>
-                            <a:srgbClr val="F5F0E8"/>
-                          </a:solidFill>
-                          <a:latin typeface="Calibri"/>
-                        </a:defRPr>
-                      </a:pPr>
-                      <a:r>
-                        <a:t>初診点数</a:t>
-                      </a:r>
-                    </a:p>
-                  </a:txBody>
-                  <a:tcPr marL="45720" marR="45720" marT="18288" marB="18288">
-                    <a:solidFill>
-                      <a:srgbClr val="0D2B3E"/>
-                    </a:solidFill>
-                  </a:tcPr>
-                </a:tc>
-                <a:tc>
-                  <a:txBody>
-                    <a:bodyPr/>
-                    <a:lstStyle/>
-                    <a:p>
-                      <a:pPr>
-                        <a:defRPr sz="900" b="1">
-                          <a:solidFill>
-                            <a:srgbClr val="F5F0E8"/>
-                          </a:solidFill>
-                          <a:latin typeface="Calibri"/>
-                        </a:defRPr>
-                      </a:pPr>
-                      <a:r>
-                        <a:t>主な要件</a:t>
-                      </a:r>
-                    </a:p>
-                  </a:txBody>
-                  <a:tcPr marL="45720" marR="45720" marT="18288" marB="18288">
-                    <a:solidFill>
-                      <a:srgbClr val="0D2B3E"/>
-                    </a:solidFill>
-                  </a:tcPr>
-                </a:tc>
-              </a:tr>
-              <a:tr h="320040">
-                <a:tc>
-                  <a:txBody>
-                    <a:bodyPr/>
-                    <a:lstStyle/>
-                    <a:p>
-                      <a:pPr>
-                        <a:defRPr sz="900">
-                          <a:solidFill>
-                            <a:srgbClr val="1A1A2E"/>
-                          </a:solidFill>
-                          <a:latin typeface="Calibri"/>
-                        </a:defRPr>
-                      </a:pPr>
-                      <a:r>
-                        <a:t>区分1</a:t>
-                      </a:r>
-                    </a:p>
-                  </a:txBody>
-                  <a:tcPr marL="45720" marR="45720" marT="18288" marB="18288">
-                    <a:solidFill>
-                      <a:srgbClr val="E8F0F0"/>
-                    </a:solidFill>
-                  </a:tcPr>
-                </a:tc>
-                <a:tc>
-                  <a:txBody>
-                    <a:bodyPr/>
-                    <a:lstStyle/>
-                    <a:p>
-                      <a:pPr>
-                        <a:defRPr sz="900">
-                          <a:solidFill>
-                            <a:srgbClr val="1A1A2E"/>
-                          </a:solidFill>
-                          <a:latin typeface="Calibri"/>
-                        </a:defRPr>
-                      </a:pPr>
-                      <a:r>
-                        <a:t>15点</a:t>
-                      </a:r>
-                    </a:p>
-                  </a:txBody>
-                  <a:tcPr marL="45720" marR="45720" marT="18288" marB="18288">
-                    <a:solidFill>
-                      <a:srgbClr val="E8F0F0"/>
-                    </a:solidFill>
-                  </a:tcPr>
-                </a:tc>
-                <a:tc>
-                  <a:txBody>
-                    <a:bodyPr/>
-                    <a:lstStyle/>
-                    <a:p>
-                      <a:pPr>
-                        <a:defRPr sz="900">
-                          <a:solidFill>
-                            <a:srgbClr val="1A1A2E"/>
-                          </a:solidFill>
-                          <a:latin typeface="Calibri"/>
-                        </a:defRPr>
-                      </a:pPr>
-                      <a:r>
-                        <a:t>電子処方箋実績+共有サービス+マイナ30%以上</a:t>
-                      </a:r>
-                    </a:p>
-                  </a:txBody>
-                  <a:tcPr marL="45720" marR="45720" marT="18288" marB="18288">
-                    <a:solidFill>
-                      <a:srgbClr val="E8F0F0"/>
-                    </a:solidFill>
-                  </a:tcPr>
-                </a:tc>
-              </a:tr>
-              <a:tr h="320040">
-                <a:tc>
-                  <a:txBody>
-                    <a:bodyPr/>
-                    <a:lstStyle/>
-                    <a:p>
-                      <a:pPr>
-                        <a:defRPr sz="900">
-                          <a:solidFill>
-                            <a:srgbClr val="1A1A2E"/>
-                          </a:solidFill>
-                          <a:latin typeface="Calibri"/>
-                        </a:defRPr>
-                      </a:pPr>
-                      <a:r>
-                        <a:t>区分2</a:t>
-                      </a:r>
-                    </a:p>
-                  </a:txBody>
-                  <a:tcPr marL="45720" marR="45720" marT="18288" marB="18288">
-                    <a:solidFill>
-                      <a:srgbClr val="F5F0E8"/>
-                    </a:solidFill>
-                  </a:tcPr>
-                </a:tc>
-                <a:tc>
-                  <a:txBody>
-                    <a:bodyPr/>
-                    <a:lstStyle/>
-                    <a:p>
-                      <a:pPr>
-                        <a:defRPr sz="900">
-                          <a:solidFill>
-                            <a:srgbClr val="1A1A2E"/>
-                          </a:solidFill>
-                          <a:latin typeface="Calibri"/>
-                        </a:defRPr>
-                      </a:pPr>
-                      <a:r>
-                        <a:t>9点</a:t>
-                      </a:r>
-                    </a:p>
-                  </a:txBody>
-                  <a:tcPr marL="45720" marR="45720" marT="18288" marB="18288">
-                    <a:solidFill>
-                      <a:srgbClr val="F5F0E8"/>
-                    </a:solidFill>
-                  </a:tcPr>
-                </a:tc>
-                <a:tc>
-                  <a:txBody>
-                    <a:bodyPr/>
-                    <a:lstStyle/>
-                    <a:p>
-                      <a:pPr>
-                        <a:defRPr sz="900">
-                          <a:solidFill>
-                            <a:srgbClr val="1A1A2E"/>
-                          </a:solidFill>
-                          <a:latin typeface="Calibri"/>
-                        </a:defRPr>
-                      </a:pPr>
-                      <a:r>
-                        <a:t>電子処方箋体制+DXシステム整備</a:t>
-                      </a:r>
-                    </a:p>
-                  </a:txBody>
-                  <a:tcPr marL="45720" marR="45720" marT="18288" marB="18288">
-                    <a:solidFill>
-                      <a:srgbClr val="F5F0E8"/>
-                    </a:solidFill>
-                  </a:tcPr>
-                </a:tc>
-              </a:tr>
-              <a:tr h="320040">
-                <a:tc>
-                  <a:txBody>
-                    <a:bodyPr/>
-                    <a:lstStyle/>
-                    <a:p>
-                      <a:pPr>
-                        <a:defRPr sz="900">
-                          <a:solidFill>
-                            <a:srgbClr val="1A1A2E"/>
-                          </a:solidFill>
-                          <a:latin typeface="Calibri"/>
-                        </a:defRPr>
-                      </a:pPr>
-                      <a:r>
-                        <a:t>区分3</a:t>
-                      </a:r>
-                    </a:p>
-                  </a:txBody>
-                  <a:tcPr marL="45720" marR="45720" marT="18288" marB="18288">
-                    <a:solidFill>
-                      <a:srgbClr val="E8F0F0"/>
-                    </a:solidFill>
-                  </a:tcPr>
-                </a:tc>
-                <a:tc>
-                  <a:txBody>
-                    <a:bodyPr/>
-                    <a:lstStyle/>
-                    <a:p>
-                      <a:pPr>
-                        <a:defRPr sz="900">
-                          <a:solidFill>
-                            <a:srgbClr val="1A1A2E"/>
-                          </a:solidFill>
-                          <a:latin typeface="Calibri"/>
-                        </a:defRPr>
-                      </a:pPr>
-                      <a:r>
-                        <a:t>4点</a:t>
-                      </a:r>
-                    </a:p>
-                  </a:txBody>
-                  <a:tcPr marL="45720" marR="45720" marT="18288" marB="18288">
-                    <a:solidFill>
-                      <a:srgbClr val="E8F0F0"/>
-                    </a:solidFill>
-                  </a:tcPr>
-                </a:tc>
-                <a:tc>
-                  <a:txBody>
-                    <a:bodyPr/>
-                    <a:lstStyle/>
-                    <a:p>
-                      <a:pPr>
-                        <a:defRPr sz="900">
-                          <a:solidFill>
-                            <a:srgbClr val="1A1A2E"/>
-                          </a:solidFill>
-                          <a:latin typeface="Calibri"/>
-                        </a:defRPr>
-                      </a:pPr>
-                      <a:r>
-                        <a:t>マイナ保険証利用体制+基本DX</a:t>
-                      </a:r>
-                    </a:p>
-                  </a:txBody>
-                  <a:tcPr marL="45720" marR="45720" marT="18288" marB="18288">
-                    <a:solidFill>
-                      <a:srgbClr val="E8F0F0"/>
-                    </a:solidFill>
-                  </a:tcPr>
-                </a:tc>
-              </a:tr>
-            </a:tbl>
-          </a:graphicData>
-        </a:graphic>
-      </p:graphicFrame>
-      <p:sp>
-        <p:nvSpPr>
-          <p:cNvPr id="6" name="TextBox 5"/>
+              <a:defRPr sz="1300" b="0">
+                <a:solidFill>
+                  <a:srgbClr val="1A1A2E"/>
+                </a:solidFill>
+                <a:latin typeface="Georgia"/>
+              </a:defRPr>
+            </a:pPr>
+            <a:r>
+              <a:t>あなたは地方の200床の病院で総合診療科の専攻医です。</a:t>
+            </a:r>
+            <a:br/>
+            <a:r>
+              <a:t>院長から「今回の改定で当院がとるべきアクションをまとめてほしい」と言われました。</a:t>
+            </a:r>
+          </a:p>
+        </p:txBody>
+      </p:sp>
+      <p:sp>
+        <p:nvSpPr>
+          <p:cNvPr id="7" name="Rectangle 6"/>
+          <p:cNvSpPr/>
+          <p:nvPr/>
+        </p:nvSpPr>
+        <p:spPr>
+          <a:xfrm>
+            <a:off x="731520" y="2194560"/>
+            <a:ext cx="7680960" cy="502920"/>
+          </a:xfrm>
+          <a:prstGeom prst="rect">
+            <a:avLst/>
+          </a:prstGeom>
+          <a:solidFill>
+            <a:srgbClr val="0D2B3E"/>
+          </a:solidFill>
+          <a:ln w="12700">
+            <a:solidFill>
+              <a:srgbClr val="E89B3B"/>
+            </a:solidFill>
+          </a:ln>
+        </p:spPr>
+        <p:style>
+          <a:lnRef idx="1">
+            <a:schemeClr val="accent1"/>
+          </a:lnRef>
+          <a:fillRef idx="3">
+            <a:schemeClr val="accent1"/>
+          </a:fillRef>
+          <a:effectRef idx="2">
+            <a:schemeClr val="accent1"/>
+          </a:effectRef>
+          <a:fontRef idx="minor">
+            <a:schemeClr val="lt1"/>
+          </a:fontRef>
+        </p:style>
+        <p:txBody>
+          <a:bodyPr rtlCol="0" anchor="ctr"/>
+          <a:lstStyle/>
+          <a:p>
+            <a:pPr algn="ctr"/>
+          </a:p>
+        </p:txBody>
+      </p:sp>
+      <p:sp>
+        <p:nvSpPr>
+          <p:cNvPr id="8" name="TextBox 7"/>
           <p:cNvSpPr txBox="1"/>
           <p:nvPr/>
         </p:nvSpPr>
         <p:spPr>
           <a:xfrm>
-            <a:off x="5029200" y="822960"/>
-            <a:ext cx="3657600" cy="274320"/>
+            <a:off x="914400" y="2240279"/>
+            <a:ext cx="1097280" cy="365760"/>
           </a:xfrm>
           <a:prstGeom prst="rect">
             <a:avLst/>
@@ -8348,21 +7765,21 @@
               </a:defRPr>
             </a:pPr>
             <a:r>
-              <a:t>BCP策定義務化</a:t>
-            </a:r>
-          </a:p>
-        </p:txBody>
-      </p:sp>
-      <p:sp>
-        <p:nvSpPr>
-          <p:cNvPr id="7" name="TextBox 6"/>
+              <a:t>問い1</a:t>
+            </a:r>
+          </a:p>
+        </p:txBody>
+      </p:sp>
+      <p:sp>
+        <p:nvSpPr>
+          <p:cNvPr id="9" name="TextBox 8"/>
           <p:cNvSpPr txBox="1"/>
           <p:nvPr/>
         </p:nvSpPr>
         <p:spPr>
           <a:xfrm>
-            <a:off x="5029200" y="1188720"/>
-            <a:ext cx="3840480" cy="2286000"/>
+            <a:off x="2103120" y="2240279"/>
+            <a:ext cx="6126480" cy="365760"/>
           </a:xfrm>
           <a:prstGeom prst="rect">
             <a:avLst/>
@@ -8375,59 +7792,286 @@
           </a:bodyPr>
           <a:lstStyle/>
           <a:p>
-            <a:pPr>
-              <a:defRPr sz="1200">
+            <a:pPr algn="l">
+              <a:defRPr sz="1400" b="0">
                 <a:solidFill>
                   <a:srgbClr val="F5F0E8"/>
                 </a:solidFill>
                 <a:latin typeface="Calibri"/>
               </a:defRPr>
-              <a:buChar char="●"/>
-            </a:pPr>
-            <a:r>
-              <a:t>機能強化加算の施設基準にBCP追加</a:t>
-            </a:r>
-          </a:p>
-          <a:p>
-            <a:pPr>
-              <a:defRPr sz="1200">
+            </a:pPr>
+            <a:r>
+              <a:t>外来：最優先で対応すべき改定項目は？</a:t>
+            </a:r>
+          </a:p>
+        </p:txBody>
+      </p:sp>
+      <p:sp>
+        <p:nvSpPr>
+          <p:cNvPr id="10" name="Rectangle 9"/>
+          <p:cNvSpPr/>
+          <p:nvPr/>
+        </p:nvSpPr>
+        <p:spPr>
+          <a:xfrm>
+            <a:off x="731520" y="2834639"/>
+            <a:ext cx="7680960" cy="502920"/>
+          </a:xfrm>
+          <a:prstGeom prst="rect">
+            <a:avLst/>
+          </a:prstGeom>
+          <a:solidFill>
+            <a:srgbClr val="0D2B3E"/>
+          </a:solidFill>
+          <a:ln w="12700">
+            <a:solidFill>
+              <a:srgbClr val="E89B3B"/>
+            </a:solidFill>
+          </a:ln>
+        </p:spPr>
+        <p:style>
+          <a:lnRef idx="1">
+            <a:schemeClr val="accent1"/>
+          </a:lnRef>
+          <a:fillRef idx="3">
+            <a:schemeClr val="accent1"/>
+          </a:fillRef>
+          <a:effectRef idx="2">
+            <a:schemeClr val="accent1"/>
+          </a:effectRef>
+          <a:fontRef idx="minor">
+            <a:schemeClr val="lt1"/>
+          </a:fontRef>
+        </p:style>
+        <p:txBody>
+          <a:bodyPr rtlCol="0" anchor="ctr"/>
+          <a:lstStyle/>
+          <a:p>
+            <a:pPr algn="ctr"/>
+          </a:p>
+        </p:txBody>
+      </p:sp>
+      <p:sp>
+        <p:nvSpPr>
+          <p:cNvPr id="11" name="TextBox 10"/>
+          <p:cNvSpPr txBox="1"/>
+          <p:nvPr/>
+        </p:nvSpPr>
+        <p:spPr>
+          <a:xfrm>
+            <a:off x="914400" y="2880359"/>
+            <a:ext cx="1097280" cy="365760"/>
+          </a:xfrm>
+          <a:prstGeom prst="rect">
+            <a:avLst/>
+          </a:prstGeom>
+          <a:noFill/>
+        </p:spPr>
+        <p:txBody>
+          <a:bodyPr wrap="square" lIns="45720" rIns="45720" tIns="27432" bIns="27432">
+            <a:spAutoFit/>
+          </a:bodyPr>
+          <a:lstStyle/>
+          <a:p>
+            <a:pPr algn="l">
+              <a:defRPr sz="1400" b="1">
+                <a:solidFill>
+                  <a:srgbClr val="E89B3B"/>
+                </a:solidFill>
+                <a:latin typeface="Calibri"/>
+              </a:defRPr>
+            </a:pPr>
+            <a:r>
+              <a:t>問い2</a:t>
+            </a:r>
+          </a:p>
+        </p:txBody>
+      </p:sp>
+      <p:sp>
+        <p:nvSpPr>
+          <p:cNvPr id="12" name="TextBox 11"/>
+          <p:cNvSpPr txBox="1"/>
+          <p:nvPr/>
+        </p:nvSpPr>
+        <p:spPr>
+          <a:xfrm>
+            <a:off x="2103120" y="2880359"/>
+            <a:ext cx="6126480" cy="365760"/>
+          </a:xfrm>
+          <a:prstGeom prst="rect">
+            <a:avLst/>
+          </a:prstGeom>
+          <a:noFill/>
+        </p:spPr>
+        <p:txBody>
+          <a:bodyPr wrap="square" lIns="45720" rIns="45720" tIns="27432" bIns="27432">
+            <a:spAutoFit/>
+          </a:bodyPr>
+          <a:lstStyle/>
+          <a:p>
+            <a:pPr algn="l">
+              <a:defRPr sz="1400" b="0">
                 <a:solidFill>
                   <a:srgbClr val="F5F0E8"/>
                 </a:solidFill>
                 <a:latin typeface="Calibri"/>
               </a:defRPr>
-              <a:buChar char="●"/>
-            </a:pPr>
-            <a:r>
-              <a:t>在支診・在支病の施設基準にも追加</a:t>
-            </a:r>
-          </a:p>
-          <a:p>
-            <a:pPr>
-              <a:defRPr sz="1200">
+            </a:pPr>
+            <a:r>
+              <a:t>入院：地域包括医療病棟のどの区分を目指す？</a:t>
+            </a:r>
+          </a:p>
+        </p:txBody>
+      </p:sp>
+      <p:sp>
+        <p:nvSpPr>
+          <p:cNvPr id="13" name="Rectangle 12"/>
+          <p:cNvSpPr/>
+          <p:nvPr/>
+        </p:nvSpPr>
+        <p:spPr>
+          <a:xfrm>
+            <a:off x="731520" y="3474720"/>
+            <a:ext cx="7680960" cy="502920"/>
+          </a:xfrm>
+          <a:prstGeom prst="rect">
+            <a:avLst/>
+          </a:prstGeom>
+          <a:solidFill>
+            <a:srgbClr val="0D2B3E"/>
+          </a:solidFill>
+          <a:ln w="12700">
+            <a:solidFill>
+              <a:srgbClr val="E89B3B"/>
+            </a:solidFill>
+          </a:ln>
+        </p:spPr>
+        <p:style>
+          <a:lnRef idx="1">
+            <a:schemeClr val="accent1"/>
+          </a:lnRef>
+          <a:fillRef idx="3">
+            <a:schemeClr val="accent1"/>
+          </a:fillRef>
+          <a:effectRef idx="2">
+            <a:schemeClr val="accent1"/>
+          </a:effectRef>
+          <a:fontRef idx="minor">
+            <a:schemeClr val="lt1"/>
+          </a:fontRef>
+        </p:style>
+        <p:txBody>
+          <a:bodyPr rtlCol="0" anchor="ctr"/>
+          <a:lstStyle/>
+          <a:p>
+            <a:pPr algn="ctr"/>
+          </a:p>
+        </p:txBody>
+      </p:sp>
+      <p:sp>
+        <p:nvSpPr>
+          <p:cNvPr id="14" name="TextBox 13"/>
+          <p:cNvSpPr txBox="1"/>
+          <p:nvPr/>
+        </p:nvSpPr>
+        <p:spPr>
+          <a:xfrm>
+            <a:off x="914400" y="3520439"/>
+            <a:ext cx="1097280" cy="365760"/>
+          </a:xfrm>
+          <a:prstGeom prst="rect">
+            <a:avLst/>
+          </a:prstGeom>
+          <a:noFill/>
+        </p:spPr>
+        <p:txBody>
+          <a:bodyPr wrap="square" lIns="45720" rIns="45720" tIns="27432" bIns="27432">
+            <a:spAutoFit/>
+          </a:bodyPr>
+          <a:lstStyle/>
+          <a:p>
+            <a:pPr algn="l">
+              <a:defRPr sz="1400" b="1">
+                <a:solidFill>
+                  <a:srgbClr val="E89B3B"/>
+                </a:solidFill>
+                <a:latin typeface="Calibri"/>
+              </a:defRPr>
+            </a:pPr>
+            <a:r>
+              <a:t>問い3</a:t>
+            </a:r>
+          </a:p>
+        </p:txBody>
+      </p:sp>
+      <p:sp>
+        <p:nvSpPr>
+          <p:cNvPr id="15" name="TextBox 14"/>
+          <p:cNvSpPr txBox="1"/>
+          <p:nvPr/>
+        </p:nvSpPr>
+        <p:spPr>
+          <a:xfrm>
+            <a:off x="2103120" y="3520439"/>
+            <a:ext cx="6126480" cy="365760"/>
+          </a:xfrm>
+          <a:prstGeom prst="rect">
+            <a:avLst/>
+          </a:prstGeom>
+          <a:noFill/>
+        </p:spPr>
+        <p:txBody>
+          <a:bodyPr wrap="square" lIns="45720" rIns="45720" tIns="27432" bIns="27432">
+            <a:spAutoFit/>
+          </a:bodyPr>
+          <a:lstStyle/>
+          <a:p>
+            <a:pPr algn="l">
+              <a:defRPr sz="1400" b="0">
                 <a:solidFill>
                   <a:srgbClr val="F5F0E8"/>
                 </a:solidFill>
                 <a:latin typeface="Calibri"/>
               </a:defRPr>
-              <a:buChar char="●"/>
-            </a:pPr>
-            <a:r>
-              <a:t>経過措置: 2027年5月31日まで</a:t>
-            </a:r>
-          </a:p>
-          <a:p>
-            <a:pPr>
-              <a:defRPr sz="1200">
-                <a:solidFill>
-                  <a:srgbClr val="F5F0E8"/>
+            </a:pPr>
+            <a:r>
+              <a:t>全体：DXとBCPの優先順位は？</a:t>
+            </a:r>
+          </a:p>
+        </p:txBody>
+      </p:sp>
+      <p:sp>
+        <p:nvSpPr>
+          <p:cNvPr id="16" name="TextBox 15"/>
+          <p:cNvSpPr txBox="1"/>
+          <p:nvPr/>
+        </p:nvSpPr>
+        <p:spPr>
+          <a:xfrm>
+            <a:off x="457200" y="4389120"/>
+            <a:ext cx="8229600" cy="365760"/>
+          </a:xfrm>
+          <a:prstGeom prst="rect">
+            <a:avLst/>
+          </a:prstGeom>
+          <a:noFill/>
+        </p:spPr>
+        <p:txBody>
+          <a:bodyPr wrap="square" lIns="45720" rIns="45720" tIns="27432" bIns="27432">
+            <a:spAutoFit/>
+          </a:bodyPr>
+          <a:lstStyle/>
+          <a:p>
+            <a:pPr algn="ctr">
+              <a:defRPr sz="1600" b="0">
+                <a:solidFill>
+                  <a:srgbClr val="7A8A9A"/>
                 </a:solidFill>
                 <a:latin typeface="Calibri"/>
               </a:defRPr>
-              <a:buChar char="●"/>
-            </a:pPr>
-            <a:r>
-              <a:t>災害対応 + サイバーセキュリティ対策</a:t>
+            </a:pPr>
+            <a:r>
+              <a:t>ペアワーク 3分 → 2-3ペアからシェア</a:t>
             </a:r>
           </a:p>
         </p:txBody>
@@ -8446,7 +8090,7 @@
     <p:bg>
       <p:bgPr>
         <a:solidFill>
-          <a:srgbClr val="0D2B3E"/>
+          <a:srgbClr val="F5F0E8"/>
         </a:solidFill>
         <a:effectLst/>
       </p:bgPr>
@@ -8483,13 +8127,13 @@
             <a:pPr algn="l">
               <a:defRPr sz="2400" b="1">
                 <a:solidFill>
-                  <a:srgbClr val="F5F0E8"/>
+                  <a:srgbClr val="1A1A2E"/>
                 </a:solidFill>
                 <a:latin typeface="Calibri"/>
               </a:defRPr>
             </a:pPr>
             <a:r>
-              <a:t>ケースディスカッション</a:t>
+              <a:t>持ち帰りの3アクション</a:t>
             </a:r>
           </a:p>
         </p:txBody>
@@ -8502,8 +8146,8 @@
         </p:nvSpPr>
         <p:spPr>
           <a:xfrm>
-            <a:off x="457200" y="685800"/>
-            <a:ext cx="2286000" cy="54864"/>
+            <a:off x="457200" y="658368"/>
+            <a:ext cx="1828800" cy="54864"/>
           </a:xfrm>
           <a:prstGeom prst="rect">
             <a:avLst/>
@@ -8545,8 +8189,8 @@
         </p:nvSpPr>
         <p:spPr>
           <a:xfrm>
-            <a:off x="457200" y="1005840"/>
-            <a:ext cx="54864" cy="914400"/>
+            <a:off x="731520" y="1005840"/>
+            <a:ext cx="1828800" cy="914400"/>
           </a:xfrm>
           <a:prstGeom prst="rect">
             <a:avLst/>
@@ -8582,14 +8226,371 @@
       </p:sp>
       <p:sp>
         <p:nvSpPr>
-          <p:cNvPr id="5" name="Rectangle 4"/>
+          <p:cNvPr id="5" name="TextBox 4"/>
+          <p:cNvSpPr txBox="1"/>
+          <p:nvPr/>
+        </p:nvSpPr>
+        <p:spPr>
+          <a:xfrm>
+            <a:off x="731520" y="1097280"/>
+            <a:ext cx="1828800" cy="640080"/>
+          </a:xfrm>
+          <a:prstGeom prst="rect">
+            <a:avLst/>
+          </a:prstGeom>
+          <a:noFill/>
+        </p:spPr>
+        <p:txBody>
+          <a:bodyPr wrap="square" lIns="45720" rIns="45720" tIns="27432" bIns="27432">
+            <a:spAutoFit/>
+          </a:bodyPr>
+          <a:lstStyle/>
+          <a:p>
+            <a:pPr algn="ctr">
+              <a:defRPr sz="1800" b="1">
+                <a:solidFill>
+                  <a:srgbClr val="0D2B3E"/>
+                </a:solidFill>
+                <a:latin typeface="Calibri"/>
+              </a:defRPr>
+            </a:pPr>
+            <a:r>
+              <a:t>今週</a:t>
+            </a:r>
+          </a:p>
+        </p:txBody>
+      </p:sp>
+      <p:sp>
+        <p:nvSpPr>
+          <p:cNvPr id="6" name="TextBox 5"/>
+          <p:cNvSpPr txBox="1"/>
+          <p:nvPr/>
+        </p:nvSpPr>
+        <p:spPr>
+          <a:xfrm>
+            <a:off x="2743200" y="1097280"/>
+            <a:ext cx="5943600" cy="822960"/>
+          </a:xfrm>
+          <a:prstGeom prst="rect">
+            <a:avLst/>
+          </a:prstGeom>
+          <a:noFill/>
+        </p:spPr>
+        <p:txBody>
+          <a:bodyPr wrap="square" lIns="45720" rIns="45720" tIns="27432" bIns="27432">
+            <a:spAutoFit/>
+          </a:bodyPr>
+          <a:lstStyle/>
+          <a:p>
+            <a:pPr algn="l">
+              <a:defRPr sz="1300" b="0">
+                <a:solidFill>
+                  <a:srgbClr val="1A1A2E"/>
+                </a:solidFill>
+                <a:latin typeface="Calibri"/>
+              </a:defRPr>
+            </a:pPr>
+            <a:r>
+              <a:t>マイナ保険証利用率を確認する</a:t>
+            </a:r>
+            <a:br/>
+            <a:r>
+              <a:t>→ 区分1（15点）に届くか？</a:t>
+            </a:r>
+          </a:p>
+        </p:txBody>
+      </p:sp>
+      <p:sp>
+        <p:nvSpPr>
+          <p:cNvPr id="7" name="Rectangle 6"/>
           <p:cNvSpPr/>
           <p:nvPr/>
         </p:nvSpPr>
         <p:spPr>
           <a:xfrm>
-            <a:off x="566928" y="1005840"/>
-            <a:ext cx="8119872" cy="914400"/>
+            <a:off x="731520" y="2194560"/>
+            <a:ext cx="1828800" cy="914400"/>
+          </a:xfrm>
+          <a:prstGeom prst="rect">
+            <a:avLst/>
+          </a:prstGeom>
+          <a:solidFill>
+            <a:srgbClr val="E89B3B"/>
+          </a:solidFill>
+          <a:ln>
+            <a:noFill/>
+          </a:ln>
+        </p:spPr>
+        <p:style>
+          <a:lnRef idx="1">
+            <a:schemeClr val="accent1"/>
+          </a:lnRef>
+          <a:fillRef idx="3">
+            <a:schemeClr val="accent1"/>
+          </a:fillRef>
+          <a:effectRef idx="2">
+            <a:schemeClr val="accent1"/>
+          </a:effectRef>
+          <a:fontRef idx="minor">
+            <a:schemeClr val="lt1"/>
+          </a:fontRef>
+        </p:style>
+        <p:txBody>
+          <a:bodyPr rtlCol="0" anchor="ctr"/>
+          <a:lstStyle/>
+          <a:p>
+            <a:pPr algn="ctr"/>
+          </a:p>
+        </p:txBody>
+      </p:sp>
+      <p:sp>
+        <p:nvSpPr>
+          <p:cNvPr id="8" name="TextBox 7"/>
+          <p:cNvSpPr txBox="1"/>
+          <p:nvPr/>
+        </p:nvSpPr>
+        <p:spPr>
+          <a:xfrm>
+            <a:off x="731520" y="2286000"/>
+            <a:ext cx="1828800" cy="640080"/>
+          </a:xfrm>
+          <a:prstGeom prst="rect">
+            <a:avLst/>
+          </a:prstGeom>
+          <a:noFill/>
+        </p:spPr>
+        <p:txBody>
+          <a:bodyPr wrap="square" lIns="45720" rIns="45720" tIns="27432" bIns="27432">
+            <a:spAutoFit/>
+          </a:bodyPr>
+          <a:lstStyle/>
+          <a:p>
+            <a:pPr algn="ctr">
+              <a:defRPr sz="1800" b="1">
+                <a:solidFill>
+                  <a:srgbClr val="0D2B3E"/>
+                </a:solidFill>
+                <a:latin typeface="Calibri"/>
+              </a:defRPr>
+            </a:pPr>
+            <a:r>
+              <a:t>来月</a:t>
+            </a:r>
+          </a:p>
+        </p:txBody>
+      </p:sp>
+      <p:sp>
+        <p:nvSpPr>
+          <p:cNvPr id="9" name="TextBox 8"/>
+          <p:cNvSpPr txBox="1"/>
+          <p:nvPr/>
+        </p:nvSpPr>
+        <p:spPr>
+          <a:xfrm>
+            <a:off x="2743200" y="2286000"/>
+            <a:ext cx="5943600" cy="822960"/>
+          </a:xfrm>
+          <a:prstGeom prst="rect">
+            <a:avLst/>
+          </a:prstGeom>
+          <a:noFill/>
+        </p:spPr>
+        <p:txBody>
+          <a:bodyPr wrap="square" lIns="45720" rIns="45720" tIns="27432" bIns="27432">
+            <a:spAutoFit/>
+          </a:bodyPr>
+          <a:lstStyle/>
+          <a:p>
+            <a:pPr algn="l">
+              <a:defRPr sz="1300" b="0">
+                <a:solidFill>
+                  <a:srgbClr val="1A1A2E"/>
+                </a:solidFill>
+                <a:latin typeface="Calibri"/>
+              </a:defRPr>
+            </a:pPr>
+            <a:r>
+              <a:t>BCP策定の現状を上司に確認する</a:t>
+            </a:r>
+            <a:br/>
+            <a:r>
+              <a:t>→ 未着手なら着手を提案</a:t>
+            </a:r>
+          </a:p>
+        </p:txBody>
+      </p:sp>
+      <p:sp>
+        <p:nvSpPr>
+          <p:cNvPr id="10" name="Rectangle 9"/>
+          <p:cNvSpPr/>
+          <p:nvPr/>
+        </p:nvSpPr>
+        <p:spPr>
+          <a:xfrm>
+            <a:off x="731520" y="3383280"/>
+            <a:ext cx="1828800" cy="914400"/>
+          </a:xfrm>
+          <a:prstGeom prst="rect">
+            <a:avLst/>
+          </a:prstGeom>
+          <a:solidFill>
+            <a:srgbClr val="E89B3B"/>
+          </a:solidFill>
+          <a:ln>
+            <a:noFill/>
+          </a:ln>
+        </p:spPr>
+        <p:style>
+          <a:lnRef idx="1">
+            <a:schemeClr val="accent1"/>
+          </a:lnRef>
+          <a:fillRef idx="3">
+            <a:schemeClr val="accent1"/>
+          </a:fillRef>
+          <a:effectRef idx="2">
+            <a:schemeClr val="accent1"/>
+          </a:effectRef>
+          <a:fontRef idx="minor">
+            <a:schemeClr val="lt1"/>
+          </a:fontRef>
+        </p:style>
+        <p:txBody>
+          <a:bodyPr rtlCol="0" anchor="ctr"/>
+          <a:lstStyle/>
+          <a:p>
+            <a:pPr algn="ctr"/>
+          </a:p>
+        </p:txBody>
+      </p:sp>
+      <p:sp>
+        <p:nvSpPr>
+          <p:cNvPr id="11" name="TextBox 10"/>
+          <p:cNvSpPr txBox="1"/>
+          <p:nvPr/>
+        </p:nvSpPr>
+        <p:spPr>
+          <a:xfrm>
+            <a:off x="731520" y="3474720"/>
+            <a:ext cx="1828800" cy="640080"/>
+          </a:xfrm>
+          <a:prstGeom prst="rect">
+            <a:avLst/>
+          </a:prstGeom>
+          <a:noFill/>
+        </p:spPr>
+        <p:txBody>
+          <a:bodyPr wrap="square" lIns="45720" rIns="45720" tIns="27432" bIns="27432">
+            <a:spAutoFit/>
+          </a:bodyPr>
+          <a:lstStyle/>
+          <a:p>
+            <a:pPr algn="ctr">
+              <a:defRPr sz="1800" b="1">
+                <a:solidFill>
+                  <a:srgbClr val="0D2B3E"/>
+                </a:solidFill>
+                <a:latin typeface="Calibri"/>
+              </a:defRPr>
+            </a:pPr>
+            <a:r>
+              <a:t>6月まで</a:t>
+            </a:r>
+          </a:p>
+        </p:txBody>
+      </p:sp>
+      <p:sp>
+        <p:nvSpPr>
+          <p:cNvPr id="12" name="TextBox 11"/>
+          <p:cNvSpPr txBox="1"/>
+          <p:nvPr/>
+        </p:nvSpPr>
+        <p:spPr>
+          <a:xfrm>
+            <a:off x="2743200" y="3474720"/>
+            <a:ext cx="5943600" cy="822960"/>
+          </a:xfrm>
+          <a:prstGeom prst="rect">
+            <a:avLst/>
+          </a:prstGeom>
+          <a:noFill/>
+        </p:spPr>
+        <p:txBody>
+          <a:bodyPr wrap="square" lIns="45720" rIns="45720" tIns="27432" bIns="27432">
+            <a:spAutoFit/>
+          </a:bodyPr>
+          <a:lstStyle/>
+          <a:p>
+            <a:pPr algn="l">
+              <a:defRPr sz="1300" b="0">
+                <a:solidFill>
+                  <a:srgbClr val="1A1A2E"/>
+                </a:solidFill>
+                <a:latin typeface="Calibri"/>
+              </a:defRPr>
+            </a:pPr>
+            <a:r>
+              <a:t>自分の診療設定での算定変更を1つ把握する</a:t>
+            </a:r>
+            <a:br/>
+            <a:r>
+              <a:t>→ チートシート（配布資料）を参照</a:t>
+            </a:r>
+          </a:p>
+        </p:txBody>
+      </p:sp>
+      <p:sp>
+        <p:nvSpPr>
+          <p:cNvPr id="13" name="Rectangle 12"/>
+          <p:cNvSpPr/>
+          <p:nvPr/>
+        </p:nvSpPr>
+        <p:spPr>
+          <a:xfrm>
+            <a:off x="457200" y="4572000"/>
+            <a:ext cx="54864" cy="365760"/>
+          </a:xfrm>
+          <a:prstGeom prst="rect">
+            <a:avLst/>
+          </a:prstGeom>
+          <a:solidFill>
+            <a:srgbClr val="E89B3B"/>
+          </a:solidFill>
+          <a:ln>
+            <a:noFill/>
+          </a:ln>
+        </p:spPr>
+        <p:style>
+          <a:lnRef idx="1">
+            <a:schemeClr val="accent1"/>
+          </a:lnRef>
+          <a:fillRef idx="3">
+            <a:schemeClr val="accent1"/>
+          </a:fillRef>
+          <a:effectRef idx="2">
+            <a:schemeClr val="accent1"/>
+          </a:effectRef>
+          <a:fontRef idx="minor">
+            <a:schemeClr val="lt1"/>
+          </a:fontRef>
+        </p:style>
+        <p:txBody>
+          <a:bodyPr rtlCol="0" anchor="ctr"/>
+          <a:lstStyle/>
+          <a:p>
+            <a:pPr algn="ctr"/>
+          </a:p>
+        </p:txBody>
+      </p:sp>
+      <p:sp>
+        <p:nvSpPr>
+          <p:cNvPr id="14" name="Rectangle 13"/>
+          <p:cNvSpPr/>
+          <p:nvPr/>
+        </p:nvSpPr>
+        <p:spPr>
+          <a:xfrm>
+            <a:off x="566928" y="4572000"/>
+            <a:ext cx="8119872" cy="365760"/>
           </a:xfrm>
           <a:prstGeom prst="rect">
             <a:avLst/>
@@ -8627,14 +8628,14 @@
       </p:sp>
       <p:sp>
         <p:nvSpPr>
-          <p:cNvPr id="6" name="TextBox 5"/>
+          <p:cNvPr id="15" name="TextBox 14"/>
           <p:cNvSpPr txBox="1"/>
           <p:nvPr/>
         </p:nvSpPr>
         <p:spPr>
           <a:xfrm>
-            <a:off x="685800" y="1078992"/>
-            <a:ext cx="7863840" cy="768096"/>
+            <a:off x="685800" y="4645152"/>
+            <a:ext cx="7863840" cy="219456"/>
           </a:xfrm>
           <a:prstGeom prst="rect">
             <a:avLst/>
@@ -8648,7 +8649,7 @@
           <a:lstStyle/>
           <a:p>
             <a:pPr algn="l">
-              <a:defRPr sz="1300" b="0">
+              <a:defRPr sz="1000" b="0">
                 <a:solidFill>
                   <a:srgbClr val="1A1A2E"/>
                 </a:solidFill>
@@ -8656,155 +8657,7 @@
               </a:defRPr>
             </a:pPr>
             <a:r>
-              <a:t>あなたは地方の200床の病院で総合診療科の専攻医です。</a:t>
-            </a:r>
-            <a:br/>
-            <a:r>
-              <a:t>院長から「今回の改定で当院がとるべきアクションをまとめてほしい」と言われました。</a:t>
-            </a:r>
-          </a:p>
-        </p:txBody>
-      </p:sp>
-      <p:sp>
-        <p:nvSpPr>
-          <p:cNvPr id="7" name="TextBox 6"/>
-          <p:cNvSpPr txBox="1"/>
-          <p:nvPr/>
-        </p:nvSpPr>
-        <p:spPr>
-          <a:xfrm>
-            <a:off x="914400" y="2194560"/>
-            <a:ext cx="7315200" cy="365760"/>
-          </a:xfrm>
-          <a:prstGeom prst="rect">
-            <a:avLst/>
-          </a:prstGeom>
-          <a:noFill/>
-        </p:spPr>
-        <p:txBody>
-          <a:bodyPr wrap="square" lIns="45720" rIns="45720" tIns="27432" bIns="27432">
-            <a:spAutoFit/>
-          </a:bodyPr>
-          <a:lstStyle/>
-          <a:p>
-            <a:pPr algn="l">
-              <a:defRPr sz="1500" b="1">
-                <a:solidFill>
-                  <a:srgbClr val="E89B3B"/>
-                </a:solidFill>
-                <a:latin typeface="Calibri"/>
-              </a:defRPr>
-            </a:pPr>
-            <a:r>
-              <a:t>問い1: 外来部門で最優先で対応すべき改定項目は何か？</a:t>
-            </a:r>
-          </a:p>
-        </p:txBody>
-      </p:sp>
-      <p:sp>
-        <p:nvSpPr>
-          <p:cNvPr id="8" name="TextBox 7"/>
-          <p:cNvSpPr txBox="1"/>
-          <p:nvPr/>
-        </p:nvSpPr>
-        <p:spPr>
-          <a:xfrm>
-            <a:off x="914400" y="2697480"/>
-            <a:ext cx="7315200" cy="365760"/>
-          </a:xfrm>
-          <a:prstGeom prst="rect">
-            <a:avLst/>
-          </a:prstGeom>
-          <a:noFill/>
-        </p:spPr>
-        <p:txBody>
-          <a:bodyPr wrap="square" lIns="45720" rIns="45720" tIns="27432" bIns="27432">
-            <a:spAutoFit/>
-          </a:bodyPr>
-          <a:lstStyle/>
-          <a:p>
-            <a:pPr algn="l">
-              <a:defRPr sz="1500" b="1">
-                <a:solidFill>
-                  <a:srgbClr val="E89B3B"/>
-                </a:solidFill>
-                <a:latin typeface="Calibri"/>
-              </a:defRPr>
-            </a:pPr>
-            <a:r>
-              <a:t>問い2: 入院部門（地域包括医療病棟）でどの区分を目指すべきか？</a:t>
-            </a:r>
-          </a:p>
-        </p:txBody>
-      </p:sp>
-      <p:sp>
-        <p:nvSpPr>
-          <p:cNvPr id="9" name="TextBox 8"/>
-          <p:cNvSpPr txBox="1"/>
-          <p:nvPr/>
-        </p:nvSpPr>
-        <p:spPr>
-          <a:xfrm>
-            <a:off x="914400" y="3200400"/>
-            <a:ext cx="7315200" cy="365760"/>
-          </a:xfrm>
-          <a:prstGeom prst="rect">
-            <a:avLst/>
-          </a:prstGeom>
-          <a:noFill/>
-        </p:spPr>
-        <p:txBody>
-          <a:bodyPr wrap="square" lIns="45720" rIns="45720" tIns="27432" bIns="27432">
-            <a:spAutoFit/>
-          </a:bodyPr>
-          <a:lstStyle/>
-          <a:p>
-            <a:pPr algn="l">
-              <a:defRPr sz="1500" b="1">
-                <a:solidFill>
-                  <a:srgbClr val="E89B3B"/>
-                </a:solidFill>
-                <a:latin typeface="Calibri"/>
-              </a:defRPr>
-            </a:pPr>
-            <a:r>
-              <a:t>問い3: 救急部門で新しく算定できる加算は何か？</a:t>
-            </a:r>
-          </a:p>
-        </p:txBody>
-      </p:sp>
-      <p:sp>
-        <p:nvSpPr>
-          <p:cNvPr id="10" name="TextBox 9"/>
-          <p:cNvSpPr txBox="1"/>
-          <p:nvPr/>
-        </p:nvSpPr>
-        <p:spPr>
-          <a:xfrm>
-            <a:off x="457200" y="4206240"/>
-            <a:ext cx="8229600" cy="457200"/>
-          </a:xfrm>
-          <a:prstGeom prst="rect">
-            <a:avLst/>
-          </a:prstGeom>
-          <a:noFill/>
-        </p:spPr>
-        <p:txBody>
-          <a:bodyPr wrap="square" lIns="45720" rIns="45720" tIns="27432" bIns="27432">
-            <a:spAutoFit/>
-          </a:bodyPr>
-          <a:lstStyle/>
-          <a:p>
-            <a:pPr algn="ctr">
-              <a:defRPr sz="1600" b="0">
-                <a:solidFill>
-                  <a:srgbClr val="7A8A9A"/>
-                </a:solidFill>
-                <a:latin typeface="Calibri"/>
-              </a:defRPr>
-            </a:pPr>
-            <a:r>
-              <a:t>ペアワーク 3分  →  2-3ペアからシェア</a:t>
+              <a:t>詳細は配布チートシート（DOCX）を確認してください</a:t>
             </a:r>
           </a:p>
         </p:txBody>
